--- a/2024/2024-04-19-AI-Updates.pptx
+++ b/2024/2024-04-19-AI-Updates.pptx
@@ -977,7 +977,7 @@
   <p:cSld>
     <p:spTree>
       <p:nvGrpSpPr>
-        <p:cNvPr id="1" name="Shape 133"/>
+        <p:cNvPr id="1" name="Shape 138"/>
         <p:cNvGrpSpPr/>
         <p:nvPr/>
       </p:nvGrpSpPr>
@@ -991,7 +991,7 @@
       </p:grpSpPr>
       <p:sp>
         <p:nvSpPr>
-          <p:cNvPr id="134" name="Google Shape;134;g2cd9958342c_0_0:notes"/>
+          <p:cNvPr id="139" name="Google Shape;139;g2cd9958342c_0_0:notes"/>
           <p:cNvSpPr>
             <a:spLocks noGrp="1" noRot="1" noChangeAspect="1"/>
           </p:cNvSpPr>
@@ -1042,7 +1042,7 @@
       </p:sp>
       <p:sp>
         <p:nvSpPr>
-          <p:cNvPr id="135" name="Google Shape;135;g2cd9958342c_0_0:notes"/>
+          <p:cNvPr id="140" name="Google Shape;140;g2cd9958342c_0_0:notes"/>
           <p:cNvSpPr txBox="1">
             <a:spLocks noGrp="1"/>
           </p:cNvSpPr>
@@ -1099,7 +1099,7 @@
   <p:cSld>
     <p:spTree>
       <p:nvGrpSpPr>
-        <p:cNvPr id="1" name="Shape 145"/>
+        <p:cNvPr id="1" name="Shape 150"/>
         <p:cNvGrpSpPr/>
         <p:nvPr/>
       </p:nvGrpSpPr>
@@ -1113,7 +1113,7 @@
       </p:grpSpPr>
       <p:sp>
         <p:nvSpPr>
-          <p:cNvPr id="146" name="Google Shape;146;g2cc7fb2b9da_0_2:notes"/>
+          <p:cNvPr id="151" name="Google Shape;151;g1f7b868f3bd_0_19:notes"/>
           <p:cNvSpPr>
             <a:spLocks noGrp="1" noRot="1" noChangeAspect="1"/>
           </p:cNvSpPr>
@@ -1164,7 +1164,7 @@
       </p:sp>
       <p:sp>
         <p:nvSpPr>
-          <p:cNvPr id="147" name="Google Shape;147;g2cc7fb2b9da_0_2:notes"/>
+          <p:cNvPr id="152" name="Google Shape;152;g1f7b868f3bd_0_19:notes"/>
           <p:cNvSpPr txBox="1">
             <a:spLocks noGrp="1"/>
           </p:cNvSpPr>
@@ -1221,7 +1221,7 @@
   <p:cSld>
     <p:spTree>
       <p:nvGrpSpPr>
-        <p:cNvPr id="1" name="Shape 152"/>
+        <p:cNvPr id="1" name="Shape 158"/>
         <p:cNvGrpSpPr/>
         <p:nvPr/>
       </p:nvGrpSpPr>
@@ -1235,7 +1235,7 @@
       </p:grpSpPr>
       <p:sp>
         <p:nvSpPr>
-          <p:cNvPr id="153" name="Google Shape;153;g1f7b868f3bd_0_3:notes"/>
+          <p:cNvPr id="159" name="Google Shape;159;g2cc7fb2b9da_0_2:notes"/>
           <p:cNvSpPr>
             <a:spLocks noGrp="1" noRot="1" noChangeAspect="1"/>
           </p:cNvSpPr>
@@ -1286,7 +1286,7 @@
       </p:sp>
       <p:sp>
         <p:nvSpPr>
-          <p:cNvPr id="154" name="Google Shape;154;g1f7b868f3bd_0_3:notes"/>
+          <p:cNvPr id="160" name="Google Shape;160;g2cc7fb2b9da_0_2:notes"/>
           <p:cNvSpPr txBox="1">
             <a:spLocks noGrp="1"/>
           </p:cNvSpPr>
@@ -1343,7 +1343,7 @@
   <p:cSld>
     <p:spTree>
       <p:nvGrpSpPr>
-        <p:cNvPr id="1" name="Shape 160"/>
+        <p:cNvPr id="1" name="Shape 165"/>
         <p:cNvGrpSpPr/>
         <p:nvPr/>
       </p:nvGrpSpPr>
@@ -1357,7 +1357,7 @@
       </p:grpSpPr>
       <p:sp>
         <p:nvSpPr>
-          <p:cNvPr id="161" name="Google Shape;161;g1f7b868f3bd_0_19:notes"/>
+          <p:cNvPr id="166" name="Google Shape;166;g1f7b868f3bd_0_3:notes"/>
           <p:cNvSpPr>
             <a:spLocks noGrp="1" noRot="1" noChangeAspect="1"/>
           </p:cNvSpPr>
@@ -1408,7 +1408,7 @@
       </p:sp>
       <p:sp>
         <p:nvSpPr>
-          <p:cNvPr id="162" name="Google Shape;162;g1f7b868f3bd_0_19:notes"/>
+          <p:cNvPr id="167" name="Google Shape;167;g1f7b868f3bd_0_3:notes"/>
           <p:cNvSpPr txBox="1">
             <a:spLocks noGrp="1"/>
           </p:cNvSpPr>
@@ -1465,7 +1465,7 @@
   <p:cSld>
     <p:spTree>
       <p:nvGrpSpPr>
-        <p:cNvPr id="1" name="Shape 168"/>
+        <p:cNvPr id="1" name="Shape 173"/>
         <p:cNvGrpSpPr/>
         <p:nvPr/>
       </p:nvGrpSpPr>
@@ -1479,7 +1479,7 @@
       </p:grpSpPr>
       <p:sp>
         <p:nvSpPr>
-          <p:cNvPr id="169" name="Google Shape;169;g2cbe4fa55d1_0_0:notes"/>
+          <p:cNvPr id="174" name="Google Shape;174;g2cbe4fa55d1_0_0:notes"/>
           <p:cNvSpPr>
             <a:spLocks noGrp="1" noRot="1" noChangeAspect="1"/>
           </p:cNvSpPr>
@@ -1530,7 +1530,7 @@
       </p:sp>
       <p:sp>
         <p:nvSpPr>
-          <p:cNvPr id="170" name="Google Shape;170;g2cbe4fa55d1_0_0:notes"/>
+          <p:cNvPr id="175" name="Google Shape;175;g2cbe4fa55d1_0_0:notes"/>
           <p:cNvSpPr txBox="1">
             <a:spLocks noGrp="1"/>
           </p:cNvSpPr>
@@ -1587,7 +1587,7 @@
   <p:cSld>
     <p:spTree>
       <p:nvGrpSpPr>
-        <p:cNvPr id="1" name="Shape 178"/>
+        <p:cNvPr id="1" name="Shape 183"/>
         <p:cNvGrpSpPr/>
         <p:nvPr/>
       </p:nvGrpSpPr>
@@ -1601,7 +1601,7 @@
       </p:grpSpPr>
       <p:sp>
         <p:nvSpPr>
-          <p:cNvPr id="179" name="Google Shape;179;p20:notes"/>
+          <p:cNvPr id="184" name="Google Shape;184;p20:notes"/>
           <p:cNvSpPr>
             <a:spLocks noGrp="1" noRot="1" noChangeAspect="1"/>
           </p:cNvSpPr>
@@ -1652,7 +1652,7 @@
       </p:sp>
       <p:sp>
         <p:nvSpPr>
-          <p:cNvPr id="180" name="Google Shape;180;p20:notes"/>
+          <p:cNvPr id="185" name="Google Shape;185;p20:notes"/>
           <p:cNvSpPr txBox="1">
             <a:spLocks noGrp="1"/>
           </p:cNvSpPr>
@@ -1709,7 +1709,7 @@
   <p:cSld>
     <p:spTree>
       <p:nvGrpSpPr>
-        <p:cNvPr id="1" name="Shape 195"/>
+        <p:cNvPr id="1" name="Shape 194"/>
         <p:cNvGrpSpPr/>
         <p:nvPr/>
       </p:nvGrpSpPr>
@@ -1723,7 +1723,7 @@
       </p:grpSpPr>
       <p:sp>
         <p:nvSpPr>
-          <p:cNvPr id="196" name="Google Shape;196;p21:notes"/>
+          <p:cNvPr id="195" name="Google Shape;195;p21:notes"/>
           <p:cNvSpPr>
             <a:spLocks noGrp="1" noRot="1" noChangeAspect="1"/>
           </p:cNvSpPr>
@@ -1774,7 +1774,7 @@
       </p:sp>
       <p:sp>
         <p:nvSpPr>
-          <p:cNvPr id="197" name="Google Shape;197;p21:notes"/>
+          <p:cNvPr id="196" name="Google Shape;196;p21:notes"/>
           <p:cNvSpPr txBox="1">
             <a:spLocks noGrp="1"/>
           </p:cNvSpPr>
@@ -1831,7 +1831,7 @@
   <p:cSld>
     <p:spTree>
       <p:nvGrpSpPr>
-        <p:cNvPr id="1" name="Shape 205"/>
+        <p:cNvPr id="1" name="Shape 204"/>
         <p:cNvGrpSpPr/>
         <p:nvPr/>
       </p:nvGrpSpPr>
@@ -1845,7 +1845,7 @@
       </p:grpSpPr>
       <p:sp>
         <p:nvSpPr>
-          <p:cNvPr id="206" name="Google Shape;206;g2cbe4fa55d1_0_62:notes"/>
+          <p:cNvPr id="205" name="Google Shape;205;g2cbe4fa55d1_0_62:notes"/>
           <p:cNvSpPr>
             <a:spLocks noGrp="1" noRot="1" noChangeAspect="1"/>
           </p:cNvSpPr>
@@ -1896,7 +1896,7 @@
       </p:sp>
       <p:sp>
         <p:nvSpPr>
-          <p:cNvPr id="207" name="Google Shape;207;g2cbe4fa55d1_0_62:notes"/>
+          <p:cNvPr id="206" name="Google Shape;206;g2cbe4fa55d1_0_62:notes"/>
           <p:cNvSpPr txBox="1">
             <a:spLocks noGrp="1"/>
           </p:cNvSpPr>
@@ -1953,7 +1953,7 @@
   <p:cSld>
     <p:spTree>
       <p:nvGrpSpPr>
-        <p:cNvPr id="1" name="Shape 216"/>
+        <p:cNvPr id="1" name="Shape 215"/>
         <p:cNvGrpSpPr/>
         <p:nvPr/>
       </p:nvGrpSpPr>
@@ -1967,7 +1967,7 @@
       </p:grpSpPr>
       <p:sp>
         <p:nvSpPr>
-          <p:cNvPr id="217" name="Google Shape;217;p22:notes"/>
+          <p:cNvPr id="216" name="Google Shape;216;p22:notes"/>
           <p:cNvSpPr>
             <a:spLocks noGrp="1" noRot="1" noChangeAspect="1"/>
           </p:cNvSpPr>
@@ -2018,7 +2018,7 @@
       </p:sp>
       <p:sp>
         <p:nvSpPr>
-          <p:cNvPr id="218" name="Google Shape;218;p22:notes"/>
+          <p:cNvPr id="217" name="Google Shape;217;p22:notes"/>
           <p:cNvSpPr txBox="1">
             <a:spLocks noGrp="1"/>
           </p:cNvSpPr>
@@ -2075,7 +2075,7 @@
   <p:cSld>
     <p:spTree>
       <p:nvGrpSpPr>
-        <p:cNvPr id="1" name="Shape 226"/>
+        <p:cNvPr id="1" name="Shape 225"/>
         <p:cNvGrpSpPr/>
         <p:nvPr/>
       </p:nvGrpSpPr>
@@ -2089,7 +2089,7 @@
       </p:grpSpPr>
       <p:sp>
         <p:nvSpPr>
-          <p:cNvPr id="227" name="Google Shape;227;p23:notes"/>
+          <p:cNvPr id="226" name="Google Shape;226;p23:notes"/>
           <p:cNvSpPr>
             <a:spLocks noGrp="1" noRot="1" noChangeAspect="1"/>
           </p:cNvSpPr>
@@ -2140,7 +2140,7 @@
       </p:sp>
       <p:sp>
         <p:nvSpPr>
-          <p:cNvPr id="228" name="Google Shape;228;p23:notes"/>
+          <p:cNvPr id="227" name="Google Shape;227;p23:notes"/>
           <p:cNvSpPr txBox="1">
             <a:spLocks noGrp="1"/>
           </p:cNvSpPr>
@@ -2319,7 +2319,7 @@
   <p:cSld>
     <p:spTree>
       <p:nvGrpSpPr>
-        <p:cNvPr id="1" name="Shape 74"/>
+        <p:cNvPr id="1" name="Shape 76"/>
         <p:cNvGrpSpPr/>
         <p:nvPr/>
       </p:nvGrpSpPr>
@@ -2333,7 +2333,7 @@
       </p:grpSpPr>
       <p:sp>
         <p:nvSpPr>
-          <p:cNvPr id="75" name="Google Shape;75;g2cdcbdffb72_0_0:notes"/>
+          <p:cNvPr id="77" name="Google Shape;77;g2cdcbdffb72_0_0:notes"/>
           <p:cNvSpPr>
             <a:spLocks noGrp="1" noRot="1" noChangeAspect="1"/>
           </p:cNvSpPr>
@@ -2384,7 +2384,7 @@
       </p:sp>
       <p:sp>
         <p:nvSpPr>
-          <p:cNvPr id="76" name="Google Shape;76;g2cdcbdffb72_0_0:notes"/>
+          <p:cNvPr id="78" name="Google Shape;78;g2cdcbdffb72_0_0:notes"/>
           <p:cNvSpPr txBox="1">
             <a:spLocks noGrp="1"/>
           </p:cNvSpPr>
@@ -2441,7 +2441,7 @@
   <p:cSld>
     <p:spTree>
       <p:nvGrpSpPr>
-        <p:cNvPr id="1" name="Shape 81"/>
+        <p:cNvPr id="1" name="Shape 85"/>
         <p:cNvGrpSpPr/>
         <p:nvPr/>
       </p:nvGrpSpPr>
@@ -2455,7 +2455,129 @@
       </p:grpSpPr>
       <p:sp>
         <p:nvSpPr>
-          <p:cNvPr id="82" name="Google Shape;82;g2cbe4fa55d1_0_68:notes"/>
+          <p:cNvPr id="86" name="Google Shape;86;g2cbe4fa55d1_0_68:notes"/>
+          <p:cNvSpPr>
+            <a:spLocks noGrp="1" noRot="1" noChangeAspect="1"/>
+          </p:cNvSpPr>
+          <p:nvPr>
+            <p:ph type="sldImg" idx="2"/>
+          </p:nvPr>
+        </p:nvSpPr>
+        <p:spPr>
+          <a:xfrm>
+            <a:off x="381000" y="685800"/>
+            <a:ext cx="6096000" cy="3429000"/>
+          </a:xfrm>
+          <a:custGeom>
+            <a:avLst/>
+            <a:gdLst/>
+            <a:ahLst/>
+            <a:cxnLst/>
+            <a:rect l="l" t="t" r="r" b="b"/>
+            <a:pathLst>
+              <a:path w="120000" h="120000" extrusionOk="0">
+                <a:moveTo>
+                  <a:pt x="0" y="0"/>
+                </a:moveTo>
+                <a:lnTo>
+                  <a:pt x="120000" y="0"/>
+                </a:lnTo>
+                <a:lnTo>
+                  <a:pt x="120000" y="120000"/>
+                </a:lnTo>
+                <a:lnTo>
+                  <a:pt x="0" y="120000"/>
+                </a:lnTo>
+                <a:close/>
+              </a:path>
+            </a:pathLst>
+          </a:custGeom>
+          <a:noFill/>
+          <a:ln w="9525" cap="flat" cmpd="sng">
+            <a:solidFill>
+              <a:srgbClr val="000000"/>
+            </a:solidFill>
+            <a:prstDash val="solid"/>
+            <a:round/>
+            <a:headEnd type="none" w="sm" len="sm"/>
+            <a:tailEnd type="none" w="sm" len="sm"/>
+          </a:ln>
+        </p:spPr>
+      </p:sp>
+      <p:sp>
+        <p:nvSpPr>
+          <p:cNvPr id="87" name="Google Shape;87;g2cbe4fa55d1_0_68:notes"/>
+          <p:cNvSpPr txBox="1">
+            <a:spLocks noGrp="1"/>
+          </p:cNvSpPr>
+          <p:nvPr>
+            <p:ph type="body" idx="1"/>
+          </p:nvPr>
+        </p:nvSpPr>
+        <p:spPr>
+          <a:xfrm>
+            <a:off x="685800" y="4343400"/>
+            <a:ext cx="5486400" cy="4114800"/>
+          </a:xfrm>
+          <a:prstGeom prst="rect">
+            <a:avLst/>
+          </a:prstGeom>
+          <a:noFill/>
+          <a:ln>
+            <a:noFill/>
+          </a:ln>
+        </p:spPr>
+        <p:txBody>
+          <a:bodyPr spcFirstLastPara="1" wrap="square" lIns="91425" tIns="91425" rIns="91425" bIns="91425" anchor="t" anchorCtr="0">
+            <a:noAutofit/>
+          </a:bodyPr>
+          <a:lstStyle/>
+          <a:p>
+            <a:pPr marL="0" lvl="0" indent="0" algn="l" rtl="0">
+              <a:lnSpc>
+                <a:spcPct val="100000"/>
+              </a:lnSpc>
+              <a:spcBef>
+                <a:spcPts val="0"/>
+              </a:spcBef>
+              <a:spcAft>
+                <a:spcPts val="0"/>
+              </a:spcAft>
+              <a:buSzPts val="1100"/>
+              <a:buNone/>
+            </a:pPr>
+            <a:endParaRPr/>
+          </a:p>
+        </p:txBody>
+      </p:sp>
+    </p:spTree>
+  </p:cSld>
+  <p:clrMapOvr>
+    <a:masterClrMapping/>
+  </p:clrMapOvr>
+</p:notes>
+</file>
+
+<file path=ppt/notesSlides/notesSlide5.xml><?xml version="1.0" encoding="utf-8"?>
+<p:notes xmlns:a="http://schemas.openxmlformats.org/drawingml/2006/main" xmlns:r="http://schemas.openxmlformats.org/officeDocument/2006/relationships" xmlns:p="http://schemas.openxmlformats.org/presentationml/2006/main" showMasterSp="0" showMasterPhAnim="0">
+  <p:cSld>
+    <p:spTree>
+      <p:nvGrpSpPr>
+        <p:cNvPr id="1" name="Shape 96"/>
+        <p:cNvGrpSpPr/>
+        <p:nvPr/>
+      </p:nvGrpSpPr>
+      <p:grpSpPr>
+        <a:xfrm>
+          <a:off x="0" y="0"/>
+          <a:ext cx="0" cy="0"/>
+          <a:chOff x="0" y="0"/>
+          <a:chExt cx="0" cy="0"/>
+        </a:xfrm>
+      </p:grpSpPr>
+      <p:sp>
+        <p:nvSpPr>
+          <p:cNvPr id="97" name="Google Shape;97;g2cd9958342c_1_5:notes"/>
           <p:cNvSpPr>
             <a:spLocks noGrp="1" noRot="1" noChangeAspect="1"/>
           </p:cNvSpPr>
@@ -2506,7 +2628,7 @@
       </p:sp>
       <p:sp>
         <p:nvSpPr>
-          <p:cNvPr id="83" name="Google Shape;83;g2cbe4fa55d1_0_68:notes"/>
+          <p:cNvPr id="98" name="Google Shape;98;g2cd9958342c_1_5:notes"/>
           <p:cNvSpPr txBox="1">
             <a:spLocks noGrp="1"/>
           </p:cNvSpPr>
@@ -2558,12 +2680,12 @@
 </p:notes>
 </file>
 
-<file path=ppt/notesSlides/notesSlide5.xml><?xml version="1.0" encoding="utf-8"?>
+<file path=ppt/notesSlides/notesSlide6.xml><?xml version="1.0" encoding="utf-8"?>
 <p:notes xmlns:a="http://schemas.openxmlformats.org/drawingml/2006/main" xmlns:r="http://schemas.openxmlformats.org/officeDocument/2006/relationships" xmlns:p="http://schemas.openxmlformats.org/presentationml/2006/main" showMasterSp="0" showMasterPhAnim="0">
   <p:cSld>
     <p:spTree>
       <p:nvGrpSpPr>
-        <p:cNvPr id="1" name="Shape 92"/>
+        <p:cNvPr id="1" name="Shape 103"/>
         <p:cNvGrpSpPr/>
         <p:nvPr/>
       </p:nvGrpSpPr>
@@ -2577,7 +2699,129 @@
       </p:grpSpPr>
       <p:sp>
         <p:nvSpPr>
-          <p:cNvPr id="93" name="Google Shape;93;g2cd9958342c_1_5:notes"/>
+          <p:cNvPr id="104" name="Google Shape;104;g2cbe4fa55d1_1_0:notes"/>
+          <p:cNvSpPr>
+            <a:spLocks noGrp="1" noRot="1" noChangeAspect="1"/>
+          </p:cNvSpPr>
+          <p:nvPr>
+            <p:ph type="sldImg" idx="2"/>
+          </p:nvPr>
+        </p:nvSpPr>
+        <p:spPr>
+          <a:xfrm>
+            <a:off x="381000" y="685800"/>
+            <a:ext cx="6096000" cy="3429000"/>
+          </a:xfrm>
+          <a:custGeom>
+            <a:avLst/>
+            <a:gdLst/>
+            <a:ahLst/>
+            <a:cxnLst/>
+            <a:rect l="l" t="t" r="r" b="b"/>
+            <a:pathLst>
+              <a:path w="120000" h="120000" extrusionOk="0">
+                <a:moveTo>
+                  <a:pt x="0" y="0"/>
+                </a:moveTo>
+                <a:lnTo>
+                  <a:pt x="120000" y="0"/>
+                </a:lnTo>
+                <a:lnTo>
+                  <a:pt x="120000" y="120000"/>
+                </a:lnTo>
+                <a:lnTo>
+                  <a:pt x="0" y="120000"/>
+                </a:lnTo>
+                <a:close/>
+              </a:path>
+            </a:pathLst>
+          </a:custGeom>
+          <a:noFill/>
+          <a:ln w="9525" cap="flat" cmpd="sng">
+            <a:solidFill>
+              <a:srgbClr val="000000"/>
+            </a:solidFill>
+            <a:prstDash val="solid"/>
+            <a:round/>
+            <a:headEnd type="none" w="sm" len="sm"/>
+            <a:tailEnd type="none" w="sm" len="sm"/>
+          </a:ln>
+        </p:spPr>
+      </p:sp>
+      <p:sp>
+        <p:nvSpPr>
+          <p:cNvPr id="105" name="Google Shape;105;g2cbe4fa55d1_1_0:notes"/>
+          <p:cNvSpPr txBox="1">
+            <a:spLocks noGrp="1"/>
+          </p:cNvSpPr>
+          <p:nvPr>
+            <p:ph type="body" idx="1"/>
+          </p:nvPr>
+        </p:nvSpPr>
+        <p:spPr>
+          <a:xfrm>
+            <a:off x="685800" y="4343400"/>
+            <a:ext cx="5486400" cy="4114800"/>
+          </a:xfrm>
+          <a:prstGeom prst="rect">
+            <a:avLst/>
+          </a:prstGeom>
+          <a:noFill/>
+          <a:ln>
+            <a:noFill/>
+          </a:ln>
+        </p:spPr>
+        <p:txBody>
+          <a:bodyPr spcFirstLastPara="1" wrap="square" lIns="91425" tIns="91425" rIns="91425" bIns="91425" anchor="t" anchorCtr="0">
+            <a:noAutofit/>
+          </a:bodyPr>
+          <a:lstStyle/>
+          <a:p>
+            <a:pPr marL="0" lvl="0" indent="0" algn="l" rtl="0">
+              <a:lnSpc>
+                <a:spcPct val="100000"/>
+              </a:lnSpc>
+              <a:spcBef>
+                <a:spcPts val="0"/>
+              </a:spcBef>
+              <a:spcAft>
+                <a:spcPts val="0"/>
+              </a:spcAft>
+              <a:buSzPts val="1100"/>
+              <a:buNone/>
+            </a:pPr>
+            <a:endParaRPr/>
+          </a:p>
+        </p:txBody>
+      </p:sp>
+    </p:spTree>
+  </p:cSld>
+  <p:clrMapOvr>
+    <a:masterClrMapping/>
+  </p:clrMapOvr>
+</p:notes>
+</file>
+
+<file path=ppt/notesSlides/notesSlide7.xml><?xml version="1.0" encoding="utf-8"?>
+<p:notes xmlns:a="http://schemas.openxmlformats.org/drawingml/2006/main" xmlns:r="http://schemas.openxmlformats.org/officeDocument/2006/relationships" xmlns:p="http://schemas.openxmlformats.org/presentationml/2006/main" showMasterSp="0" showMasterPhAnim="0">
+  <p:cSld>
+    <p:spTree>
+      <p:nvGrpSpPr>
+        <p:cNvPr id="1" name="Shape 110"/>
+        <p:cNvGrpSpPr/>
+        <p:nvPr/>
+      </p:nvGrpSpPr>
+      <p:grpSpPr>
+        <a:xfrm>
+          <a:off x="0" y="0"/>
+          <a:ext cx="0" cy="0"/>
+          <a:chOff x="0" y="0"/>
+          <a:chExt cx="0" cy="0"/>
+        </a:xfrm>
+      </p:grpSpPr>
+      <p:sp>
+        <p:nvSpPr>
+          <p:cNvPr id="111" name="Google Shape;111;g1f7ae246229_1_1:notes"/>
           <p:cNvSpPr>
             <a:spLocks noGrp="1" noRot="1" noChangeAspect="1"/>
           </p:cNvSpPr>
@@ -2628,7 +2872,7 @@
       </p:sp>
       <p:sp>
         <p:nvSpPr>
-          <p:cNvPr id="94" name="Google Shape;94;g2cd9958342c_1_5:notes"/>
+          <p:cNvPr id="112" name="Google Shape;112;g1f7ae246229_1_1:notes"/>
           <p:cNvSpPr txBox="1">
             <a:spLocks noGrp="1"/>
           </p:cNvSpPr>
@@ -2680,12 +2924,12 @@
 </p:notes>
 </file>
 
-<file path=ppt/notesSlides/notesSlide6.xml><?xml version="1.0" encoding="utf-8"?>
+<file path=ppt/notesSlides/notesSlide8.xml><?xml version="1.0" encoding="utf-8"?>
 <p:notes xmlns:a="http://schemas.openxmlformats.org/drawingml/2006/main" xmlns:r="http://schemas.openxmlformats.org/officeDocument/2006/relationships" xmlns:p="http://schemas.openxmlformats.org/presentationml/2006/main" showMasterSp="0" showMasterPhAnim="0">
   <p:cSld>
     <p:spTree>
       <p:nvGrpSpPr>
-        <p:cNvPr id="1" name="Shape 99"/>
+        <p:cNvPr id="1" name="Shape 120"/>
         <p:cNvGrpSpPr/>
         <p:nvPr/>
       </p:nvGrpSpPr>
@@ -2699,7 +2943,7 @@
       </p:grpSpPr>
       <p:sp>
         <p:nvSpPr>
-          <p:cNvPr id="100" name="Google Shape;100;g2cbe4fa55d1_1_0:notes"/>
+          <p:cNvPr id="121" name="Google Shape;121;g2cdbf9837f0_0_0:notes"/>
           <p:cNvSpPr>
             <a:spLocks noGrp="1" noRot="1" noChangeAspect="1"/>
           </p:cNvSpPr>
@@ -2750,7 +2994,7 @@
       </p:sp>
       <p:sp>
         <p:nvSpPr>
-          <p:cNvPr id="101" name="Google Shape;101;g2cbe4fa55d1_1_0:notes"/>
+          <p:cNvPr id="122" name="Google Shape;122;g2cdbf9837f0_0_0:notes"/>
           <p:cNvSpPr txBox="1">
             <a:spLocks noGrp="1"/>
           </p:cNvSpPr>
@@ -2802,12 +3046,12 @@
 </p:notes>
 </file>
 
-<file path=ppt/notesSlides/notesSlide7.xml><?xml version="1.0" encoding="utf-8"?>
+<file path=ppt/notesSlides/notesSlide9.xml><?xml version="1.0" encoding="utf-8"?>
 <p:notes xmlns:a="http://schemas.openxmlformats.org/drawingml/2006/main" xmlns:r="http://schemas.openxmlformats.org/officeDocument/2006/relationships" xmlns:p="http://schemas.openxmlformats.org/presentationml/2006/main" showMasterSp="0" showMasterPhAnim="0">
   <p:cSld>
     <p:spTree>
       <p:nvGrpSpPr>
-        <p:cNvPr id="1" name="Shape 106"/>
+        <p:cNvPr id="1" name="Shape 128"/>
         <p:cNvGrpSpPr/>
         <p:nvPr/>
       </p:nvGrpSpPr>
@@ -2821,7 +3065,7 @@
       </p:grpSpPr>
       <p:sp>
         <p:nvSpPr>
-          <p:cNvPr id="107" name="Google Shape;107;g1f7ae246229_1_1:notes"/>
+          <p:cNvPr id="129" name="Google Shape;129;g2cbe4fa55d1_0_56:notes"/>
           <p:cNvSpPr>
             <a:spLocks noGrp="1" noRot="1" noChangeAspect="1"/>
           </p:cNvSpPr>
@@ -2872,251 +3116,7 @@
       </p:sp>
       <p:sp>
         <p:nvSpPr>
-          <p:cNvPr id="108" name="Google Shape;108;g1f7ae246229_1_1:notes"/>
-          <p:cNvSpPr txBox="1">
-            <a:spLocks noGrp="1"/>
-          </p:cNvSpPr>
-          <p:nvPr>
-            <p:ph type="body" idx="1"/>
-          </p:nvPr>
-        </p:nvSpPr>
-        <p:spPr>
-          <a:xfrm>
-            <a:off x="685800" y="4343400"/>
-            <a:ext cx="5486400" cy="4114800"/>
-          </a:xfrm>
-          <a:prstGeom prst="rect">
-            <a:avLst/>
-          </a:prstGeom>
-          <a:noFill/>
-          <a:ln>
-            <a:noFill/>
-          </a:ln>
-        </p:spPr>
-        <p:txBody>
-          <a:bodyPr spcFirstLastPara="1" wrap="square" lIns="91425" tIns="91425" rIns="91425" bIns="91425" anchor="t" anchorCtr="0">
-            <a:noAutofit/>
-          </a:bodyPr>
-          <a:lstStyle/>
-          <a:p>
-            <a:pPr marL="0" lvl="0" indent="0" algn="l" rtl="0">
-              <a:lnSpc>
-                <a:spcPct val="100000"/>
-              </a:lnSpc>
-              <a:spcBef>
-                <a:spcPts val="0"/>
-              </a:spcBef>
-              <a:spcAft>
-                <a:spcPts val="0"/>
-              </a:spcAft>
-              <a:buSzPts val="1100"/>
-              <a:buNone/>
-            </a:pPr>
-            <a:endParaRPr/>
-          </a:p>
-        </p:txBody>
-      </p:sp>
-    </p:spTree>
-  </p:cSld>
-  <p:clrMapOvr>
-    <a:masterClrMapping/>
-  </p:clrMapOvr>
-</p:notes>
-</file>
-
-<file path=ppt/notesSlides/notesSlide8.xml><?xml version="1.0" encoding="utf-8"?>
-<p:notes xmlns:a="http://schemas.openxmlformats.org/drawingml/2006/main" xmlns:r="http://schemas.openxmlformats.org/officeDocument/2006/relationships" xmlns:p="http://schemas.openxmlformats.org/presentationml/2006/main" showMasterSp="0" showMasterPhAnim="0">
-  <p:cSld>
-    <p:spTree>
-      <p:nvGrpSpPr>
-        <p:cNvPr id="1" name="Shape 116"/>
-        <p:cNvGrpSpPr/>
-        <p:nvPr/>
-      </p:nvGrpSpPr>
-      <p:grpSpPr>
-        <a:xfrm>
-          <a:off x="0" y="0"/>
-          <a:ext cx="0" cy="0"/>
-          <a:chOff x="0" y="0"/>
-          <a:chExt cx="0" cy="0"/>
-        </a:xfrm>
-      </p:grpSpPr>
-      <p:sp>
-        <p:nvSpPr>
-          <p:cNvPr id="117" name="Google Shape;117;g2cdbf9837f0_0_0:notes"/>
-          <p:cNvSpPr>
-            <a:spLocks noGrp="1" noRot="1" noChangeAspect="1"/>
-          </p:cNvSpPr>
-          <p:nvPr>
-            <p:ph type="sldImg" idx="2"/>
-          </p:nvPr>
-        </p:nvSpPr>
-        <p:spPr>
-          <a:xfrm>
-            <a:off x="381300" y="685800"/>
-            <a:ext cx="6096000" cy="3429000"/>
-          </a:xfrm>
-          <a:custGeom>
-            <a:avLst/>
-            <a:gdLst/>
-            <a:ahLst/>
-            <a:cxnLst/>
-            <a:rect l="l" t="t" r="r" b="b"/>
-            <a:pathLst>
-              <a:path w="120000" h="120000" extrusionOk="0">
-                <a:moveTo>
-                  <a:pt x="0" y="0"/>
-                </a:moveTo>
-                <a:lnTo>
-                  <a:pt x="120000" y="0"/>
-                </a:lnTo>
-                <a:lnTo>
-                  <a:pt x="120000" y="120000"/>
-                </a:lnTo>
-                <a:lnTo>
-                  <a:pt x="0" y="120000"/>
-                </a:lnTo>
-                <a:close/>
-              </a:path>
-            </a:pathLst>
-          </a:custGeom>
-          <a:noFill/>
-          <a:ln w="9525" cap="flat" cmpd="sng">
-            <a:solidFill>
-              <a:srgbClr val="000000"/>
-            </a:solidFill>
-            <a:prstDash val="solid"/>
-            <a:round/>
-            <a:headEnd type="none" w="sm" len="sm"/>
-            <a:tailEnd type="none" w="sm" len="sm"/>
-          </a:ln>
-        </p:spPr>
-      </p:sp>
-      <p:sp>
-        <p:nvSpPr>
-          <p:cNvPr id="118" name="Google Shape;118;g2cdbf9837f0_0_0:notes"/>
-          <p:cNvSpPr txBox="1">
-            <a:spLocks noGrp="1"/>
-          </p:cNvSpPr>
-          <p:nvPr>
-            <p:ph type="body" idx="1"/>
-          </p:nvPr>
-        </p:nvSpPr>
-        <p:spPr>
-          <a:xfrm>
-            <a:off x="685800" y="4343400"/>
-            <a:ext cx="5486400" cy="4114800"/>
-          </a:xfrm>
-          <a:prstGeom prst="rect">
-            <a:avLst/>
-          </a:prstGeom>
-          <a:noFill/>
-          <a:ln>
-            <a:noFill/>
-          </a:ln>
-        </p:spPr>
-        <p:txBody>
-          <a:bodyPr spcFirstLastPara="1" wrap="square" lIns="91425" tIns="91425" rIns="91425" bIns="91425" anchor="t" anchorCtr="0">
-            <a:noAutofit/>
-          </a:bodyPr>
-          <a:lstStyle/>
-          <a:p>
-            <a:pPr marL="0" lvl="0" indent="0" algn="l" rtl="0">
-              <a:lnSpc>
-                <a:spcPct val="100000"/>
-              </a:lnSpc>
-              <a:spcBef>
-                <a:spcPts val="0"/>
-              </a:spcBef>
-              <a:spcAft>
-                <a:spcPts val="0"/>
-              </a:spcAft>
-              <a:buSzPts val="1100"/>
-              <a:buNone/>
-            </a:pPr>
-            <a:endParaRPr/>
-          </a:p>
-        </p:txBody>
-      </p:sp>
-    </p:spTree>
-  </p:cSld>
-  <p:clrMapOvr>
-    <a:masterClrMapping/>
-  </p:clrMapOvr>
-</p:notes>
-</file>
-
-<file path=ppt/notesSlides/notesSlide9.xml><?xml version="1.0" encoding="utf-8"?>
-<p:notes xmlns:a="http://schemas.openxmlformats.org/drawingml/2006/main" xmlns:r="http://schemas.openxmlformats.org/officeDocument/2006/relationships" xmlns:p="http://schemas.openxmlformats.org/presentationml/2006/main" showMasterSp="0" showMasterPhAnim="0">
-  <p:cSld>
-    <p:spTree>
-      <p:nvGrpSpPr>
-        <p:cNvPr id="1" name="Shape 123"/>
-        <p:cNvGrpSpPr/>
-        <p:nvPr/>
-      </p:nvGrpSpPr>
-      <p:grpSpPr>
-        <a:xfrm>
-          <a:off x="0" y="0"/>
-          <a:ext cx="0" cy="0"/>
-          <a:chOff x="0" y="0"/>
-          <a:chExt cx="0" cy="0"/>
-        </a:xfrm>
-      </p:grpSpPr>
-      <p:sp>
-        <p:nvSpPr>
-          <p:cNvPr id="124" name="Google Shape;124;g2cbe4fa55d1_0_56:notes"/>
-          <p:cNvSpPr>
-            <a:spLocks noGrp="1" noRot="1" noChangeAspect="1"/>
-          </p:cNvSpPr>
-          <p:nvPr>
-            <p:ph type="sldImg" idx="2"/>
-          </p:nvPr>
-        </p:nvSpPr>
-        <p:spPr>
-          <a:xfrm>
-            <a:off x="381300" y="685800"/>
-            <a:ext cx="6096000" cy="3429000"/>
-          </a:xfrm>
-          <a:custGeom>
-            <a:avLst/>
-            <a:gdLst/>
-            <a:ahLst/>
-            <a:cxnLst/>
-            <a:rect l="l" t="t" r="r" b="b"/>
-            <a:pathLst>
-              <a:path w="120000" h="120000" extrusionOk="0">
-                <a:moveTo>
-                  <a:pt x="0" y="0"/>
-                </a:moveTo>
-                <a:lnTo>
-                  <a:pt x="120000" y="0"/>
-                </a:lnTo>
-                <a:lnTo>
-                  <a:pt x="120000" y="120000"/>
-                </a:lnTo>
-                <a:lnTo>
-                  <a:pt x="0" y="120000"/>
-                </a:lnTo>
-                <a:close/>
-              </a:path>
-            </a:pathLst>
-          </a:custGeom>
-          <a:noFill/>
-          <a:ln w="9525" cap="flat" cmpd="sng">
-            <a:solidFill>
-              <a:srgbClr val="000000"/>
-            </a:solidFill>
-            <a:prstDash val="solid"/>
-            <a:round/>
-            <a:headEnd type="none" w="sm" len="sm"/>
-            <a:tailEnd type="none" w="sm" len="sm"/>
-          </a:ln>
-        </p:spPr>
-      </p:sp>
-      <p:sp>
-        <p:nvSpPr>
-          <p:cNvPr id="125" name="Google Shape;125;g2cbe4fa55d1_0_56:notes"/>
+          <p:cNvPr id="130" name="Google Shape;130;g2cbe4fa55d1_0_56:notes"/>
           <p:cNvSpPr txBox="1">
             <a:spLocks noGrp="1"/>
           </p:cNvSpPr>
@@ -12415,7 +12415,7 @@
   <p:cSld>
     <p:spTree>
       <p:nvGrpSpPr>
-        <p:cNvPr id="1" name="Shape 136"/>
+        <p:cNvPr id="1" name="Shape 141"/>
         <p:cNvGrpSpPr/>
         <p:nvPr/>
       </p:nvGrpSpPr>
@@ -12429,7 +12429,7 @@
       </p:grpSpPr>
       <p:sp>
         <p:nvSpPr>
-          <p:cNvPr id="137" name="Google Shape;137;p23"/>
+          <p:cNvPr id="142" name="Google Shape;142;p23"/>
           <p:cNvSpPr txBox="1"/>
           <p:nvPr/>
         </p:nvSpPr>
@@ -12487,7 +12487,7 @@
       </p:sp>
       <p:sp>
         <p:nvSpPr>
-          <p:cNvPr id="138" name="Google Shape;138;p23"/>
+          <p:cNvPr id="143" name="Google Shape;143;p23"/>
           <p:cNvSpPr txBox="1"/>
           <p:nvPr/>
         </p:nvSpPr>
@@ -12565,9 +12565,9 @@
               <a:buNone/>
             </a:pPr>
             <a:r>
-              <a:rPr lang="en" sz="1300">
-                <a:solidFill>
-                  <a:schemeClr val="dk1"/>
+              <a:rPr lang="en" sz="1300" b="1">
+                <a:solidFill>
+                  <a:srgbClr val="3C78D8"/>
                 </a:solidFill>
                 <a:latin typeface="Calibri"/>
                 <a:ea typeface="Calibri"/>
@@ -12576,9 +12576,9 @@
               </a:rPr>
               <a:t>Deploying AI Systems Securely</a:t>
             </a:r>
-            <a:endParaRPr sz="1300">
+            <a:endParaRPr sz="1300" b="1">
               <a:solidFill>
-                <a:schemeClr val="dk1"/>
+                <a:srgbClr val="3C78D8"/>
               </a:solidFill>
               <a:latin typeface="Calibri"/>
               <a:ea typeface="Calibri"/>
@@ -12597,9 +12597,9 @@
               <a:buNone/>
             </a:pPr>
             <a:r>
-              <a:rPr lang="en" sz="1300">
-                <a:solidFill>
-                  <a:schemeClr val="dk1"/>
+              <a:rPr lang="en" sz="1300" b="1">
+                <a:solidFill>
+                  <a:srgbClr val="3C78D8"/>
                 </a:solidFill>
                 <a:latin typeface="Calibri"/>
                 <a:ea typeface="Calibri"/>
@@ -12608,9 +12608,9 @@
               </a:rPr>
               <a:t>Best Practices for Deploying Secure and Resilient AI Systems</a:t>
             </a:r>
-            <a:endParaRPr sz="1300">
+            <a:endParaRPr sz="1300" b="1">
               <a:solidFill>
-                <a:schemeClr val="dk1"/>
+                <a:srgbClr val="3C78D8"/>
               </a:solidFill>
               <a:latin typeface="Calibri"/>
               <a:ea typeface="Calibri"/>
@@ -12664,7 +12664,7 @@
       </p:sp>
       <p:sp>
         <p:nvSpPr>
-          <p:cNvPr id="139" name="Google Shape;139;p23"/>
+          <p:cNvPr id="144" name="Google Shape;144;p23"/>
           <p:cNvSpPr txBox="1"/>
           <p:nvPr/>
         </p:nvSpPr>
@@ -12759,7 +12759,7 @@
       </p:sp>
       <p:sp>
         <p:nvSpPr>
-          <p:cNvPr id="140" name="Google Shape;140;p23"/>
+          <p:cNvPr id="145" name="Google Shape;145;p23"/>
           <p:cNvSpPr txBox="1"/>
           <p:nvPr/>
         </p:nvSpPr>
@@ -12826,7 +12826,19 @@
                 <a:cs typeface="Calibri"/>
                 <a:sym typeface="Calibri"/>
               </a:rPr>
-              <a:t>for frontier AI models like OpenAI’s GPT-4 and Google’s Gemini Ultra have reached up to $191 Mln</a:t>
+              <a:t>for frontier AI models like OpenAI’s GPT-4 and Google’s Gemini Ultra have reached up to </a:t>
+            </a:r>
+            <a:r>
+              <a:rPr lang="en" sz="1300" b="1">
+                <a:solidFill>
+                  <a:srgbClr val="FF0000"/>
+                </a:solidFill>
+                <a:latin typeface="Calibri"/>
+                <a:ea typeface="Calibri"/>
+                <a:cs typeface="Calibri"/>
+                <a:sym typeface="Calibri"/>
+              </a:rPr>
+              <a:t>$191 Mln</a:t>
             </a:r>
             <a:endParaRPr sz="700" b="1">
               <a:solidFill>
@@ -12842,14 +12854,14 @@
       </p:sp>
       <p:sp>
         <p:nvSpPr>
-          <p:cNvPr id="141" name="Google Shape;141;p23"/>
+          <p:cNvPr id="146" name="Google Shape;146;p23"/>
           <p:cNvSpPr txBox="1"/>
           <p:nvPr/>
         </p:nvSpPr>
         <p:spPr>
           <a:xfrm>
             <a:off x="76180" y="2116454"/>
-            <a:ext cx="4408800" cy="609600"/>
+            <a:ext cx="4408800" cy="594000"/>
           </a:xfrm>
           <a:prstGeom prst="rect">
             <a:avLst/>
@@ -12993,7 +13005,7 @@
               <a:buNone/>
             </a:pPr>
             <a:r>
-              <a:rPr lang="en" sz="1300">
+              <a:rPr lang="en" sz="1200">
                 <a:solidFill>
                   <a:schemeClr val="dk1"/>
                 </a:solidFill>
@@ -13002,19 +13014,7 @@
                 <a:cs typeface="Calibri"/>
                 <a:sym typeface="Calibri"/>
               </a:rPr>
-              <a:t>This is similar to EMO, but real time: </a:t>
-            </a:r>
-            <a:r>
-              <a:rPr lang="en" sz="1000">
-                <a:solidFill>
-                  <a:schemeClr val="dk1"/>
-                </a:solidFill>
-                <a:latin typeface="Calibri"/>
-                <a:ea typeface="Calibri"/>
-                <a:cs typeface="Calibri"/>
-                <a:sym typeface="Calibri"/>
-              </a:rPr>
-              <a:t> </a:t>
+              <a:t>This is similar to EMO, but real time:  </a:t>
             </a:r>
             <a:r>
               <a:rPr lang="en" sz="1000" u="sng">
@@ -13055,7 +13055,7 @@
       </p:sp>
       <p:pic>
         <p:nvPicPr>
-          <p:cNvPr id="142" name="Google Shape;142;p23"/>
+          <p:cNvPr id="147" name="Google Shape;147;p23"/>
           <p:cNvPicPr preferRelativeResize="0"/>
           <p:nvPr/>
         </p:nvPicPr>
@@ -13074,27 +13074,33 @@
         </p:blipFill>
         <p:spPr>
           <a:xfrm>
-            <a:off x="490911" y="3022976"/>
-            <a:ext cx="3443425" cy="1763749"/>
+            <a:off x="561425" y="2787575"/>
+            <a:ext cx="3039027" cy="1556601"/>
           </a:xfrm>
           <a:prstGeom prst="rect">
             <a:avLst/>
           </a:prstGeom>
           <a:noFill/>
-          <a:ln>
-            <a:noFill/>
+          <a:ln w="9525" cap="flat" cmpd="sng">
+            <a:solidFill>
+              <a:srgbClr val="FF0000"/>
+            </a:solidFill>
+            <a:prstDash val="solid"/>
+            <a:round/>
+            <a:headEnd type="none" w="sm" len="sm"/>
+            <a:tailEnd type="none" w="sm" len="sm"/>
           </a:ln>
         </p:spPr>
       </p:pic>
       <p:sp>
         <p:nvSpPr>
-          <p:cNvPr id="143" name="Google Shape;143;p23"/>
+          <p:cNvPr id="148" name="Google Shape;148;p23"/>
           <p:cNvSpPr txBox="1"/>
           <p:nvPr/>
         </p:nvSpPr>
         <p:spPr>
           <a:xfrm>
-            <a:off x="4653218" y="2066904"/>
+            <a:off x="4653218" y="1082279"/>
             <a:ext cx="4408800" cy="1117500"/>
           </a:xfrm>
           <a:prstGeom prst="rect">
@@ -13289,7 +13295,7 @@
       </p:sp>
       <p:pic>
         <p:nvPicPr>
-          <p:cNvPr id="144" name="Google Shape;144;p23"/>
+          <p:cNvPr id="149" name="Google Shape;149;p23"/>
           <p:cNvPicPr preferRelativeResize="0"/>
           <p:nvPr/>
         </p:nvPicPr>
@@ -13308,15 +13314,21 @@
         </p:blipFill>
         <p:spPr>
           <a:xfrm>
-            <a:off x="4653225" y="3231050"/>
-            <a:ext cx="4408801" cy="1857808"/>
+            <a:off x="5199625" y="2283450"/>
+            <a:ext cx="3315999" cy="1397324"/>
           </a:xfrm>
           <a:prstGeom prst="rect">
             <a:avLst/>
           </a:prstGeom>
           <a:noFill/>
-          <a:ln>
-            <a:noFill/>
+          <a:ln w="9525" cap="flat" cmpd="sng">
+            <a:solidFill>
+              <a:srgbClr val="FF0000"/>
+            </a:solidFill>
+            <a:prstDash val="solid"/>
+            <a:round/>
+            <a:headEnd type="none" w="sm" len="sm"/>
+            <a:tailEnd type="none" w="sm" len="sm"/>
           </a:ln>
         </p:spPr>
       </p:pic>
@@ -13333,7 +13345,7 @@
   <p:cSld>
     <p:spTree>
       <p:nvGrpSpPr>
-        <p:cNvPr id="1" name="Shape 148"/>
+        <p:cNvPr id="1" name="Shape 153"/>
         <p:cNvGrpSpPr/>
         <p:nvPr/>
       </p:nvGrpSpPr>
@@ -13347,7 +13359,1146 @@
       </p:grpSpPr>
       <p:sp>
         <p:nvSpPr>
-          <p:cNvPr id="149" name="Google Shape;149;p24"/>
+          <p:cNvPr id="154" name="Google Shape;154;p24"/>
+          <p:cNvSpPr txBox="1"/>
+          <p:nvPr/>
+        </p:nvSpPr>
+        <p:spPr>
+          <a:xfrm>
+            <a:off x="76200" y="388200"/>
+            <a:ext cx="4408800" cy="1656300"/>
+          </a:xfrm>
+          <a:prstGeom prst="rect">
+            <a:avLst/>
+          </a:prstGeom>
+          <a:solidFill>
+            <a:srgbClr val="FFF2CC"/>
+          </a:solidFill>
+          <a:ln w="9525" cap="flat" cmpd="sng">
+            <a:solidFill>
+              <a:srgbClr val="FF0000"/>
+            </a:solidFill>
+            <a:prstDash val="solid"/>
+            <a:round/>
+            <a:headEnd type="none" w="sm" len="sm"/>
+            <a:tailEnd type="none" w="sm" len="sm"/>
+          </a:ln>
+        </p:spPr>
+        <p:txBody>
+          <a:bodyPr spcFirstLastPara="1" wrap="square" lIns="27425" tIns="27425" rIns="27425" bIns="27425" anchor="t" anchorCtr="0">
+            <a:spAutoFit/>
+          </a:bodyPr>
+          <a:lstStyle/>
+          <a:p>
+            <a:pPr marL="0" lvl="0" indent="0" algn="l" rtl="0">
+              <a:spcBef>
+                <a:spcPts val="0"/>
+              </a:spcBef>
+              <a:spcAft>
+                <a:spcPts val="0"/>
+              </a:spcAft>
+              <a:buNone/>
+            </a:pPr>
+            <a:r>
+              <a:rPr lang="en" sz="1300" b="1">
+                <a:solidFill>
+                  <a:srgbClr val="FF0000"/>
+                </a:solidFill>
+                <a:latin typeface="Calibri"/>
+                <a:ea typeface="Calibri"/>
+                <a:cs typeface="Calibri"/>
+                <a:sym typeface="Calibri"/>
+              </a:rPr>
+              <a:t>ISO/IEC 42001</a:t>
+            </a:r>
+            <a:r>
+              <a:rPr lang="en" sz="1300">
+                <a:latin typeface="Calibri"/>
+                <a:ea typeface="Calibri"/>
+                <a:cs typeface="Calibri"/>
+                <a:sym typeface="Calibri"/>
+              </a:rPr>
+              <a:t> - </a:t>
+            </a:r>
+            <a:r>
+              <a:rPr lang="en" sz="1300">
+                <a:solidFill>
+                  <a:srgbClr val="3C78D8"/>
+                </a:solidFill>
+                <a:latin typeface="Calibri"/>
+                <a:ea typeface="Calibri"/>
+                <a:cs typeface="Calibri"/>
+                <a:sym typeface="Calibri"/>
+              </a:rPr>
+              <a:t>an international standard that specifies requirements for establishing, implementing, maintaining, and continually improving an Artificial Intelligence Management System (AIMS) within organizations.</a:t>
+            </a:r>
+            <a:r>
+              <a:rPr lang="en" sz="1300">
+                <a:latin typeface="Calibri"/>
+                <a:ea typeface="Calibri"/>
+                <a:cs typeface="Calibri"/>
+                <a:sym typeface="Calibri"/>
+              </a:rPr>
+              <a:t> </a:t>
+            </a:r>
+            <a:endParaRPr sz="1300">
+              <a:latin typeface="Calibri"/>
+              <a:ea typeface="Calibri"/>
+              <a:cs typeface="Calibri"/>
+              <a:sym typeface="Calibri"/>
+            </a:endParaRPr>
+          </a:p>
+          <a:p>
+            <a:pPr marL="0" lvl="0" indent="0" algn="l" rtl="0">
+              <a:spcBef>
+                <a:spcPts val="0"/>
+              </a:spcBef>
+              <a:spcAft>
+                <a:spcPts val="0"/>
+              </a:spcAft>
+              <a:buNone/>
+            </a:pPr>
+            <a:endParaRPr sz="1300">
+              <a:latin typeface="Calibri"/>
+              <a:ea typeface="Calibri"/>
+              <a:cs typeface="Calibri"/>
+              <a:sym typeface="Calibri"/>
+            </a:endParaRPr>
+          </a:p>
+          <a:p>
+            <a:pPr marL="0" lvl="0" indent="0" algn="l" rtl="0">
+              <a:spcBef>
+                <a:spcPts val="0"/>
+              </a:spcBef>
+              <a:spcAft>
+                <a:spcPts val="0"/>
+              </a:spcAft>
+              <a:buNone/>
+            </a:pPr>
+            <a:r>
+              <a:rPr lang="en" sz="1300">
+                <a:latin typeface="Calibri"/>
+                <a:ea typeface="Calibri"/>
+                <a:cs typeface="Calibri"/>
+                <a:sym typeface="Calibri"/>
+              </a:rPr>
+              <a:t>It is designed for entities providing or utilizing AI-based products or services, ensuring responsible development and use of AI systems. - </a:t>
+            </a:r>
+            <a:r>
+              <a:rPr lang="en" sz="1000" u="sng">
+                <a:solidFill>
+                  <a:schemeClr val="hlink"/>
+                </a:solidFill>
+                <a:latin typeface="Calibri"/>
+                <a:ea typeface="Calibri"/>
+                <a:cs typeface="Calibri"/>
+                <a:sym typeface="Calibri"/>
+                <a:hlinkClick r:id="rId3"/>
+              </a:rPr>
+              <a:t>https://www.iso.org/standard/81230.html</a:t>
+            </a:r>
+            <a:endParaRPr sz="1000">
+              <a:solidFill>
+                <a:schemeClr val="dk1"/>
+              </a:solidFill>
+              <a:latin typeface="Calibri"/>
+              <a:ea typeface="Calibri"/>
+              <a:cs typeface="Calibri"/>
+              <a:sym typeface="Calibri"/>
+            </a:endParaRPr>
+          </a:p>
+        </p:txBody>
+      </p:sp>
+      <p:sp>
+        <p:nvSpPr>
+          <p:cNvPr id="155" name="Google Shape;155;p24"/>
+          <p:cNvSpPr txBox="1"/>
+          <p:nvPr/>
+        </p:nvSpPr>
+        <p:spPr>
+          <a:xfrm>
+            <a:off x="76200" y="76200"/>
+            <a:ext cx="3772500" cy="295500"/>
+          </a:xfrm>
+          <a:prstGeom prst="rect">
+            <a:avLst/>
+          </a:prstGeom>
+          <a:noFill/>
+          <a:ln>
+            <a:noFill/>
+          </a:ln>
+        </p:spPr>
+        <p:txBody>
+          <a:bodyPr spcFirstLastPara="1" wrap="square" lIns="9125" tIns="9125" rIns="9125" bIns="9125" anchor="t" anchorCtr="0">
+            <a:spAutoFit/>
+          </a:bodyPr>
+          <a:lstStyle/>
+          <a:p>
+            <a:pPr marL="0" lvl="0" indent="0" algn="l" rtl="0">
+              <a:spcBef>
+                <a:spcPts val="0"/>
+              </a:spcBef>
+              <a:spcAft>
+                <a:spcPts val="0"/>
+              </a:spcAft>
+              <a:buNone/>
+            </a:pPr>
+            <a:r>
+              <a:rPr lang="en" sz="1800" b="1">
+                <a:solidFill>
+                  <a:srgbClr val="0F1419"/>
+                </a:solidFill>
+                <a:highlight>
+                  <a:srgbClr val="FFFFFF"/>
+                </a:highlight>
+                <a:latin typeface="Calibri"/>
+                <a:ea typeface="Calibri"/>
+                <a:cs typeface="Calibri"/>
+                <a:sym typeface="Calibri"/>
+              </a:rPr>
+              <a:t>Misc 3</a:t>
+            </a:r>
+            <a:endParaRPr sz="1800" b="1">
+              <a:solidFill>
+                <a:srgbClr val="0F1419"/>
+              </a:solidFill>
+              <a:highlight>
+                <a:srgbClr val="FFFFFF"/>
+              </a:highlight>
+              <a:latin typeface="Calibri"/>
+              <a:ea typeface="Calibri"/>
+              <a:cs typeface="Calibri"/>
+              <a:sym typeface="Calibri"/>
+            </a:endParaRPr>
+          </a:p>
+        </p:txBody>
+      </p:sp>
+      <p:sp>
+        <p:nvSpPr>
+          <p:cNvPr id="156" name="Google Shape;156;p24"/>
+          <p:cNvSpPr txBox="1"/>
+          <p:nvPr/>
+        </p:nvSpPr>
+        <p:spPr>
+          <a:xfrm>
+            <a:off x="4648200" y="388200"/>
+            <a:ext cx="4408800" cy="2010300"/>
+          </a:xfrm>
+          <a:prstGeom prst="rect">
+            <a:avLst/>
+          </a:prstGeom>
+          <a:solidFill>
+            <a:srgbClr val="FFF2CC"/>
+          </a:solidFill>
+          <a:ln w="9525" cap="flat" cmpd="sng">
+            <a:solidFill>
+              <a:srgbClr val="FF0000"/>
+            </a:solidFill>
+            <a:prstDash val="solid"/>
+            <a:round/>
+            <a:headEnd type="none" w="sm" len="sm"/>
+            <a:tailEnd type="none" w="sm" len="sm"/>
+          </a:ln>
+        </p:spPr>
+        <p:txBody>
+          <a:bodyPr spcFirstLastPara="1" wrap="square" lIns="27425" tIns="27425" rIns="27425" bIns="27425" anchor="t" anchorCtr="0">
+            <a:spAutoFit/>
+          </a:bodyPr>
+          <a:lstStyle/>
+          <a:p>
+            <a:pPr marL="0" lvl="0" indent="0" algn="l" rtl="0">
+              <a:spcBef>
+                <a:spcPts val="0"/>
+              </a:spcBef>
+              <a:spcAft>
+                <a:spcPts val="0"/>
+              </a:spcAft>
+              <a:buNone/>
+            </a:pPr>
+            <a:r>
+              <a:rPr lang="en" sz="1300" b="1">
+                <a:solidFill>
+                  <a:srgbClr val="FF0000"/>
+                </a:solidFill>
+                <a:latin typeface="Calibri"/>
+                <a:ea typeface="Calibri"/>
+                <a:cs typeface="Calibri"/>
+                <a:sym typeface="Calibri"/>
+              </a:rPr>
+              <a:t>Google’s new Infini-attention</a:t>
+            </a:r>
+            <a:r>
+              <a:rPr lang="en" sz="1300">
+                <a:latin typeface="Calibri"/>
+                <a:ea typeface="Calibri"/>
+                <a:cs typeface="Calibri"/>
+                <a:sym typeface="Calibri"/>
+              </a:rPr>
+              <a:t> - LLMs with infinite context</a:t>
+            </a:r>
+            <a:endParaRPr sz="1300">
+              <a:latin typeface="Calibri"/>
+              <a:ea typeface="Calibri"/>
+              <a:cs typeface="Calibri"/>
+              <a:sym typeface="Calibri"/>
+            </a:endParaRPr>
+          </a:p>
+          <a:p>
+            <a:pPr marL="0" lvl="0" indent="0" algn="l" rtl="0">
+              <a:spcBef>
+                <a:spcPts val="0"/>
+              </a:spcBef>
+              <a:spcAft>
+                <a:spcPts val="0"/>
+              </a:spcAft>
+              <a:buNone/>
+            </a:pPr>
+            <a:r>
+              <a:rPr lang="en" sz="1000" u="sng">
+                <a:solidFill>
+                  <a:schemeClr val="hlink"/>
+                </a:solidFill>
+                <a:latin typeface="Calibri"/>
+                <a:ea typeface="Calibri"/>
+                <a:cs typeface="Calibri"/>
+                <a:sym typeface="Calibri"/>
+                <a:hlinkClick r:id="rId4"/>
+              </a:rPr>
+              <a:t>https://venturebeat.com/ai/googles-new-technique-gives-llms-infinite-context/</a:t>
+            </a:r>
+            <a:r>
+              <a:rPr lang="en" sz="1000">
+                <a:latin typeface="Calibri"/>
+                <a:ea typeface="Calibri"/>
+                <a:cs typeface="Calibri"/>
+                <a:sym typeface="Calibri"/>
+              </a:rPr>
+              <a:t> </a:t>
+            </a:r>
+            <a:endParaRPr sz="1000">
+              <a:latin typeface="Calibri"/>
+              <a:ea typeface="Calibri"/>
+              <a:cs typeface="Calibri"/>
+              <a:sym typeface="Calibri"/>
+            </a:endParaRPr>
+          </a:p>
+          <a:p>
+            <a:pPr marL="0" lvl="0" indent="0" algn="l" rtl="0">
+              <a:spcBef>
+                <a:spcPts val="0"/>
+              </a:spcBef>
+              <a:spcAft>
+                <a:spcPts val="0"/>
+              </a:spcAft>
+              <a:buNone/>
+            </a:pPr>
+            <a:endParaRPr sz="1300">
+              <a:latin typeface="Calibri"/>
+              <a:ea typeface="Calibri"/>
+              <a:cs typeface="Calibri"/>
+              <a:sym typeface="Calibri"/>
+            </a:endParaRPr>
+          </a:p>
+          <a:p>
+            <a:pPr marL="0" lvl="0" indent="0" algn="l" rtl="0">
+              <a:spcBef>
+                <a:spcPts val="0"/>
+              </a:spcBef>
+              <a:spcAft>
+                <a:spcPts val="0"/>
+              </a:spcAft>
+              <a:buNone/>
+            </a:pPr>
+            <a:r>
+              <a:rPr lang="en" sz="1300">
+                <a:solidFill>
+                  <a:schemeClr val="dk1"/>
+                </a:solidFill>
+                <a:latin typeface="Calibri"/>
+                <a:ea typeface="Calibri"/>
+                <a:cs typeface="Calibri"/>
+                <a:sym typeface="Calibri"/>
+              </a:rPr>
+              <a:t>Paper: </a:t>
+            </a:r>
+            <a:r>
+              <a:rPr lang="en" sz="1300">
+                <a:solidFill>
+                  <a:srgbClr val="3C78D8"/>
+                </a:solidFill>
+                <a:latin typeface="Calibri"/>
+                <a:ea typeface="Calibri"/>
+                <a:cs typeface="Calibri"/>
+                <a:sym typeface="Calibri"/>
+              </a:rPr>
+              <a:t>"Leave No Context Behind: Efficient Infinite Context Transformers with Infini-attention"</a:t>
+            </a:r>
+            <a:r>
+              <a:rPr lang="en" sz="1300">
+                <a:solidFill>
+                  <a:schemeClr val="dk1"/>
+                </a:solidFill>
+                <a:latin typeface="Calibri"/>
+                <a:ea typeface="Calibri"/>
+                <a:cs typeface="Calibri"/>
+                <a:sym typeface="Calibri"/>
+              </a:rPr>
+              <a:t> - </a:t>
+            </a:r>
+            <a:r>
+              <a:rPr lang="en" sz="1000">
+                <a:latin typeface="Calibri"/>
+                <a:ea typeface="Calibri"/>
+                <a:cs typeface="Calibri"/>
+                <a:sym typeface="Calibri"/>
+              </a:rPr>
+              <a:t> </a:t>
+            </a:r>
+            <a:r>
+              <a:rPr lang="en" sz="1000" u="sng">
+                <a:solidFill>
+                  <a:schemeClr val="hlink"/>
+                </a:solidFill>
+                <a:latin typeface="Calibri"/>
+                <a:ea typeface="Calibri"/>
+                <a:cs typeface="Calibri"/>
+                <a:sym typeface="Calibri"/>
+                <a:hlinkClick r:id="rId5"/>
+              </a:rPr>
+              <a:t>https://arxiv.org/abs/2404.07143</a:t>
+            </a:r>
+            <a:r>
+              <a:rPr lang="en" sz="1000">
+                <a:latin typeface="Calibri"/>
+                <a:ea typeface="Calibri"/>
+                <a:cs typeface="Calibri"/>
+                <a:sym typeface="Calibri"/>
+              </a:rPr>
+              <a:t> </a:t>
+            </a:r>
+            <a:endParaRPr sz="1000">
+              <a:latin typeface="Calibri"/>
+              <a:ea typeface="Calibri"/>
+              <a:cs typeface="Calibri"/>
+              <a:sym typeface="Calibri"/>
+            </a:endParaRPr>
+          </a:p>
+          <a:p>
+            <a:pPr marL="0" lvl="0" indent="0" algn="l" rtl="0">
+              <a:spcBef>
+                <a:spcPts val="0"/>
+              </a:spcBef>
+              <a:spcAft>
+                <a:spcPts val="0"/>
+              </a:spcAft>
+              <a:buNone/>
+            </a:pPr>
+            <a:endParaRPr sz="1300">
+              <a:latin typeface="Calibri"/>
+              <a:ea typeface="Calibri"/>
+              <a:cs typeface="Calibri"/>
+              <a:sym typeface="Calibri"/>
+            </a:endParaRPr>
+          </a:p>
+          <a:p>
+            <a:pPr marL="0" lvl="0" indent="0" algn="l" rtl="0">
+              <a:spcBef>
+                <a:spcPts val="0"/>
+              </a:spcBef>
+              <a:spcAft>
+                <a:spcPts val="0"/>
+              </a:spcAft>
+              <a:buNone/>
+            </a:pPr>
+            <a:r>
+              <a:rPr lang="en" sz="1300">
+                <a:latin typeface="Calibri"/>
+                <a:ea typeface="Calibri"/>
+                <a:cs typeface="Calibri"/>
+                <a:sym typeface="Calibri"/>
+              </a:rPr>
+              <a:t>Infini-attention retains and compresses the attention memory from all previous segments. This means in the same 500K document, each 100K window maintains access to the full document's context.</a:t>
+            </a:r>
+            <a:endParaRPr sz="1300">
+              <a:latin typeface="Calibri"/>
+              <a:ea typeface="Calibri"/>
+              <a:cs typeface="Calibri"/>
+              <a:sym typeface="Calibri"/>
+            </a:endParaRPr>
+          </a:p>
+        </p:txBody>
+      </p:sp>
+      <p:sp>
+        <p:nvSpPr>
+          <p:cNvPr id="157" name="Google Shape;157;p24"/>
+          <p:cNvSpPr txBox="1"/>
+          <p:nvPr/>
+        </p:nvSpPr>
+        <p:spPr>
+          <a:xfrm>
+            <a:off x="76200" y="2239325"/>
+            <a:ext cx="4408800" cy="2764500"/>
+          </a:xfrm>
+          <a:prstGeom prst="rect">
+            <a:avLst/>
+          </a:prstGeom>
+          <a:solidFill>
+            <a:srgbClr val="FFF2CC"/>
+          </a:solidFill>
+          <a:ln w="9525" cap="flat" cmpd="sng">
+            <a:solidFill>
+              <a:srgbClr val="FF0000"/>
+            </a:solidFill>
+            <a:prstDash val="solid"/>
+            <a:round/>
+            <a:headEnd type="none" w="sm" len="sm"/>
+            <a:tailEnd type="none" w="sm" len="sm"/>
+          </a:ln>
+        </p:spPr>
+        <p:txBody>
+          <a:bodyPr spcFirstLastPara="1" wrap="square" lIns="27425" tIns="27425" rIns="27425" bIns="27425" anchor="t" anchorCtr="0">
+            <a:spAutoFit/>
+          </a:bodyPr>
+          <a:lstStyle/>
+          <a:p>
+            <a:pPr marL="0" lvl="0" indent="0" algn="l" rtl="0">
+              <a:spcBef>
+                <a:spcPts val="0"/>
+              </a:spcBef>
+              <a:spcAft>
+                <a:spcPts val="0"/>
+              </a:spcAft>
+              <a:buClr>
+                <a:schemeClr val="dk1"/>
+              </a:buClr>
+              <a:buSzPts val="1100"/>
+              <a:buFont typeface="Arial"/>
+              <a:buNone/>
+            </a:pPr>
+            <a:r>
+              <a:rPr lang="en" sz="1300">
+                <a:latin typeface="Calibri"/>
+                <a:ea typeface="Calibri"/>
+                <a:cs typeface="Calibri"/>
+                <a:sym typeface="Calibri"/>
+              </a:rPr>
+              <a:t>"</a:t>
+            </a:r>
+            <a:r>
+              <a:rPr lang="en" sz="1300" b="1">
+                <a:solidFill>
+                  <a:srgbClr val="FF0000"/>
+                </a:solidFill>
+                <a:latin typeface="Calibri"/>
+                <a:ea typeface="Calibri"/>
+                <a:cs typeface="Calibri"/>
+                <a:sym typeface="Calibri"/>
+              </a:rPr>
+              <a:t>14 Ways to Use AI in Marketing that Actually Work</a:t>
+            </a:r>
+            <a:r>
+              <a:rPr lang="en" sz="1300">
+                <a:latin typeface="Calibri"/>
+                <a:ea typeface="Calibri"/>
+                <a:cs typeface="Calibri"/>
+                <a:sym typeface="Calibri"/>
+              </a:rPr>
+              <a:t> (Recommended by Pros!)" - by Rob Glover</a:t>
+            </a:r>
+            <a:endParaRPr sz="1300">
+              <a:latin typeface="Calibri"/>
+              <a:ea typeface="Calibri"/>
+              <a:cs typeface="Calibri"/>
+              <a:sym typeface="Calibri"/>
+            </a:endParaRPr>
+          </a:p>
+          <a:p>
+            <a:pPr marL="0" lvl="0" indent="0" algn="l" rtl="0">
+              <a:spcBef>
+                <a:spcPts val="0"/>
+              </a:spcBef>
+              <a:spcAft>
+                <a:spcPts val="0"/>
+              </a:spcAft>
+              <a:buNone/>
+            </a:pPr>
+            <a:r>
+              <a:rPr lang="en" sz="1000" u="sng">
+                <a:solidFill>
+                  <a:schemeClr val="hlink"/>
+                </a:solidFill>
+                <a:latin typeface="Calibri"/>
+                <a:ea typeface="Calibri"/>
+                <a:cs typeface="Calibri"/>
+                <a:sym typeface="Calibri"/>
+                <a:hlinkClick r:id="rId6"/>
+              </a:rPr>
+              <a:t>https://www.wordstream.com/blog/ai-in-marketing</a:t>
+            </a:r>
+            <a:r>
+              <a:rPr lang="en" sz="1000">
+                <a:latin typeface="Calibri"/>
+                <a:ea typeface="Calibri"/>
+                <a:cs typeface="Calibri"/>
+                <a:sym typeface="Calibri"/>
+              </a:rPr>
+              <a:t> </a:t>
+            </a:r>
+            <a:endParaRPr sz="1000">
+              <a:latin typeface="Calibri"/>
+              <a:ea typeface="Calibri"/>
+              <a:cs typeface="Calibri"/>
+              <a:sym typeface="Calibri"/>
+            </a:endParaRPr>
+          </a:p>
+          <a:p>
+            <a:pPr marL="228600" lvl="0" indent="-120650" algn="l" rtl="0">
+              <a:spcBef>
+                <a:spcPts val="0"/>
+              </a:spcBef>
+              <a:spcAft>
+                <a:spcPts val="0"/>
+              </a:spcAft>
+              <a:buClr>
+                <a:srgbClr val="3C78D8"/>
+              </a:buClr>
+              <a:buSzPts val="1000"/>
+              <a:buFont typeface="Calibri"/>
+              <a:buAutoNum type="arabicPeriod"/>
+            </a:pPr>
+            <a:r>
+              <a:rPr lang="en" sz="1000">
+                <a:solidFill>
+                  <a:srgbClr val="3C78D8"/>
+                </a:solidFill>
+                <a:latin typeface="Calibri"/>
+                <a:ea typeface="Calibri"/>
+                <a:cs typeface="Calibri"/>
+                <a:sym typeface="Calibri"/>
+              </a:rPr>
+              <a:t>Pull insights from past campaigns for future strategy</a:t>
+            </a:r>
+            <a:endParaRPr sz="1000">
+              <a:solidFill>
+                <a:srgbClr val="3C78D8"/>
+              </a:solidFill>
+              <a:latin typeface="Calibri"/>
+              <a:ea typeface="Calibri"/>
+              <a:cs typeface="Calibri"/>
+              <a:sym typeface="Calibri"/>
+            </a:endParaRPr>
+          </a:p>
+          <a:p>
+            <a:pPr marL="228600" lvl="0" indent="-120650" algn="l" rtl="0">
+              <a:spcBef>
+                <a:spcPts val="0"/>
+              </a:spcBef>
+              <a:spcAft>
+                <a:spcPts val="0"/>
+              </a:spcAft>
+              <a:buClr>
+                <a:srgbClr val="3C78D8"/>
+              </a:buClr>
+              <a:buSzPts val="1000"/>
+              <a:buFont typeface="Calibri"/>
+              <a:buAutoNum type="arabicPeriod"/>
+            </a:pPr>
+            <a:r>
+              <a:rPr lang="en" sz="1000">
+                <a:solidFill>
+                  <a:srgbClr val="3C78D8"/>
+                </a:solidFill>
+                <a:latin typeface="Calibri"/>
+                <a:ea typeface="Calibri"/>
+                <a:cs typeface="Calibri"/>
+                <a:sym typeface="Calibri"/>
+              </a:rPr>
+              <a:t>Complete competitive analysis</a:t>
+            </a:r>
+            <a:endParaRPr sz="1000">
+              <a:solidFill>
+                <a:srgbClr val="3C78D8"/>
+              </a:solidFill>
+              <a:latin typeface="Calibri"/>
+              <a:ea typeface="Calibri"/>
+              <a:cs typeface="Calibri"/>
+              <a:sym typeface="Calibri"/>
+            </a:endParaRPr>
+          </a:p>
+          <a:p>
+            <a:pPr marL="228600" lvl="0" indent="-120650" algn="l" rtl="0">
+              <a:spcBef>
+                <a:spcPts val="0"/>
+              </a:spcBef>
+              <a:spcAft>
+                <a:spcPts val="0"/>
+              </a:spcAft>
+              <a:buClr>
+                <a:srgbClr val="3C78D8"/>
+              </a:buClr>
+              <a:buSzPts val="1000"/>
+              <a:buFont typeface="Calibri"/>
+              <a:buAutoNum type="arabicPeriod"/>
+            </a:pPr>
+            <a:r>
+              <a:rPr lang="en" sz="1000">
+                <a:solidFill>
+                  <a:srgbClr val="3C78D8"/>
+                </a:solidFill>
+                <a:latin typeface="Calibri"/>
+                <a:ea typeface="Calibri"/>
+                <a:cs typeface="Calibri"/>
+                <a:sym typeface="Calibri"/>
+              </a:rPr>
+              <a:t>Roleplay for customer sentiment</a:t>
+            </a:r>
+            <a:endParaRPr sz="1000">
+              <a:solidFill>
+                <a:srgbClr val="3C78D8"/>
+              </a:solidFill>
+              <a:latin typeface="Calibri"/>
+              <a:ea typeface="Calibri"/>
+              <a:cs typeface="Calibri"/>
+              <a:sym typeface="Calibri"/>
+            </a:endParaRPr>
+          </a:p>
+          <a:p>
+            <a:pPr marL="228600" lvl="0" indent="-120650" algn="l" rtl="0">
+              <a:spcBef>
+                <a:spcPts val="0"/>
+              </a:spcBef>
+              <a:spcAft>
+                <a:spcPts val="0"/>
+              </a:spcAft>
+              <a:buClr>
+                <a:srgbClr val="3C78D8"/>
+              </a:buClr>
+              <a:buSzPts val="1000"/>
+              <a:buFont typeface="Calibri"/>
+              <a:buAutoNum type="arabicPeriod"/>
+            </a:pPr>
+            <a:r>
+              <a:rPr lang="en" sz="1000">
+                <a:solidFill>
+                  <a:srgbClr val="3C78D8"/>
+                </a:solidFill>
+                <a:latin typeface="Calibri"/>
+                <a:ea typeface="Calibri"/>
+                <a:cs typeface="Calibri"/>
+                <a:sym typeface="Calibri"/>
+              </a:rPr>
+              <a:t>Produce internal project management assets</a:t>
+            </a:r>
+            <a:endParaRPr sz="1000">
+              <a:solidFill>
+                <a:srgbClr val="3C78D8"/>
+              </a:solidFill>
+              <a:latin typeface="Calibri"/>
+              <a:ea typeface="Calibri"/>
+              <a:cs typeface="Calibri"/>
+              <a:sym typeface="Calibri"/>
+            </a:endParaRPr>
+          </a:p>
+          <a:p>
+            <a:pPr marL="228600" lvl="0" indent="-120650" algn="l" rtl="0">
+              <a:spcBef>
+                <a:spcPts val="0"/>
+              </a:spcBef>
+              <a:spcAft>
+                <a:spcPts val="0"/>
+              </a:spcAft>
+              <a:buClr>
+                <a:srgbClr val="3C78D8"/>
+              </a:buClr>
+              <a:buSzPts val="1000"/>
+              <a:buFont typeface="Calibri"/>
+              <a:buAutoNum type="arabicPeriod"/>
+            </a:pPr>
+            <a:r>
+              <a:rPr lang="en" sz="1000">
+                <a:solidFill>
+                  <a:srgbClr val="3C78D8"/>
+                </a:solidFill>
+                <a:latin typeface="Calibri"/>
+                <a:ea typeface="Calibri"/>
+                <a:cs typeface="Calibri"/>
+                <a:sym typeface="Calibri"/>
+              </a:rPr>
+              <a:t>Find thinking models for thought leadership content</a:t>
+            </a:r>
+            <a:endParaRPr sz="1000">
+              <a:solidFill>
+                <a:srgbClr val="3C78D8"/>
+              </a:solidFill>
+              <a:latin typeface="Calibri"/>
+              <a:ea typeface="Calibri"/>
+              <a:cs typeface="Calibri"/>
+              <a:sym typeface="Calibri"/>
+            </a:endParaRPr>
+          </a:p>
+          <a:p>
+            <a:pPr marL="228600" lvl="0" indent="-120650" algn="l" rtl="0">
+              <a:spcBef>
+                <a:spcPts val="0"/>
+              </a:spcBef>
+              <a:spcAft>
+                <a:spcPts val="0"/>
+              </a:spcAft>
+              <a:buClr>
+                <a:srgbClr val="3C78D8"/>
+              </a:buClr>
+              <a:buSzPts val="1000"/>
+              <a:buFont typeface="Calibri"/>
+              <a:buAutoNum type="arabicPeriod"/>
+            </a:pPr>
+            <a:r>
+              <a:rPr lang="en" sz="1000">
+                <a:solidFill>
+                  <a:srgbClr val="3C78D8"/>
+                </a:solidFill>
+                <a:latin typeface="Calibri"/>
+                <a:ea typeface="Calibri"/>
+                <a:cs typeface="Calibri"/>
+                <a:sym typeface="Calibri"/>
+              </a:rPr>
+              <a:t>Analyze data for SEO audits</a:t>
+            </a:r>
+            <a:endParaRPr sz="1000">
+              <a:solidFill>
+                <a:srgbClr val="3C78D8"/>
+              </a:solidFill>
+              <a:latin typeface="Calibri"/>
+              <a:ea typeface="Calibri"/>
+              <a:cs typeface="Calibri"/>
+              <a:sym typeface="Calibri"/>
+            </a:endParaRPr>
+          </a:p>
+          <a:p>
+            <a:pPr marL="228600" lvl="0" indent="-120650" algn="l" rtl="0">
+              <a:spcBef>
+                <a:spcPts val="0"/>
+              </a:spcBef>
+              <a:spcAft>
+                <a:spcPts val="0"/>
+              </a:spcAft>
+              <a:buClr>
+                <a:srgbClr val="3C78D8"/>
+              </a:buClr>
+              <a:buSzPts val="1000"/>
+              <a:buFont typeface="Calibri"/>
+              <a:buAutoNum type="arabicPeriod"/>
+            </a:pPr>
+            <a:r>
+              <a:rPr lang="en" sz="1000">
+                <a:solidFill>
+                  <a:srgbClr val="3C78D8"/>
+                </a:solidFill>
+                <a:latin typeface="Calibri"/>
+                <a:ea typeface="Calibri"/>
+                <a:cs typeface="Calibri"/>
+                <a:sym typeface="Calibri"/>
+              </a:rPr>
+              <a:t>Link ideas while you write automatically</a:t>
+            </a:r>
+            <a:endParaRPr sz="1000">
+              <a:solidFill>
+                <a:srgbClr val="3C78D8"/>
+              </a:solidFill>
+              <a:latin typeface="Calibri"/>
+              <a:ea typeface="Calibri"/>
+              <a:cs typeface="Calibri"/>
+              <a:sym typeface="Calibri"/>
+            </a:endParaRPr>
+          </a:p>
+          <a:p>
+            <a:pPr marL="228600" lvl="0" indent="-120650" algn="l" rtl="0">
+              <a:spcBef>
+                <a:spcPts val="0"/>
+              </a:spcBef>
+              <a:spcAft>
+                <a:spcPts val="0"/>
+              </a:spcAft>
+              <a:buClr>
+                <a:srgbClr val="3C78D8"/>
+              </a:buClr>
+              <a:buSzPts val="1000"/>
+              <a:buFont typeface="Calibri"/>
+              <a:buAutoNum type="arabicPeriod"/>
+            </a:pPr>
+            <a:r>
+              <a:rPr lang="en" sz="1000">
+                <a:solidFill>
+                  <a:srgbClr val="3C78D8"/>
+                </a:solidFill>
+                <a:latin typeface="Calibri"/>
+                <a:ea typeface="Calibri"/>
+                <a:cs typeface="Calibri"/>
+                <a:sym typeface="Calibri"/>
+              </a:rPr>
+              <a:t>Repurpose long-form content for social media posts</a:t>
+            </a:r>
+            <a:endParaRPr sz="1000">
+              <a:solidFill>
+                <a:srgbClr val="3C78D8"/>
+              </a:solidFill>
+              <a:latin typeface="Calibri"/>
+              <a:ea typeface="Calibri"/>
+              <a:cs typeface="Calibri"/>
+              <a:sym typeface="Calibri"/>
+            </a:endParaRPr>
+          </a:p>
+          <a:p>
+            <a:pPr marL="228600" lvl="0" indent="-120650" algn="l" rtl="0">
+              <a:spcBef>
+                <a:spcPts val="0"/>
+              </a:spcBef>
+              <a:spcAft>
+                <a:spcPts val="0"/>
+              </a:spcAft>
+              <a:buClr>
+                <a:srgbClr val="3C78D8"/>
+              </a:buClr>
+              <a:buSzPts val="1000"/>
+              <a:buFont typeface="Calibri"/>
+              <a:buAutoNum type="arabicPeriod"/>
+            </a:pPr>
+            <a:r>
+              <a:rPr lang="en" sz="1000">
+                <a:solidFill>
+                  <a:srgbClr val="3C78D8"/>
+                </a:solidFill>
+                <a:latin typeface="Calibri"/>
+                <a:ea typeface="Calibri"/>
+                <a:cs typeface="Calibri"/>
+                <a:sym typeface="Calibri"/>
+              </a:rPr>
+              <a:t>Create customized SMS and email marketing campaigns</a:t>
+            </a:r>
+            <a:endParaRPr sz="1000">
+              <a:solidFill>
+                <a:srgbClr val="3C78D8"/>
+              </a:solidFill>
+              <a:latin typeface="Calibri"/>
+              <a:ea typeface="Calibri"/>
+              <a:cs typeface="Calibri"/>
+              <a:sym typeface="Calibri"/>
+            </a:endParaRPr>
+          </a:p>
+          <a:p>
+            <a:pPr marL="228600" lvl="0" indent="-120650" algn="l" rtl="0">
+              <a:spcBef>
+                <a:spcPts val="0"/>
+              </a:spcBef>
+              <a:spcAft>
+                <a:spcPts val="0"/>
+              </a:spcAft>
+              <a:buClr>
+                <a:srgbClr val="3C78D8"/>
+              </a:buClr>
+              <a:buSzPts val="1000"/>
+              <a:buFont typeface="Calibri"/>
+              <a:buAutoNum type="arabicPeriod"/>
+            </a:pPr>
+            <a:r>
+              <a:rPr lang="en" sz="1000">
+                <a:solidFill>
+                  <a:srgbClr val="3C78D8"/>
+                </a:solidFill>
+                <a:latin typeface="Calibri"/>
+                <a:ea typeface="Calibri"/>
+                <a:cs typeface="Calibri"/>
+                <a:sym typeface="Calibri"/>
+              </a:rPr>
+              <a:t>Prepare an interview question list</a:t>
+            </a:r>
+            <a:endParaRPr sz="1000">
+              <a:solidFill>
+                <a:srgbClr val="3C78D8"/>
+              </a:solidFill>
+              <a:latin typeface="Calibri"/>
+              <a:ea typeface="Calibri"/>
+              <a:cs typeface="Calibri"/>
+              <a:sym typeface="Calibri"/>
+            </a:endParaRPr>
+          </a:p>
+          <a:p>
+            <a:pPr marL="228600" lvl="0" indent="-120650" algn="l" rtl="0">
+              <a:spcBef>
+                <a:spcPts val="0"/>
+              </a:spcBef>
+              <a:spcAft>
+                <a:spcPts val="0"/>
+              </a:spcAft>
+              <a:buClr>
+                <a:srgbClr val="3C78D8"/>
+              </a:buClr>
+              <a:buSzPts val="1000"/>
+              <a:buFont typeface="Calibri"/>
+              <a:buAutoNum type="arabicPeriod"/>
+            </a:pPr>
+            <a:r>
+              <a:rPr lang="en" sz="1000">
+                <a:solidFill>
+                  <a:srgbClr val="3C78D8"/>
+                </a:solidFill>
+                <a:latin typeface="Calibri"/>
+                <a:ea typeface="Calibri"/>
+                <a:cs typeface="Calibri"/>
+                <a:sym typeface="Calibri"/>
+              </a:rPr>
+              <a:t>Improve design elements in email headers</a:t>
+            </a:r>
+            <a:endParaRPr sz="1000">
+              <a:solidFill>
+                <a:srgbClr val="3C78D8"/>
+              </a:solidFill>
+              <a:latin typeface="Calibri"/>
+              <a:ea typeface="Calibri"/>
+              <a:cs typeface="Calibri"/>
+              <a:sym typeface="Calibri"/>
+            </a:endParaRPr>
+          </a:p>
+          <a:p>
+            <a:pPr marL="228600" lvl="0" indent="-120650" algn="l" rtl="0">
+              <a:spcBef>
+                <a:spcPts val="0"/>
+              </a:spcBef>
+              <a:spcAft>
+                <a:spcPts val="0"/>
+              </a:spcAft>
+              <a:buClr>
+                <a:srgbClr val="3C78D8"/>
+              </a:buClr>
+              <a:buSzPts val="1000"/>
+              <a:buFont typeface="Calibri"/>
+              <a:buAutoNum type="arabicPeriod"/>
+            </a:pPr>
+            <a:r>
+              <a:rPr lang="en" sz="1000">
+                <a:solidFill>
+                  <a:srgbClr val="3C78D8"/>
+                </a:solidFill>
+                <a:latin typeface="Calibri"/>
+                <a:ea typeface="Calibri"/>
+                <a:cs typeface="Calibri"/>
+                <a:sym typeface="Calibri"/>
+              </a:rPr>
+              <a:t>Build article outlines quickly</a:t>
+            </a:r>
+            <a:endParaRPr sz="1000">
+              <a:solidFill>
+                <a:srgbClr val="3C78D8"/>
+              </a:solidFill>
+              <a:latin typeface="Calibri"/>
+              <a:ea typeface="Calibri"/>
+              <a:cs typeface="Calibri"/>
+              <a:sym typeface="Calibri"/>
+            </a:endParaRPr>
+          </a:p>
+          <a:p>
+            <a:pPr marL="228600" lvl="0" indent="-120650" algn="l" rtl="0">
+              <a:spcBef>
+                <a:spcPts val="0"/>
+              </a:spcBef>
+              <a:spcAft>
+                <a:spcPts val="0"/>
+              </a:spcAft>
+              <a:buClr>
+                <a:srgbClr val="3C78D8"/>
+              </a:buClr>
+              <a:buSzPts val="1000"/>
+              <a:buFont typeface="Calibri"/>
+              <a:buAutoNum type="arabicPeriod"/>
+            </a:pPr>
+            <a:r>
+              <a:rPr lang="en" sz="1000">
+                <a:solidFill>
+                  <a:srgbClr val="3C78D8"/>
+                </a:solidFill>
+                <a:latin typeface="Calibri"/>
+                <a:ea typeface="Calibri"/>
+                <a:cs typeface="Calibri"/>
+                <a:sym typeface="Calibri"/>
+              </a:rPr>
+              <a:t>Write craftier subheadings</a:t>
+            </a:r>
+            <a:endParaRPr sz="1000">
+              <a:solidFill>
+                <a:srgbClr val="3C78D8"/>
+              </a:solidFill>
+              <a:latin typeface="Calibri"/>
+              <a:ea typeface="Calibri"/>
+              <a:cs typeface="Calibri"/>
+              <a:sym typeface="Calibri"/>
+            </a:endParaRPr>
+          </a:p>
+          <a:p>
+            <a:pPr marL="228600" lvl="0" indent="-120650" algn="l" rtl="0">
+              <a:spcBef>
+                <a:spcPts val="0"/>
+              </a:spcBef>
+              <a:spcAft>
+                <a:spcPts val="0"/>
+              </a:spcAft>
+              <a:buClr>
+                <a:srgbClr val="3C78D8"/>
+              </a:buClr>
+              <a:buSzPts val="1000"/>
+              <a:buFont typeface="Calibri"/>
+              <a:buAutoNum type="arabicPeriod"/>
+            </a:pPr>
+            <a:r>
+              <a:rPr lang="en" sz="1000">
+                <a:solidFill>
+                  <a:srgbClr val="3C78D8"/>
+                </a:solidFill>
+                <a:latin typeface="Calibri"/>
+                <a:ea typeface="Calibri"/>
+                <a:cs typeface="Calibri"/>
+                <a:sym typeface="Calibri"/>
+              </a:rPr>
+              <a:t>Scale product descriptions and ad copy</a:t>
+            </a:r>
+            <a:endParaRPr sz="1000">
+              <a:solidFill>
+                <a:srgbClr val="3C78D8"/>
+              </a:solidFill>
+              <a:latin typeface="Calibri"/>
+              <a:ea typeface="Calibri"/>
+              <a:cs typeface="Calibri"/>
+              <a:sym typeface="Calibri"/>
+            </a:endParaRPr>
+          </a:p>
+        </p:txBody>
+      </p:sp>
+    </p:spTree>
+  </p:cSld>
+  <p:clrMapOvr>
+    <a:masterClrMapping/>
+  </p:clrMapOvr>
+</p:sld>
+</file>
+
+<file path=ppt/slides/slide12.xml><?xml version="1.0" encoding="utf-8"?>
+<p:sld xmlns:a="http://schemas.openxmlformats.org/drawingml/2006/main" xmlns:r="http://schemas.openxmlformats.org/officeDocument/2006/relationships" xmlns:p="http://schemas.openxmlformats.org/presentationml/2006/main">
+  <p:cSld>
+    <p:spTree>
+      <p:nvGrpSpPr>
+        <p:cNvPr id="1" name="Shape 161"/>
+        <p:cNvGrpSpPr/>
+        <p:nvPr/>
+      </p:nvGrpSpPr>
+      <p:grpSpPr>
+        <a:xfrm>
+          <a:off x="0" y="0"/>
+          <a:ext cx="0" cy="0"/>
+          <a:chOff x="0" y="0"/>
+          <a:chExt cx="0" cy="0"/>
+        </a:xfrm>
+      </p:grpSpPr>
+      <p:sp>
+        <p:nvSpPr>
+          <p:cNvPr id="162" name="Google Shape;162;p25"/>
           <p:cNvSpPr txBox="1"/>
           <p:nvPr/>
         </p:nvSpPr>
@@ -13402,7 +14553,7 @@
                 <a:cs typeface="Calibri"/>
                 <a:sym typeface="Calibri"/>
               </a:rPr>
-              <a:t>US government now requires all the agencies of vederal government to name Chief AI Officers.</a:t>
+              <a:t>US government now requires all the agencies of federal government to name Chief AI Officers.</a:t>
             </a:r>
             <a:endParaRPr sz="1300">
               <a:solidFill>
@@ -14135,7 +15286,7 @@
       </p:sp>
       <p:sp>
         <p:nvSpPr>
-          <p:cNvPr id="150" name="Google Shape;150;p24"/>
+          <p:cNvPr id="163" name="Google Shape;163;p25"/>
           <p:cNvSpPr txBox="1"/>
           <p:nvPr/>
         </p:nvSpPr>
@@ -14193,7 +15344,7 @@
       </p:sp>
       <p:sp>
         <p:nvSpPr>
-          <p:cNvPr id="151" name="Google Shape;151;p24"/>
+          <p:cNvPr id="164" name="Google Shape;164;p25"/>
           <p:cNvSpPr txBox="1"/>
           <p:nvPr/>
         </p:nvSpPr>
@@ -14852,12 +16003,12 @@
 </p:sld>
 </file>
 
-<file path=ppt/slides/slide12.xml><?xml version="1.0" encoding="utf-8"?>
+<file path=ppt/slides/slide13.xml><?xml version="1.0" encoding="utf-8"?>
 <p:sld xmlns:a="http://schemas.openxmlformats.org/drawingml/2006/main" xmlns:r="http://schemas.openxmlformats.org/officeDocument/2006/relationships" xmlns:p="http://schemas.openxmlformats.org/presentationml/2006/main">
   <p:cSld>
     <p:spTree>
       <p:nvGrpSpPr>
-        <p:cNvPr id="1" name="Shape 155"/>
+        <p:cNvPr id="1" name="Shape 168"/>
         <p:cNvGrpSpPr/>
         <p:nvPr/>
       </p:nvGrpSpPr>
@@ -14871,14 +16022,14 @@
       </p:grpSpPr>
       <p:sp>
         <p:nvSpPr>
-          <p:cNvPr id="156" name="Google Shape;156;p25"/>
+          <p:cNvPr id="169" name="Google Shape;169;p26"/>
           <p:cNvSpPr txBox="1"/>
           <p:nvPr/>
         </p:nvSpPr>
         <p:spPr>
           <a:xfrm>
             <a:off x="76200" y="616800"/>
-            <a:ext cx="4408800" cy="1856400"/>
+            <a:ext cx="4408800" cy="1671600"/>
           </a:xfrm>
           <a:prstGeom prst="rect">
             <a:avLst/>
@@ -14921,7 +16072,55 @@
                 <a:cs typeface="Calibri"/>
                 <a:sym typeface="Calibri"/>
               </a:rPr>
-              <a:t>The NVIDIA Parakeet automatic speech recognition (ASR) family of models and the NVIDIA Canary multilingual, multitask ASR and translation model currently top the Hugging Face Open ASR Leaderboard due to their speed, accuracy, and robustness against diverse and noisy audio environments.</a:t>
+              <a:t>The </a:t>
+            </a:r>
+            <a:r>
+              <a:rPr lang="en" sz="1300" b="1">
+                <a:solidFill>
+                  <a:srgbClr val="FF0000"/>
+                </a:solidFill>
+                <a:latin typeface="Calibri"/>
+                <a:ea typeface="Calibri"/>
+                <a:cs typeface="Calibri"/>
+                <a:sym typeface="Calibri"/>
+              </a:rPr>
+              <a:t>NVIDIA Parakeet</a:t>
+            </a:r>
+            <a:r>
+              <a:rPr lang="en" sz="1300">
+                <a:solidFill>
+                  <a:schemeClr val="dk1"/>
+                </a:solidFill>
+                <a:latin typeface="Calibri"/>
+                <a:ea typeface="Calibri"/>
+                <a:cs typeface="Calibri"/>
+                <a:sym typeface="Calibri"/>
+              </a:rPr>
+              <a:t> automatic speech recognition (ASR) family of models and the </a:t>
+            </a:r>
+            <a:r>
+              <a:rPr lang="en" sz="1300" b="1">
+                <a:solidFill>
+                  <a:srgbClr val="FF0000"/>
+                </a:solidFill>
+                <a:latin typeface="Calibri"/>
+                <a:ea typeface="Calibri"/>
+                <a:cs typeface="Calibri"/>
+                <a:sym typeface="Calibri"/>
+              </a:rPr>
+              <a:t>NVIDIA Canary</a:t>
+            </a:r>
+            <a:r>
+              <a:rPr lang="en" sz="1300">
+                <a:solidFill>
+                  <a:schemeClr val="dk1"/>
+                </a:solidFill>
+                <a:latin typeface="Calibri"/>
+                <a:ea typeface="Calibri"/>
+                <a:cs typeface="Calibri"/>
+                <a:sym typeface="Calibri"/>
+              </a:rPr>
+              <a:t> multilingual, multitask ASR and translation model currently top the Hugging Face Open ASR Leaderboard due to their speed, accuracy, and robustness against diverse and noisy audio environments.</a:t>
             </a:r>
             <a:endParaRPr sz="1300">
               <a:solidFill>
@@ -14944,7 +16143,7 @@
               <a:buNone/>
             </a:pPr>
             <a:r>
-              <a:rPr lang="en" sz="1300" u="sng">
+              <a:rPr lang="en" sz="1000" u="sng">
                 <a:solidFill>
                   <a:schemeClr val="accent5"/>
                 </a:solidFill>
@@ -14962,7 +16161,7 @@
               </a:rPr>
               <a:t>https://huggingface.co/spaces/hf-audio/open_asr_leaderboard</a:t>
             </a:r>
-            <a:endParaRPr sz="1300">
+            <a:endParaRPr sz="1000">
               <a:solidFill>
                 <a:schemeClr val="dk1"/>
               </a:solidFill>
@@ -14982,7 +16181,7 @@
               </a:spcAft>
               <a:buNone/>
             </a:pPr>
-            <a:endParaRPr sz="1300">
+            <a:endParaRPr sz="1000">
               <a:solidFill>
                 <a:schemeClr val="dk1"/>
               </a:solidFill>
@@ -15003,7 +16202,7 @@
               <a:buNone/>
             </a:pPr>
             <a:r>
-              <a:rPr lang="en" sz="1300" u="sng">
+              <a:rPr lang="en" sz="1000" u="sng">
                 <a:solidFill>
                   <a:schemeClr val="hlink"/>
                 </a:solidFill>
@@ -15016,7 +16215,7 @@
               <a:t>https://developer.nvidia.com/blog/nvidia-speech-and-translation-ai-models-set-records-for-speed-and-accuracy/</a:t>
             </a:r>
             <a:r>
-              <a:rPr lang="en" sz="1300">
+              <a:rPr lang="en" sz="1000">
                 <a:solidFill>
                   <a:schemeClr val="dk1"/>
                 </a:solidFill>
@@ -15027,7 +16226,7 @@
               </a:rPr>
               <a:t> </a:t>
             </a:r>
-            <a:endParaRPr sz="1300">
+            <a:endParaRPr sz="1000">
               <a:solidFill>
                 <a:schemeClr val="dk1"/>
               </a:solidFill>
@@ -15041,7 +16240,7 @@
       </p:sp>
       <p:sp>
         <p:nvSpPr>
-          <p:cNvPr id="157" name="Google Shape;157;p25"/>
+          <p:cNvPr id="170" name="Google Shape;170;p26"/>
           <p:cNvSpPr txBox="1"/>
           <p:nvPr/>
         </p:nvSpPr>
@@ -15099,7 +16298,7 @@
       </p:sp>
       <p:pic>
         <p:nvPicPr>
-          <p:cNvPr id="158" name="Google Shape;158;p25"/>
+          <p:cNvPr id="171" name="Google Shape;171;p26"/>
           <p:cNvPicPr preferRelativeResize="0"/>
           <p:nvPr/>
         </p:nvPicPr>
@@ -15118,21 +16317,27 @@
         </p:blipFill>
         <p:spPr>
           <a:xfrm>
-            <a:off x="4663225" y="966075"/>
-            <a:ext cx="4354202" cy="3954185"/>
+            <a:off x="4522475" y="925824"/>
+            <a:ext cx="4568423" cy="4148726"/>
           </a:xfrm>
           <a:prstGeom prst="rect">
             <a:avLst/>
           </a:prstGeom>
           <a:noFill/>
-          <a:ln>
-            <a:noFill/>
+          <a:ln w="9525" cap="flat" cmpd="sng">
+            <a:solidFill>
+              <a:srgbClr val="FF0000"/>
+            </a:solidFill>
+            <a:prstDash val="solid"/>
+            <a:round/>
+            <a:headEnd type="none" w="sm" len="sm"/>
+            <a:tailEnd type="none" w="sm" len="sm"/>
           </a:ln>
         </p:spPr>
       </p:pic>
       <p:pic>
         <p:nvPicPr>
-          <p:cNvPr id="159" name="Google Shape;159;p25"/>
+          <p:cNvPr id="172" name="Google Shape;172;p26"/>
           <p:cNvPicPr preferRelativeResize="0"/>
           <p:nvPr/>
         </p:nvPicPr>
@@ -15166,12 +16371,12 @@
 </p:sld>
 </file>
 
-<file path=ppt/slides/slide13.xml><?xml version="1.0" encoding="utf-8"?>
+<file path=ppt/slides/slide14.xml><?xml version="1.0" encoding="utf-8"?>
 <p:sld xmlns:a="http://schemas.openxmlformats.org/drawingml/2006/main" xmlns:r="http://schemas.openxmlformats.org/officeDocument/2006/relationships" xmlns:p="http://schemas.openxmlformats.org/presentationml/2006/main">
   <p:cSld>
     <p:spTree>
       <p:nvGrpSpPr>
-        <p:cNvPr id="1" name="Shape 163"/>
+        <p:cNvPr id="1" name="Shape 176"/>
         <p:cNvGrpSpPr/>
         <p:nvPr/>
       </p:nvGrpSpPr>
@@ -15185,14 +16390,14 @@
       </p:grpSpPr>
       <p:sp>
         <p:nvSpPr>
-          <p:cNvPr id="164" name="Google Shape;164;p26"/>
+          <p:cNvPr id="177" name="Google Shape;177;p27"/>
           <p:cNvSpPr txBox="1"/>
           <p:nvPr/>
         </p:nvSpPr>
         <p:spPr>
           <a:xfrm>
             <a:off x="76200" y="616800"/>
-            <a:ext cx="4408800" cy="1656300"/>
+            <a:ext cx="3737400" cy="2056500"/>
           </a:xfrm>
           <a:prstGeom prst="rect">
             <a:avLst/>
@@ -15226,606 +16431,6 @@
               <a:buNone/>
             </a:pPr>
             <a:r>
-              <a:rPr lang="en" sz="1300" b="1">
-                <a:solidFill>
-                  <a:srgbClr val="FF0000"/>
-                </a:solidFill>
-                <a:latin typeface="Calibri"/>
-                <a:ea typeface="Calibri"/>
-                <a:cs typeface="Calibri"/>
-                <a:sym typeface="Calibri"/>
-              </a:rPr>
-              <a:t>ISO/IEC 42001</a:t>
-            </a:r>
-            <a:r>
-              <a:rPr lang="en" sz="1300">
-                <a:latin typeface="Calibri"/>
-                <a:ea typeface="Calibri"/>
-                <a:cs typeface="Calibri"/>
-                <a:sym typeface="Calibri"/>
-              </a:rPr>
-              <a:t> - </a:t>
-            </a:r>
-            <a:r>
-              <a:rPr lang="en" sz="1300">
-                <a:solidFill>
-                  <a:srgbClr val="3C78D8"/>
-                </a:solidFill>
-                <a:latin typeface="Calibri"/>
-                <a:ea typeface="Calibri"/>
-                <a:cs typeface="Calibri"/>
-                <a:sym typeface="Calibri"/>
-              </a:rPr>
-              <a:t>an international standard that specifies requirements for establishing, implementing, maintaining, and continually improving an Artificial Intelligence Management System (AIMS) within organizations.</a:t>
-            </a:r>
-            <a:r>
-              <a:rPr lang="en" sz="1300">
-                <a:latin typeface="Calibri"/>
-                <a:ea typeface="Calibri"/>
-                <a:cs typeface="Calibri"/>
-                <a:sym typeface="Calibri"/>
-              </a:rPr>
-              <a:t> </a:t>
-            </a:r>
-            <a:endParaRPr sz="1300">
-              <a:latin typeface="Calibri"/>
-              <a:ea typeface="Calibri"/>
-              <a:cs typeface="Calibri"/>
-              <a:sym typeface="Calibri"/>
-            </a:endParaRPr>
-          </a:p>
-          <a:p>
-            <a:pPr marL="0" lvl="0" indent="0" algn="l" rtl="0">
-              <a:spcBef>
-                <a:spcPts val="0"/>
-              </a:spcBef>
-              <a:spcAft>
-                <a:spcPts val="0"/>
-              </a:spcAft>
-              <a:buNone/>
-            </a:pPr>
-            <a:endParaRPr sz="1300">
-              <a:latin typeface="Calibri"/>
-              <a:ea typeface="Calibri"/>
-              <a:cs typeface="Calibri"/>
-              <a:sym typeface="Calibri"/>
-            </a:endParaRPr>
-          </a:p>
-          <a:p>
-            <a:pPr marL="0" lvl="0" indent="0" algn="l" rtl="0">
-              <a:spcBef>
-                <a:spcPts val="0"/>
-              </a:spcBef>
-              <a:spcAft>
-                <a:spcPts val="0"/>
-              </a:spcAft>
-              <a:buNone/>
-            </a:pPr>
-            <a:r>
-              <a:rPr lang="en" sz="1300">
-                <a:latin typeface="Calibri"/>
-                <a:ea typeface="Calibri"/>
-                <a:cs typeface="Calibri"/>
-                <a:sym typeface="Calibri"/>
-              </a:rPr>
-              <a:t>It is designed for entities providing or utilizing AI-based products or services, ensuring responsible development and use of AI systems. - </a:t>
-            </a:r>
-            <a:r>
-              <a:rPr lang="en" sz="1000" u="sng">
-                <a:solidFill>
-                  <a:schemeClr val="hlink"/>
-                </a:solidFill>
-                <a:latin typeface="Calibri"/>
-                <a:ea typeface="Calibri"/>
-                <a:cs typeface="Calibri"/>
-                <a:sym typeface="Calibri"/>
-                <a:hlinkClick r:id="rId3"/>
-              </a:rPr>
-              <a:t>https://www.iso.org/standard/81230.html</a:t>
-            </a:r>
-            <a:endParaRPr sz="1000">
-              <a:solidFill>
-                <a:schemeClr val="dk1"/>
-              </a:solidFill>
-              <a:latin typeface="Calibri"/>
-              <a:ea typeface="Calibri"/>
-              <a:cs typeface="Calibri"/>
-              <a:sym typeface="Calibri"/>
-            </a:endParaRPr>
-          </a:p>
-        </p:txBody>
-      </p:sp>
-      <p:sp>
-        <p:nvSpPr>
-          <p:cNvPr id="165" name="Google Shape;165;p26"/>
-          <p:cNvSpPr txBox="1"/>
-          <p:nvPr/>
-        </p:nvSpPr>
-        <p:spPr>
-          <a:xfrm>
-            <a:off x="76200" y="76200"/>
-            <a:ext cx="3772500" cy="295500"/>
-          </a:xfrm>
-          <a:prstGeom prst="rect">
-            <a:avLst/>
-          </a:prstGeom>
-          <a:noFill/>
-          <a:ln>
-            <a:noFill/>
-          </a:ln>
-        </p:spPr>
-        <p:txBody>
-          <a:bodyPr spcFirstLastPara="1" wrap="square" lIns="9125" tIns="9125" rIns="9125" bIns="9125" anchor="t" anchorCtr="0">
-            <a:spAutoFit/>
-          </a:bodyPr>
-          <a:lstStyle/>
-          <a:p>
-            <a:pPr marL="0" lvl="0" indent="0" algn="l" rtl="0">
-              <a:spcBef>
-                <a:spcPts val="0"/>
-              </a:spcBef>
-              <a:spcAft>
-                <a:spcPts val="0"/>
-              </a:spcAft>
-              <a:buNone/>
-            </a:pPr>
-            <a:r>
-              <a:rPr lang="en" sz="1800" b="1">
-                <a:solidFill>
-                  <a:srgbClr val="0F1419"/>
-                </a:solidFill>
-                <a:highlight>
-                  <a:srgbClr val="FFFFFF"/>
-                </a:highlight>
-                <a:latin typeface="Calibri"/>
-                <a:ea typeface="Calibri"/>
-                <a:cs typeface="Calibri"/>
-                <a:sym typeface="Calibri"/>
-              </a:rPr>
-              <a:t>Misc 3</a:t>
-            </a:r>
-            <a:endParaRPr sz="1800" b="1">
-              <a:solidFill>
-                <a:srgbClr val="0F1419"/>
-              </a:solidFill>
-              <a:highlight>
-                <a:srgbClr val="FFFFFF"/>
-              </a:highlight>
-              <a:latin typeface="Calibri"/>
-              <a:ea typeface="Calibri"/>
-              <a:cs typeface="Calibri"/>
-              <a:sym typeface="Calibri"/>
-            </a:endParaRPr>
-          </a:p>
-        </p:txBody>
-      </p:sp>
-      <p:sp>
-        <p:nvSpPr>
-          <p:cNvPr id="166" name="Google Shape;166;p26"/>
-          <p:cNvSpPr txBox="1"/>
-          <p:nvPr/>
-        </p:nvSpPr>
-        <p:spPr>
-          <a:xfrm>
-            <a:off x="4648200" y="616800"/>
-            <a:ext cx="4408800" cy="2010300"/>
-          </a:xfrm>
-          <a:prstGeom prst="rect">
-            <a:avLst/>
-          </a:prstGeom>
-          <a:solidFill>
-            <a:srgbClr val="FFF2CC"/>
-          </a:solidFill>
-          <a:ln w="9525" cap="flat" cmpd="sng">
-            <a:solidFill>
-              <a:srgbClr val="FF0000"/>
-            </a:solidFill>
-            <a:prstDash val="solid"/>
-            <a:round/>
-            <a:headEnd type="none" w="sm" len="sm"/>
-            <a:tailEnd type="none" w="sm" len="sm"/>
-          </a:ln>
-        </p:spPr>
-        <p:txBody>
-          <a:bodyPr spcFirstLastPara="1" wrap="square" lIns="27425" tIns="27425" rIns="27425" bIns="27425" anchor="t" anchorCtr="0">
-            <a:spAutoFit/>
-          </a:bodyPr>
-          <a:lstStyle/>
-          <a:p>
-            <a:pPr marL="0" lvl="0" indent="0" algn="l" rtl="0">
-              <a:spcBef>
-                <a:spcPts val="0"/>
-              </a:spcBef>
-              <a:spcAft>
-                <a:spcPts val="0"/>
-              </a:spcAft>
-              <a:buNone/>
-            </a:pPr>
-            <a:r>
-              <a:rPr lang="en" sz="1300" b="1">
-                <a:solidFill>
-                  <a:srgbClr val="FF0000"/>
-                </a:solidFill>
-                <a:latin typeface="Calibri"/>
-                <a:ea typeface="Calibri"/>
-                <a:cs typeface="Calibri"/>
-                <a:sym typeface="Calibri"/>
-              </a:rPr>
-              <a:t>Google’s new Infini-attention</a:t>
-            </a:r>
-            <a:r>
-              <a:rPr lang="en" sz="1300">
-                <a:latin typeface="Calibri"/>
-                <a:ea typeface="Calibri"/>
-                <a:cs typeface="Calibri"/>
-                <a:sym typeface="Calibri"/>
-              </a:rPr>
-              <a:t> - LLMs with infinite context</a:t>
-            </a:r>
-            <a:endParaRPr sz="1300">
-              <a:latin typeface="Calibri"/>
-              <a:ea typeface="Calibri"/>
-              <a:cs typeface="Calibri"/>
-              <a:sym typeface="Calibri"/>
-            </a:endParaRPr>
-          </a:p>
-          <a:p>
-            <a:pPr marL="0" lvl="0" indent="0" algn="l" rtl="0">
-              <a:spcBef>
-                <a:spcPts val="0"/>
-              </a:spcBef>
-              <a:spcAft>
-                <a:spcPts val="0"/>
-              </a:spcAft>
-              <a:buNone/>
-            </a:pPr>
-            <a:r>
-              <a:rPr lang="en" sz="1000" u="sng">
-                <a:solidFill>
-                  <a:schemeClr val="hlink"/>
-                </a:solidFill>
-                <a:latin typeface="Calibri"/>
-                <a:ea typeface="Calibri"/>
-                <a:cs typeface="Calibri"/>
-                <a:sym typeface="Calibri"/>
-                <a:hlinkClick r:id="rId4"/>
-              </a:rPr>
-              <a:t>https://venturebeat.com/ai/googles-new-technique-gives-llms-infinite-context/</a:t>
-            </a:r>
-            <a:r>
-              <a:rPr lang="en" sz="1000">
-                <a:latin typeface="Calibri"/>
-                <a:ea typeface="Calibri"/>
-                <a:cs typeface="Calibri"/>
-                <a:sym typeface="Calibri"/>
-              </a:rPr>
-              <a:t> </a:t>
-            </a:r>
-            <a:endParaRPr sz="1000">
-              <a:latin typeface="Calibri"/>
-              <a:ea typeface="Calibri"/>
-              <a:cs typeface="Calibri"/>
-              <a:sym typeface="Calibri"/>
-            </a:endParaRPr>
-          </a:p>
-          <a:p>
-            <a:pPr marL="0" lvl="0" indent="0" algn="l" rtl="0">
-              <a:spcBef>
-                <a:spcPts val="0"/>
-              </a:spcBef>
-              <a:spcAft>
-                <a:spcPts val="0"/>
-              </a:spcAft>
-              <a:buNone/>
-            </a:pPr>
-            <a:endParaRPr sz="1300">
-              <a:latin typeface="Calibri"/>
-              <a:ea typeface="Calibri"/>
-              <a:cs typeface="Calibri"/>
-              <a:sym typeface="Calibri"/>
-            </a:endParaRPr>
-          </a:p>
-          <a:p>
-            <a:pPr marL="0" lvl="0" indent="0" algn="l" rtl="0">
-              <a:spcBef>
-                <a:spcPts val="0"/>
-              </a:spcBef>
-              <a:spcAft>
-                <a:spcPts val="0"/>
-              </a:spcAft>
-              <a:buNone/>
-            </a:pPr>
-            <a:r>
-              <a:rPr lang="en" sz="1300">
-                <a:solidFill>
-                  <a:schemeClr val="dk1"/>
-                </a:solidFill>
-                <a:latin typeface="Calibri"/>
-                <a:ea typeface="Calibri"/>
-                <a:cs typeface="Calibri"/>
-                <a:sym typeface="Calibri"/>
-              </a:rPr>
-              <a:t>Paper: </a:t>
-            </a:r>
-            <a:r>
-              <a:rPr lang="en" sz="1300">
-                <a:solidFill>
-                  <a:srgbClr val="3C78D8"/>
-                </a:solidFill>
-                <a:latin typeface="Calibri"/>
-                <a:ea typeface="Calibri"/>
-                <a:cs typeface="Calibri"/>
-                <a:sym typeface="Calibri"/>
-              </a:rPr>
-              <a:t>"Leave No Context Behind: Efficient Infinite Context Transformers with Infini-attention"</a:t>
-            </a:r>
-            <a:r>
-              <a:rPr lang="en" sz="1300">
-                <a:solidFill>
-                  <a:schemeClr val="dk1"/>
-                </a:solidFill>
-                <a:latin typeface="Calibri"/>
-                <a:ea typeface="Calibri"/>
-                <a:cs typeface="Calibri"/>
-                <a:sym typeface="Calibri"/>
-              </a:rPr>
-              <a:t> - </a:t>
-            </a:r>
-            <a:r>
-              <a:rPr lang="en" sz="1000">
-                <a:latin typeface="Calibri"/>
-                <a:ea typeface="Calibri"/>
-                <a:cs typeface="Calibri"/>
-                <a:sym typeface="Calibri"/>
-              </a:rPr>
-              <a:t> </a:t>
-            </a:r>
-            <a:r>
-              <a:rPr lang="en" sz="1000" u="sng">
-                <a:solidFill>
-                  <a:schemeClr val="hlink"/>
-                </a:solidFill>
-                <a:latin typeface="Calibri"/>
-                <a:ea typeface="Calibri"/>
-                <a:cs typeface="Calibri"/>
-                <a:sym typeface="Calibri"/>
-                <a:hlinkClick r:id="rId5"/>
-              </a:rPr>
-              <a:t>https://arxiv.org/abs/2404.07143</a:t>
-            </a:r>
-            <a:r>
-              <a:rPr lang="en" sz="1000">
-                <a:latin typeface="Calibri"/>
-                <a:ea typeface="Calibri"/>
-                <a:cs typeface="Calibri"/>
-                <a:sym typeface="Calibri"/>
-              </a:rPr>
-              <a:t> </a:t>
-            </a:r>
-            <a:endParaRPr sz="1000">
-              <a:latin typeface="Calibri"/>
-              <a:ea typeface="Calibri"/>
-              <a:cs typeface="Calibri"/>
-              <a:sym typeface="Calibri"/>
-            </a:endParaRPr>
-          </a:p>
-          <a:p>
-            <a:pPr marL="0" lvl="0" indent="0" algn="l" rtl="0">
-              <a:spcBef>
-                <a:spcPts val="0"/>
-              </a:spcBef>
-              <a:spcAft>
-                <a:spcPts val="0"/>
-              </a:spcAft>
-              <a:buNone/>
-            </a:pPr>
-            <a:endParaRPr sz="1300">
-              <a:latin typeface="Calibri"/>
-              <a:ea typeface="Calibri"/>
-              <a:cs typeface="Calibri"/>
-              <a:sym typeface="Calibri"/>
-            </a:endParaRPr>
-          </a:p>
-          <a:p>
-            <a:pPr marL="0" lvl="0" indent="0" algn="l" rtl="0">
-              <a:spcBef>
-                <a:spcPts val="0"/>
-              </a:spcBef>
-              <a:spcAft>
-                <a:spcPts val="0"/>
-              </a:spcAft>
-              <a:buNone/>
-            </a:pPr>
-            <a:r>
-              <a:rPr lang="en" sz="1300">
-                <a:latin typeface="Calibri"/>
-                <a:ea typeface="Calibri"/>
-                <a:cs typeface="Calibri"/>
-                <a:sym typeface="Calibri"/>
-              </a:rPr>
-              <a:t>Infini-attention retains and compresses the attention memory from all previous segments. This means in the same 500K document, each 100K window maintains access to the full document's context.</a:t>
-            </a:r>
-            <a:endParaRPr sz="1300">
-              <a:latin typeface="Calibri"/>
-              <a:ea typeface="Calibri"/>
-              <a:cs typeface="Calibri"/>
-              <a:sym typeface="Calibri"/>
-            </a:endParaRPr>
-          </a:p>
-        </p:txBody>
-      </p:sp>
-      <p:sp>
-        <p:nvSpPr>
-          <p:cNvPr id="167" name="Google Shape;167;p26"/>
-          <p:cNvSpPr txBox="1"/>
-          <p:nvPr/>
-        </p:nvSpPr>
-        <p:spPr>
-          <a:xfrm>
-            <a:off x="76200" y="2391725"/>
-            <a:ext cx="4408800" cy="609600"/>
-          </a:xfrm>
-          <a:prstGeom prst="rect">
-            <a:avLst/>
-          </a:prstGeom>
-          <a:solidFill>
-            <a:srgbClr val="FFF2CC"/>
-          </a:solidFill>
-          <a:ln w="9525" cap="flat" cmpd="sng">
-            <a:solidFill>
-              <a:srgbClr val="FF0000"/>
-            </a:solidFill>
-            <a:prstDash val="solid"/>
-            <a:round/>
-            <a:headEnd type="none" w="sm" len="sm"/>
-            <a:tailEnd type="none" w="sm" len="sm"/>
-          </a:ln>
-        </p:spPr>
-        <p:txBody>
-          <a:bodyPr spcFirstLastPara="1" wrap="square" lIns="27425" tIns="27425" rIns="27425" bIns="27425" anchor="t" anchorCtr="0">
-            <a:spAutoFit/>
-          </a:bodyPr>
-          <a:lstStyle/>
-          <a:p>
-            <a:pPr marL="0" lvl="0" indent="0" algn="l" rtl="0">
-              <a:spcBef>
-                <a:spcPts val="0"/>
-              </a:spcBef>
-              <a:spcAft>
-                <a:spcPts val="0"/>
-              </a:spcAft>
-              <a:buClr>
-                <a:schemeClr val="dk1"/>
-              </a:buClr>
-              <a:buSzPts val="1100"/>
-              <a:buFont typeface="Arial"/>
-              <a:buNone/>
-            </a:pPr>
-            <a:r>
-              <a:rPr lang="en" sz="1300">
-                <a:latin typeface="Calibri"/>
-                <a:ea typeface="Calibri"/>
-                <a:cs typeface="Calibri"/>
-                <a:sym typeface="Calibri"/>
-              </a:rPr>
-              <a:t>"14 Ways to Use AI in Marketing that Actually Work (Recommended by Pros!)" - by Rob Glover</a:t>
-            </a:r>
-            <a:endParaRPr sz="1300">
-              <a:latin typeface="Calibri"/>
-              <a:ea typeface="Calibri"/>
-              <a:cs typeface="Calibri"/>
-              <a:sym typeface="Calibri"/>
-            </a:endParaRPr>
-          </a:p>
-          <a:p>
-            <a:pPr marL="0" lvl="0" indent="0" algn="l" rtl="0">
-              <a:spcBef>
-                <a:spcPts val="0"/>
-              </a:spcBef>
-              <a:spcAft>
-                <a:spcPts val="0"/>
-              </a:spcAft>
-              <a:buNone/>
-            </a:pPr>
-            <a:r>
-              <a:rPr lang="en" sz="1000" u="sng">
-                <a:solidFill>
-                  <a:schemeClr val="hlink"/>
-                </a:solidFill>
-                <a:latin typeface="Calibri"/>
-                <a:ea typeface="Calibri"/>
-                <a:cs typeface="Calibri"/>
-                <a:sym typeface="Calibri"/>
-                <a:hlinkClick r:id="rId6"/>
-              </a:rPr>
-              <a:t>https://www.wordstream.com/blog/ai-in-marketing</a:t>
-            </a:r>
-            <a:r>
-              <a:rPr lang="en" sz="1000">
-                <a:latin typeface="Calibri"/>
-                <a:ea typeface="Calibri"/>
-                <a:cs typeface="Calibri"/>
-                <a:sym typeface="Calibri"/>
-              </a:rPr>
-              <a:t> </a:t>
-            </a:r>
-            <a:endParaRPr sz="1000">
-              <a:latin typeface="Calibri"/>
-              <a:ea typeface="Calibri"/>
-              <a:cs typeface="Calibri"/>
-              <a:sym typeface="Calibri"/>
-            </a:endParaRPr>
-          </a:p>
-        </p:txBody>
-      </p:sp>
-    </p:spTree>
-  </p:cSld>
-  <p:clrMapOvr>
-    <a:masterClrMapping/>
-  </p:clrMapOvr>
-</p:sld>
-</file>
-
-<file path=ppt/slides/slide14.xml><?xml version="1.0" encoding="utf-8"?>
-<p:sld xmlns:a="http://schemas.openxmlformats.org/drawingml/2006/main" xmlns:r="http://schemas.openxmlformats.org/officeDocument/2006/relationships" xmlns:p="http://schemas.openxmlformats.org/presentationml/2006/main">
-  <p:cSld>
-    <p:spTree>
-      <p:nvGrpSpPr>
-        <p:cNvPr id="1" name="Shape 171"/>
-        <p:cNvGrpSpPr/>
-        <p:nvPr/>
-      </p:nvGrpSpPr>
-      <p:grpSpPr>
-        <a:xfrm>
-          <a:off x="0" y="0"/>
-          <a:ext cx="0" cy="0"/>
-          <a:chOff x="0" y="0"/>
-          <a:chExt cx="0" cy="0"/>
-        </a:xfrm>
-      </p:grpSpPr>
-      <p:sp>
-        <p:nvSpPr>
-          <p:cNvPr id="172" name="Google Shape;172;p27"/>
-          <p:cNvSpPr txBox="1"/>
-          <p:nvPr/>
-        </p:nvSpPr>
-        <p:spPr>
-          <a:xfrm>
-            <a:off x="76200" y="616800"/>
-            <a:ext cx="4408800" cy="2056500"/>
-          </a:xfrm>
-          <a:prstGeom prst="rect">
-            <a:avLst/>
-          </a:prstGeom>
-          <a:solidFill>
-            <a:srgbClr val="FFF2CC"/>
-          </a:solidFill>
-          <a:ln w="9525" cap="flat" cmpd="sng">
-            <a:solidFill>
-              <a:srgbClr val="FF0000"/>
-            </a:solidFill>
-            <a:prstDash val="solid"/>
-            <a:round/>
-            <a:headEnd type="none" w="sm" len="sm"/>
-            <a:tailEnd type="none" w="sm" len="sm"/>
-          </a:ln>
-        </p:spPr>
-        <p:txBody>
-          <a:bodyPr spcFirstLastPara="1" wrap="square" lIns="27425" tIns="27425" rIns="27425" bIns="27425" anchor="t" anchorCtr="0">
-            <a:spAutoFit/>
-          </a:bodyPr>
-          <a:lstStyle/>
-          <a:p>
-            <a:pPr marL="0" lvl="0" indent="0" algn="l" rtl="0">
-              <a:spcBef>
-                <a:spcPts val="0"/>
-              </a:spcBef>
-              <a:spcAft>
-                <a:spcPts val="0"/>
-              </a:spcAft>
-              <a:buNone/>
-            </a:pPr>
-            <a:r>
               <a:rPr lang="en" sz="1300">
                 <a:solidFill>
                   <a:schemeClr val="dk1"/>
@@ -16103,7 +16708,7 @@
       </p:sp>
       <p:sp>
         <p:nvSpPr>
-          <p:cNvPr id="173" name="Google Shape;173;p27"/>
+          <p:cNvPr id="178" name="Google Shape;178;p27"/>
           <p:cNvSpPr txBox="1"/>
           <p:nvPr/>
         </p:nvSpPr>
@@ -16161,7 +16766,7 @@
       </p:sp>
       <p:pic>
         <p:nvPicPr>
-          <p:cNvPr id="174" name="Google Shape;174;p27"/>
+          <p:cNvPr id="179" name="Google Shape;179;p27"/>
           <p:cNvPicPr preferRelativeResize="0"/>
           <p:nvPr/>
         </p:nvPicPr>
@@ -16194,7 +16799,7 @@
       </p:pic>
       <p:sp>
         <p:nvSpPr>
-          <p:cNvPr id="175" name="Google Shape;175;p27"/>
+          <p:cNvPr id="180" name="Google Shape;180;p27"/>
           <p:cNvSpPr txBox="1"/>
           <p:nvPr/>
         </p:nvSpPr>
@@ -16244,7 +16849,7 @@
                 <a:cs typeface="Calibri"/>
                 <a:sym typeface="Calibri"/>
               </a:rPr>
-              <a:t>SElon Musk: "Legacy media simply can’t compete with hundreds of millions of humans providing real-time, AI-assisted, interactive information"</a:t>
+              <a:t>Elon Musk: "Legacy media simply can’t compete with hundreds of millions of humans providing real-time, AI-assisted, interactive information"</a:t>
             </a:r>
             <a:endParaRPr sz="1300">
               <a:solidFill>
@@ -16305,7 +16910,7 @@
       </p:sp>
       <p:sp>
         <p:nvSpPr>
-          <p:cNvPr id="176" name="Google Shape;176;p27"/>
+          <p:cNvPr id="181" name="Google Shape;181;p27"/>
           <p:cNvSpPr txBox="1"/>
           <p:nvPr/>
         </p:nvSpPr>
@@ -16363,7 +16968,7 @@
       </p:sp>
       <p:pic>
         <p:nvPicPr>
-          <p:cNvPr id="177" name="Google Shape;177;p27"/>
+          <p:cNvPr id="182" name="Google Shape;182;p27"/>
           <p:cNvPicPr preferRelativeResize="0"/>
           <p:nvPr/>
         </p:nvPicPr>
@@ -16412,7 +17017,7 @@
   <p:cSld>
     <p:spTree>
       <p:nvGrpSpPr>
-        <p:cNvPr id="1" name="Shape 181"/>
+        <p:cNvPr id="1" name="Shape 186"/>
         <p:cNvGrpSpPr/>
         <p:nvPr/>
       </p:nvGrpSpPr>
@@ -16426,14 +17031,14 @@
       </p:grpSpPr>
       <p:sp>
         <p:nvSpPr>
-          <p:cNvPr id="182" name="Google Shape;182;p28"/>
+          <p:cNvPr id="187" name="Google Shape;187;p28"/>
           <p:cNvSpPr txBox="1"/>
           <p:nvPr/>
         </p:nvSpPr>
         <p:spPr>
           <a:xfrm>
-            <a:off x="5870100" y="52350"/>
-            <a:ext cx="1342200" cy="618600"/>
+            <a:off x="4886325" y="52350"/>
+            <a:ext cx="2326200" cy="618600"/>
           </a:xfrm>
           <a:prstGeom prst="rect">
             <a:avLst/>
@@ -16467,7 +17072,7 @@
               <a:buNone/>
             </a:pPr>
             <a:r>
-              <a:rPr lang="en" sz="1300" b="1" i="0" u="none" strike="noStrike" cap="none">
+              <a:rPr lang="en" sz="1300" b="1">
                 <a:solidFill>
                   <a:srgbClr val="FF0000"/>
                 </a:solidFill>
@@ -16476,123 +17081,7 @@
                 <a:cs typeface="Calibri"/>
                 <a:sym typeface="Calibri"/>
               </a:rPr>
-              <a:t>models: </a:t>
-            </a:r>
-            <a:r>
-              <a:rPr lang="en" sz="1300" b="1">
-                <a:solidFill>
-                  <a:srgbClr val="FF0000"/>
-                </a:solidFill>
-                <a:latin typeface="Calibri"/>
-                <a:ea typeface="Calibri"/>
-                <a:cs typeface="Calibri"/>
-                <a:sym typeface="Calibri"/>
-              </a:rPr>
-              <a:t>82</a:t>
-            </a:r>
-            <a:endParaRPr sz="1300" b="1" i="0" u="none" strike="noStrike" cap="none">
-              <a:solidFill>
-                <a:srgbClr val="FF0000"/>
-              </a:solidFill>
-              <a:latin typeface="Calibri"/>
-              <a:ea typeface="Calibri"/>
-              <a:cs typeface="Calibri"/>
-              <a:sym typeface="Calibri"/>
-            </a:endParaRPr>
-          </a:p>
-          <a:p>
-            <a:pPr marL="0" marR="0" lvl="0" indent="0" algn="l" rtl="0">
-              <a:lnSpc>
-                <a:spcPct val="100000"/>
-              </a:lnSpc>
-              <a:spcBef>
-                <a:spcPts val="0"/>
-              </a:spcBef>
-              <a:spcAft>
-                <a:spcPts val="0"/>
-              </a:spcAft>
-              <a:buClr>
-                <a:schemeClr val="dk1"/>
-              </a:buClr>
-              <a:buSzPts val="1100"/>
-              <a:buFont typeface="Arial"/>
-              <a:buNone/>
-            </a:pPr>
-            <a:r>
-              <a:rPr lang="en" sz="1300" b="1" i="0" u="none" strike="noStrike" cap="none">
-                <a:solidFill>
-                  <a:srgbClr val="FF0000"/>
-                </a:solidFill>
-                <a:latin typeface="Calibri"/>
-                <a:ea typeface="Calibri"/>
-                <a:cs typeface="Calibri"/>
-                <a:sym typeface="Calibri"/>
-              </a:rPr>
-              <a:t>votes: </a:t>
-            </a:r>
-            <a:r>
-              <a:rPr lang="en" sz="1300" b="1">
-                <a:solidFill>
-                  <a:srgbClr val="FF0000"/>
-                </a:solidFill>
-                <a:latin typeface="Calibri"/>
-                <a:ea typeface="Calibri"/>
-                <a:cs typeface="Calibri"/>
-                <a:sym typeface="Calibri"/>
-              </a:rPr>
-              <a:t>652,743</a:t>
-            </a:r>
-            <a:endParaRPr sz="1300" b="1" i="0" u="none" strike="noStrike" cap="none">
-              <a:solidFill>
-                <a:srgbClr val="FF0000"/>
-              </a:solidFill>
-              <a:latin typeface="Calibri"/>
-              <a:ea typeface="Calibri"/>
-              <a:cs typeface="Calibri"/>
-              <a:sym typeface="Calibri"/>
-            </a:endParaRPr>
-          </a:p>
-          <a:p>
-            <a:pPr marL="0" marR="0" lvl="0" indent="0" algn="l" rtl="0">
-              <a:lnSpc>
-                <a:spcPct val="100000"/>
-              </a:lnSpc>
-              <a:spcBef>
-                <a:spcPts val="0"/>
-              </a:spcBef>
-              <a:spcAft>
-                <a:spcPts val="0"/>
-              </a:spcAft>
-              <a:buClr>
-                <a:schemeClr val="dk1"/>
-              </a:buClr>
-              <a:buSzPts val="1100"/>
-              <a:buFont typeface="Arial"/>
-              <a:buNone/>
-            </a:pPr>
-            <a:r>
-              <a:rPr lang="en" sz="1300" b="1">
-                <a:solidFill>
-                  <a:srgbClr val="FF0000"/>
-                </a:solidFill>
-                <a:latin typeface="Calibri"/>
-                <a:ea typeface="Calibri"/>
-                <a:cs typeface="Calibri"/>
-                <a:sym typeface="Calibri"/>
-              </a:rPr>
-              <a:t>April 11</a:t>
-            </a:r>
-            <a:r>
-              <a:rPr lang="en" sz="1300" b="1" i="0" u="none" strike="noStrike" cap="none">
-                <a:solidFill>
-                  <a:srgbClr val="FF0000"/>
-                </a:solidFill>
-                <a:latin typeface="Calibri"/>
-                <a:ea typeface="Calibri"/>
-                <a:cs typeface="Calibri"/>
-                <a:sym typeface="Calibri"/>
-              </a:rPr>
-              <a:t>, 2024</a:t>
+              <a:t>Total #models: 89.    </a:t>
             </a:r>
             <a:endParaRPr sz="1300" b="1">
               <a:solidFill>
@@ -16604,11 +17093,91 @@
               <a:sym typeface="Calibri"/>
             </a:endParaRPr>
           </a:p>
+          <a:p>
+            <a:pPr marL="0" marR="0" lvl="0" indent="0" algn="l" rtl="0">
+              <a:lnSpc>
+                <a:spcPct val="100000"/>
+              </a:lnSpc>
+              <a:spcBef>
+                <a:spcPts val="0"/>
+              </a:spcBef>
+              <a:spcAft>
+                <a:spcPts val="0"/>
+              </a:spcAft>
+              <a:buClr>
+                <a:schemeClr val="dk1"/>
+              </a:buClr>
+              <a:buSzPts val="1100"/>
+              <a:buFont typeface="Arial"/>
+              <a:buNone/>
+            </a:pPr>
+            <a:r>
+              <a:rPr lang="en" sz="1300" b="1">
+                <a:solidFill>
+                  <a:srgbClr val="FF0000"/>
+                </a:solidFill>
+                <a:latin typeface="Calibri"/>
+                <a:ea typeface="Calibri"/>
+                <a:cs typeface="Calibri"/>
+                <a:sym typeface="Calibri"/>
+              </a:rPr>
+              <a:t>Total #votes: 722,009.    </a:t>
+            </a:r>
+            <a:endParaRPr sz="1300" b="1">
+              <a:solidFill>
+                <a:srgbClr val="FF0000"/>
+              </a:solidFill>
+              <a:latin typeface="Calibri"/>
+              <a:ea typeface="Calibri"/>
+              <a:cs typeface="Calibri"/>
+              <a:sym typeface="Calibri"/>
+            </a:endParaRPr>
+          </a:p>
+          <a:p>
+            <a:pPr marL="0" marR="0" lvl="0" indent="0" algn="l" rtl="0">
+              <a:lnSpc>
+                <a:spcPct val="100000"/>
+              </a:lnSpc>
+              <a:spcBef>
+                <a:spcPts val="0"/>
+              </a:spcBef>
+              <a:spcAft>
+                <a:spcPts val="0"/>
+              </a:spcAft>
+              <a:buClr>
+                <a:schemeClr val="dk1"/>
+              </a:buClr>
+              <a:buSzPts val="1100"/>
+              <a:buFont typeface="Arial"/>
+              <a:buNone/>
+            </a:pPr>
+            <a:r>
+              <a:rPr lang="en" sz="1300" b="1">
+                <a:solidFill>
+                  <a:srgbClr val="FF0000"/>
+                </a:solidFill>
+                <a:latin typeface="Calibri"/>
+                <a:ea typeface="Calibri"/>
+                <a:cs typeface="Calibri"/>
+                <a:sym typeface="Calibri"/>
+              </a:rPr>
+              <a:t>Last updated: April 13, 2024</a:t>
+            </a:r>
+            <a:endParaRPr sz="1300" b="1">
+              <a:solidFill>
+                <a:srgbClr val="FF0000"/>
+              </a:solidFill>
+              <a:latin typeface="Calibri"/>
+              <a:ea typeface="Calibri"/>
+              <a:cs typeface="Calibri"/>
+              <a:sym typeface="Calibri"/>
+            </a:endParaRPr>
+          </a:p>
         </p:txBody>
       </p:sp>
       <p:sp>
         <p:nvSpPr>
-          <p:cNvPr id="183" name="Google Shape;183;p28"/>
+          <p:cNvPr id="188" name="Google Shape;188;p28"/>
           <p:cNvSpPr txBox="1"/>
           <p:nvPr/>
         </p:nvSpPr>
@@ -16722,7 +17291,7 @@
       </p:sp>
       <p:sp>
         <p:nvSpPr>
-          <p:cNvPr id="184" name="Google Shape;184;p28"/>
+          <p:cNvPr id="189" name="Google Shape;189;p28"/>
           <p:cNvSpPr txBox="1"/>
           <p:nvPr/>
         </p:nvSpPr>
@@ -16788,7 +17357,7 @@
       </p:sp>
       <p:sp>
         <p:nvSpPr>
-          <p:cNvPr id="185" name="Google Shape;185;p28"/>
+          <p:cNvPr id="190" name="Google Shape;190;p28"/>
           <p:cNvSpPr txBox="1"/>
           <p:nvPr/>
         </p:nvSpPr>
@@ -16879,7 +17448,7 @@
       </p:sp>
       <p:pic>
         <p:nvPicPr>
-          <p:cNvPr id="186" name="Google Shape;186;p28"/>
+          <p:cNvPr id="191" name="Google Shape;191;p28"/>
           <p:cNvPicPr preferRelativeResize="0"/>
           <p:nvPr/>
         </p:nvPicPr>
@@ -16898,8 +17467,8 @@
         </p:blipFill>
         <p:spPr>
           <a:xfrm>
-            <a:off x="25350" y="1356750"/>
-            <a:ext cx="4506799" cy="3179400"/>
+            <a:off x="152400" y="899550"/>
+            <a:ext cx="4367199" cy="2990199"/>
           </a:xfrm>
           <a:prstGeom prst="rect">
             <a:avLst/>
@@ -16918,7 +17487,7 @@
       </p:pic>
       <p:pic>
         <p:nvPicPr>
-          <p:cNvPr id="187" name="Google Shape;187;p28"/>
+          <p:cNvPr id="192" name="Google Shape;192;p28"/>
           <p:cNvPicPr preferRelativeResize="0"/>
           <p:nvPr/>
         </p:nvPicPr>
@@ -16937,8 +17506,8 @@
         </p:blipFill>
         <p:spPr>
           <a:xfrm>
-            <a:off x="4621400" y="1526825"/>
-            <a:ext cx="4506799" cy="2623280"/>
+            <a:off x="4624399" y="899550"/>
+            <a:ext cx="4367199" cy="2924890"/>
           </a:xfrm>
           <a:prstGeom prst="rect">
             <a:avLst/>
@@ -16955,23 +17524,33 @@
           </a:ln>
         </p:spPr>
       </p:pic>
-      <p:sp>
-        <p:nvSpPr>
-          <p:cNvPr id="188" name="Google Shape;188;p28"/>
-          <p:cNvSpPr txBox="1"/>
+      <p:pic>
+        <p:nvPicPr>
+          <p:cNvPr id="193" name="Google Shape;193;p28"/>
+          <p:cNvPicPr preferRelativeResize="0"/>
           <p:nvPr/>
-        </p:nvSpPr>
+        </p:nvPicPr>
+        <p:blipFill rotWithShape="1">
+          <a:blip r:embed="rId6" cstate="email">
+            <a:alphaModFix/>
+            <a:extLst>
+              <a:ext uri="{28A0092B-C50C-407E-A947-70E740481C1C}">
+                <a14:useLocalDpi xmlns:a14="http://schemas.microsoft.com/office/drawing/2010/main"/>
+              </a:ext>
+            </a:extLst>
+          </a:blip>
+          <a:srcRect/>
+          <a:stretch/>
+        </p:blipFill>
         <p:spPr>
           <a:xfrm>
-            <a:off x="225025" y="3628900"/>
-            <a:ext cx="276300" cy="141600"/>
+            <a:off x="4624400" y="3830131"/>
+            <a:ext cx="4367199" cy="552549"/>
           </a:xfrm>
           <a:prstGeom prst="rect">
             <a:avLst/>
           </a:prstGeom>
-          <a:solidFill>
-            <a:srgbClr val="FFF2CC"/>
-          </a:solidFill>
+          <a:noFill/>
           <a:ln w="9525" cap="flat" cmpd="sng">
             <a:solidFill>
               <a:srgbClr val="FF0000"/>
@@ -16982,581 +17561,7 @@
             <a:tailEnd type="none" w="sm" len="sm"/>
           </a:ln>
         </p:spPr>
-        <p:txBody>
-          <a:bodyPr spcFirstLastPara="1" wrap="square" lIns="9125" tIns="9125" rIns="9125" bIns="9125" anchor="t" anchorCtr="0">
-            <a:spAutoFit/>
-          </a:bodyPr>
-          <a:lstStyle/>
-          <a:p>
-            <a:pPr marL="0" marR="0" lvl="0" indent="0" algn="ctr" rtl="0">
-              <a:lnSpc>
-                <a:spcPct val="100000"/>
-              </a:lnSpc>
-              <a:spcBef>
-                <a:spcPts val="0"/>
-              </a:spcBef>
-              <a:spcAft>
-                <a:spcPts val="0"/>
-              </a:spcAft>
-              <a:buClr>
-                <a:schemeClr val="dk1"/>
-              </a:buClr>
-              <a:buSzPts val="1100"/>
-              <a:buFont typeface="Arial"/>
-              <a:buNone/>
-            </a:pPr>
-            <a:r>
-              <a:rPr lang="en" sz="800" b="0" i="0" u="none" strike="noStrike" cap="none">
-                <a:solidFill>
-                  <a:schemeClr val="dk1"/>
-                </a:solidFill>
-                <a:latin typeface="Calibri"/>
-                <a:ea typeface="Calibri"/>
-                <a:cs typeface="Calibri"/>
-                <a:sym typeface="Calibri"/>
-              </a:rPr>
-              <a:t>o.</a:t>
-            </a:r>
-            <a:r>
-              <a:rPr lang="en" sz="800">
-                <a:solidFill>
-                  <a:schemeClr val="dk1"/>
-                </a:solidFill>
-                <a:latin typeface="Calibri"/>
-                <a:ea typeface="Calibri"/>
-                <a:cs typeface="Calibri"/>
-                <a:sym typeface="Calibri"/>
-              </a:rPr>
-              <a:t>s.</a:t>
-            </a:r>
-            <a:endParaRPr sz="800" b="0" i="0" u="none" strike="noStrike" cap="none">
-              <a:solidFill>
-                <a:schemeClr val="dk1"/>
-              </a:solidFill>
-              <a:latin typeface="Calibri"/>
-              <a:ea typeface="Calibri"/>
-              <a:cs typeface="Calibri"/>
-              <a:sym typeface="Calibri"/>
-            </a:endParaRPr>
-          </a:p>
-        </p:txBody>
-      </p:sp>
-      <p:sp>
-        <p:nvSpPr>
-          <p:cNvPr id="189" name="Google Shape;189;p28"/>
-          <p:cNvSpPr txBox="1"/>
-          <p:nvPr/>
-        </p:nvSpPr>
-        <p:spPr>
-          <a:xfrm>
-            <a:off x="225025" y="4378180"/>
-            <a:ext cx="276300" cy="141600"/>
-          </a:xfrm>
-          <a:prstGeom prst="rect">
-            <a:avLst/>
-          </a:prstGeom>
-          <a:solidFill>
-            <a:srgbClr val="FFF2CC"/>
-          </a:solidFill>
-          <a:ln w="9525" cap="flat" cmpd="sng">
-            <a:solidFill>
-              <a:srgbClr val="FF0000"/>
-            </a:solidFill>
-            <a:prstDash val="solid"/>
-            <a:round/>
-            <a:headEnd type="none" w="sm" len="sm"/>
-            <a:tailEnd type="none" w="sm" len="sm"/>
-          </a:ln>
-        </p:spPr>
-        <p:txBody>
-          <a:bodyPr spcFirstLastPara="1" wrap="square" lIns="9125" tIns="9125" rIns="9125" bIns="9125" anchor="t" anchorCtr="0">
-            <a:spAutoFit/>
-          </a:bodyPr>
-          <a:lstStyle/>
-          <a:p>
-            <a:pPr marL="0" marR="0" lvl="0" indent="0" algn="ctr" rtl="0">
-              <a:lnSpc>
-                <a:spcPct val="100000"/>
-              </a:lnSpc>
-              <a:spcBef>
-                <a:spcPts val="0"/>
-              </a:spcBef>
-              <a:spcAft>
-                <a:spcPts val="0"/>
-              </a:spcAft>
-              <a:buClr>
-                <a:schemeClr val="dk1"/>
-              </a:buClr>
-              <a:buSzPts val="1100"/>
-              <a:buFont typeface="Arial"/>
-              <a:buNone/>
-            </a:pPr>
-            <a:r>
-              <a:rPr lang="en" sz="800" b="0" i="0" u="none" strike="noStrike" cap="none">
-                <a:solidFill>
-                  <a:schemeClr val="dk1"/>
-                </a:solidFill>
-                <a:latin typeface="Calibri"/>
-                <a:ea typeface="Calibri"/>
-                <a:cs typeface="Calibri"/>
-                <a:sym typeface="Calibri"/>
-              </a:rPr>
-              <a:t>o.</a:t>
-            </a:r>
-            <a:r>
-              <a:rPr lang="en" sz="800">
-                <a:solidFill>
-                  <a:schemeClr val="dk1"/>
-                </a:solidFill>
-                <a:latin typeface="Calibri"/>
-                <a:ea typeface="Calibri"/>
-                <a:cs typeface="Calibri"/>
-                <a:sym typeface="Calibri"/>
-              </a:rPr>
-              <a:t>s.</a:t>
-            </a:r>
-            <a:endParaRPr sz="800" b="0" i="0" u="none" strike="noStrike" cap="none">
-              <a:solidFill>
-                <a:schemeClr val="dk1"/>
-              </a:solidFill>
-              <a:latin typeface="Calibri"/>
-              <a:ea typeface="Calibri"/>
-              <a:cs typeface="Calibri"/>
-              <a:sym typeface="Calibri"/>
-            </a:endParaRPr>
-          </a:p>
-        </p:txBody>
-      </p:sp>
-      <p:sp>
-        <p:nvSpPr>
-          <p:cNvPr id="190" name="Google Shape;190;p28"/>
-          <p:cNvSpPr txBox="1"/>
-          <p:nvPr/>
-        </p:nvSpPr>
-        <p:spPr>
-          <a:xfrm>
-            <a:off x="4838025" y="3794135"/>
-            <a:ext cx="276300" cy="141600"/>
-          </a:xfrm>
-          <a:prstGeom prst="rect">
-            <a:avLst/>
-          </a:prstGeom>
-          <a:solidFill>
-            <a:srgbClr val="FFF2CC"/>
-          </a:solidFill>
-          <a:ln w="9525" cap="flat" cmpd="sng">
-            <a:solidFill>
-              <a:srgbClr val="FF0000"/>
-            </a:solidFill>
-            <a:prstDash val="solid"/>
-            <a:round/>
-            <a:headEnd type="none" w="sm" len="sm"/>
-            <a:tailEnd type="none" w="sm" len="sm"/>
-          </a:ln>
-        </p:spPr>
-        <p:txBody>
-          <a:bodyPr spcFirstLastPara="1" wrap="square" lIns="9125" tIns="9125" rIns="9125" bIns="9125" anchor="t" anchorCtr="0">
-            <a:spAutoFit/>
-          </a:bodyPr>
-          <a:lstStyle/>
-          <a:p>
-            <a:pPr marL="0" marR="0" lvl="0" indent="0" algn="ctr" rtl="0">
-              <a:lnSpc>
-                <a:spcPct val="100000"/>
-              </a:lnSpc>
-              <a:spcBef>
-                <a:spcPts val="0"/>
-              </a:spcBef>
-              <a:spcAft>
-                <a:spcPts val="0"/>
-              </a:spcAft>
-              <a:buClr>
-                <a:schemeClr val="dk1"/>
-              </a:buClr>
-              <a:buSzPts val="1100"/>
-              <a:buFont typeface="Arial"/>
-              <a:buNone/>
-            </a:pPr>
-            <a:r>
-              <a:rPr lang="en" sz="800" b="0" i="0" u="none" strike="noStrike" cap="none">
-                <a:solidFill>
-                  <a:schemeClr val="dk1"/>
-                </a:solidFill>
-                <a:latin typeface="Calibri"/>
-                <a:ea typeface="Calibri"/>
-                <a:cs typeface="Calibri"/>
-                <a:sym typeface="Calibri"/>
-              </a:rPr>
-              <a:t>o.</a:t>
-            </a:r>
-            <a:r>
-              <a:rPr lang="en" sz="800">
-                <a:solidFill>
-                  <a:schemeClr val="dk1"/>
-                </a:solidFill>
-                <a:latin typeface="Calibri"/>
-                <a:ea typeface="Calibri"/>
-                <a:cs typeface="Calibri"/>
-                <a:sym typeface="Calibri"/>
-              </a:rPr>
-              <a:t>s.</a:t>
-            </a:r>
-            <a:endParaRPr sz="800" b="0" i="0" u="none" strike="noStrike" cap="none">
-              <a:solidFill>
-                <a:schemeClr val="dk1"/>
-              </a:solidFill>
-              <a:latin typeface="Calibri"/>
-              <a:ea typeface="Calibri"/>
-              <a:cs typeface="Calibri"/>
-              <a:sym typeface="Calibri"/>
-            </a:endParaRPr>
-          </a:p>
-        </p:txBody>
-      </p:sp>
-      <p:sp>
-        <p:nvSpPr>
-          <p:cNvPr id="191" name="Google Shape;191;p28"/>
-          <p:cNvSpPr txBox="1"/>
-          <p:nvPr/>
-        </p:nvSpPr>
-        <p:spPr>
-          <a:xfrm>
-            <a:off x="4838025" y="3431217"/>
-            <a:ext cx="276300" cy="141600"/>
-          </a:xfrm>
-          <a:prstGeom prst="rect">
-            <a:avLst/>
-          </a:prstGeom>
-          <a:solidFill>
-            <a:srgbClr val="FFF2CC"/>
-          </a:solidFill>
-          <a:ln w="9525" cap="flat" cmpd="sng">
-            <a:solidFill>
-              <a:srgbClr val="FF0000"/>
-            </a:solidFill>
-            <a:prstDash val="solid"/>
-            <a:round/>
-            <a:headEnd type="none" w="sm" len="sm"/>
-            <a:tailEnd type="none" w="sm" len="sm"/>
-          </a:ln>
-        </p:spPr>
-        <p:txBody>
-          <a:bodyPr spcFirstLastPara="1" wrap="square" lIns="9125" tIns="9125" rIns="9125" bIns="9125" anchor="t" anchorCtr="0">
-            <a:spAutoFit/>
-          </a:bodyPr>
-          <a:lstStyle/>
-          <a:p>
-            <a:pPr marL="0" marR="0" lvl="0" indent="0" algn="ctr" rtl="0">
-              <a:lnSpc>
-                <a:spcPct val="100000"/>
-              </a:lnSpc>
-              <a:spcBef>
-                <a:spcPts val="0"/>
-              </a:spcBef>
-              <a:spcAft>
-                <a:spcPts val="0"/>
-              </a:spcAft>
-              <a:buClr>
-                <a:schemeClr val="dk1"/>
-              </a:buClr>
-              <a:buSzPts val="1100"/>
-              <a:buFont typeface="Arial"/>
-              <a:buNone/>
-            </a:pPr>
-            <a:r>
-              <a:rPr lang="en" sz="800" b="0" i="0" u="none" strike="noStrike" cap="none">
-                <a:solidFill>
-                  <a:schemeClr val="dk1"/>
-                </a:solidFill>
-                <a:latin typeface="Calibri"/>
-                <a:ea typeface="Calibri"/>
-                <a:cs typeface="Calibri"/>
-                <a:sym typeface="Calibri"/>
-              </a:rPr>
-              <a:t>o.</a:t>
-            </a:r>
-            <a:r>
-              <a:rPr lang="en" sz="800">
-                <a:solidFill>
-                  <a:schemeClr val="dk1"/>
-                </a:solidFill>
-                <a:latin typeface="Calibri"/>
-                <a:ea typeface="Calibri"/>
-                <a:cs typeface="Calibri"/>
-                <a:sym typeface="Calibri"/>
-              </a:rPr>
-              <a:t>s.</a:t>
-            </a:r>
-            <a:endParaRPr sz="800" b="0" i="0" u="none" strike="noStrike" cap="none">
-              <a:solidFill>
-                <a:schemeClr val="dk1"/>
-              </a:solidFill>
-              <a:latin typeface="Calibri"/>
-              <a:ea typeface="Calibri"/>
-              <a:cs typeface="Calibri"/>
-              <a:sym typeface="Calibri"/>
-            </a:endParaRPr>
-          </a:p>
-        </p:txBody>
-      </p:sp>
-      <p:sp>
-        <p:nvSpPr>
-          <p:cNvPr id="192" name="Google Shape;192;p28"/>
-          <p:cNvSpPr txBox="1"/>
-          <p:nvPr/>
-        </p:nvSpPr>
-        <p:spPr>
-          <a:xfrm>
-            <a:off x="4838025" y="2484206"/>
-            <a:ext cx="276300" cy="141600"/>
-          </a:xfrm>
-          <a:prstGeom prst="rect">
-            <a:avLst/>
-          </a:prstGeom>
-          <a:solidFill>
-            <a:srgbClr val="FFF2CC"/>
-          </a:solidFill>
-          <a:ln w="9525" cap="flat" cmpd="sng">
-            <a:solidFill>
-              <a:srgbClr val="FF0000"/>
-            </a:solidFill>
-            <a:prstDash val="solid"/>
-            <a:round/>
-            <a:headEnd type="none" w="sm" len="sm"/>
-            <a:tailEnd type="none" w="sm" len="sm"/>
-          </a:ln>
-        </p:spPr>
-        <p:txBody>
-          <a:bodyPr spcFirstLastPara="1" wrap="square" lIns="9125" tIns="9125" rIns="9125" bIns="9125" anchor="t" anchorCtr="0">
-            <a:spAutoFit/>
-          </a:bodyPr>
-          <a:lstStyle/>
-          <a:p>
-            <a:pPr marL="0" marR="0" lvl="0" indent="0" algn="ctr" rtl="0">
-              <a:lnSpc>
-                <a:spcPct val="100000"/>
-              </a:lnSpc>
-              <a:spcBef>
-                <a:spcPts val="0"/>
-              </a:spcBef>
-              <a:spcAft>
-                <a:spcPts val="0"/>
-              </a:spcAft>
-              <a:buClr>
-                <a:schemeClr val="dk1"/>
-              </a:buClr>
-              <a:buSzPts val="1100"/>
-              <a:buFont typeface="Arial"/>
-              <a:buNone/>
-            </a:pPr>
-            <a:r>
-              <a:rPr lang="en" sz="800" b="0" i="0" u="none" strike="noStrike" cap="none">
-                <a:solidFill>
-                  <a:schemeClr val="dk1"/>
-                </a:solidFill>
-                <a:latin typeface="Calibri"/>
-                <a:ea typeface="Calibri"/>
-                <a:cs typeface="Calibri"/>
-                <a:sym typeface="Calibri"/>
-              </a:rPr>
-              <a:t>o.</a:t>
-            </a:r>
-            <a:r>
-              <a:rPr lang="en" sz="800">
-                <a:solidFill>
-                  <a:schemeClr val="dk1"/>
-                </a:solidFill>
-                <a:latin typeface="Calibri"/>
-                <a:ea typeface="Calibri"/>
-                <a:cs typeface="Calibri"/>
-                <a:sym typeface="Calibri"/>
-              </a:rPr>
-              <a:t>s.</a:t>
-            </a:r>
-            <a:endParaRPr sz="800" b="0" i="0" u="none" strike="noStrike" cap="none">
-              <a:solidFill>
-                <a:schemeClr val="dk1"/>
-              </a:solidFill>
-              <a:latin typeface="Calibri"/>
-              <a:ea typeface="Calibri"/>
-              <a:cs typeface="Calibri"/>
-              <a:sym typeface="Calibri"/>
-            </a:endParaRPr>
-          </a:p>
-        </p:txBody>
-      </p:sp>
-      <p:sp>
-        <p:nvSpPr>
-          <p:cNvPr id="193" name="Google Shape;193;p28"/>
-          <p:cNvSpPr txBox="1"/>
-          <p:nvPr/>
-        </p:nvSpPr>
-        <p:spPr>
-          <a:xfrm>
-            <a:off x="4838025" y="2680194"/>
-            <a:ext cx="276300" cy="141600"/>
-          </a:xfrm>
-          <a:prstGeom prst="rect">
-            <a:avLst/>
-          </a:prstGeom>
-          <a:solidFill>
-            <a:srgbClr val="FFF2CC"/>
-          </a:solidFill>
-          <a:ln w="9525" cap="flat" cmpd="sng">
-            <a:solidFill>
-              <a:srgbClr val="FF0000"/>
-            </a:solidFill>
-            <a:prstDash val="solid"/>
-            <a:round/>
-            <a:headEnd type="none" w="sm" len="sm"/>
-            <a:tailEnd type="none" w="sm" len="sm"/>
-          </a:ln>
-        </p:spPr>
-        <p:txBody>
-          <a:bodyPr spcFirstLastPara="1" wrap="square" lIns="9125" tIns="9125" rIns="9125" bIns="9125" anchor="t" anchorCtr="0">
-            <a:spAutoFit/>
-          </a:bodyPr>
-          <a:lstStyle/>
-          <a:p>
-            <a:pPr marL="0" marR="0" lvl="0" indent="0" algn="ctr" rtl="0">
-              <a:lnSpc>
-                <a:spcPct val="100000"/>
-              </a:lnSpc>
-              <a:spcBef>
-                <a:spcPts val="0"/>
-              </a:spcBef>
-              <a:spcAft>
-                <a:spcPts val="0"/>
-              </a:spcAft>
-              <a:buClr>
-                <a:schemeClr val="dk1"/>
-              </a:buClr>
-              <a:buSzPts val="1100"/>
-              <a:buFont typeface="Arial"/>
-              <a:buNone/>
-            </a:pPr>
-            <a:r>
-              <a:rPr lang="en" sz="800" b="0" i="0" u="none" strike="noStrike" cap="none">
-                <a:solidFill>
-                  <a:schemeClr val="dk1"/>
-                </a:solidFill>
-                <a:latin typeface="Calibri"/>
-                <a:ea typeface="Calibri"/>
-                <a:cs typeface="Calibri"/>
-                <a:sym typeface="Calibri"/>
-              </a:rPr>
-              <a:t>o.</a:t>
-            </a:r>
-            <a:r>
-              <a:rPr lang="en" sz="800">
-                <a:solidFill>
-                  <a:schemeClr val="dk1"/>
-                </a:solidFill>
-                <a:latin typeface="Calibri"/>
-                <a:ea typeface="Calibri"/>
-                <a:cs typeface="Calibri"/>
-                <a:sym typeface="Calibri"/>
-              </a:rPr>
-              <a:t>s.</a:t>
-            </a:r>
-            <a:endParaRPr sz="800" b="0" i="0" u="none" strike="noStrike" cap="none">
-              <a:solidFill>
-                <a:schemeClr val="dk1"/>
-              </a:solidFill>
-              <a:latin typeface="Calibri"/>
-              <a:ea typeface="Calibri"/>
-              <a:cs typeface="Calibri"/>
-              <a:sym typeface="Calibri"/>
-            </a:endParaRPr>
-          </a:p>
-        </p:txBody>
-      </p:sp>
-      <p:sp>
-        <p:nvSpPr>
-          <p:cNvPr id="194" name="Google Shape;194;p28"/>
-          <p:cNvSpPr txBox="1"/>
-          <p:nvPr/>
-        </p:nvSpPr>
-        <p:spPr>
-          <a:xfrm>
-            <a:off x="4838025" y="3240245"/>
-            <a:ext cx="276300" cy="141600"/>
-          </a:xfrm>
-          <a:prstGeom prst="rect">
-            <a:avLst/>
-          </a:prstGeom>
-          <a:solidFill>
-            <a:srgbClr val="FFF2CC"/>
-          </a:solidFill>
-          <a:ln w="9525" cap="flat" cmpd="sng">
-            <a:solidFill>
-              <a:srgbClr val="FF0000"/>
-            </a:solidFill>
-            <a:prstDash val="solid"/>
-            <a:round/>
-            <a:headEnd type="none" w="sm" len="sm"/>
-            <a:tailEnd type="none" w="sm" len="sm"/>
-          </a:ln>
-        </p:spPr>
-        <p:txBody>
-          <a:bodyPr spcFirstLastPara="1" wrap="square" lIns="9125" tIns="9125" rIns="9125" bIns="9125" anchor="t" anchorCtr="0">
-            <a:spAutoFit/>
-          </a:bodyPr>
-          <a:lstStyle/>
-          <a:p>
-            <a:pPr marL="0" marR="0" lvl="0" indent="0" algn="ctr" rtl="0">
-              <a:lnSpc>
-                <a:spcPct val="100000"/>
-              </a:lnSpc>
-              <a:spcBef>
-                <a:spcPts val="0"/>
-              </a:spcBef>
-              <a:spcAft>
-                <a:spcPts val="0"/>
-              </a:spcAft>
-              <a:buClr>
-                <a:schemeClr val="dk1"/>
-              </a:buClr>
-              <a:buSzPts val="1100"/>
-              <a:buFont typeface="Arial"/>
-              <a:buNone/>
-            </a:pPr>
-            <a:r>
-              <a:rPr lang="en" sz="800" b="0" i="0" u="none" strike="noStrike" cap="none">
-                <a:solidFill>
-                  <a:schemeClr val="dk1"/>
-                </a:solidFill>
-                <a:latin typeface="Calibri"/>
-                <a:ea typeface="Calibri"/>
-                <a:cs typeface="Calibri"/>
-                <a:sym typeface="Calibri"/>
-              </a:rPr>
-              <a:t>o.</a:t>
-            </a:r>
-            <a:r>
-              <a:rPr lang="en" sz="800">
-                <a:solidFill>
-                  <a:schemeClr val="dk1"/>
-                </a:solidFill>
-                <a:latin typeface="Calibri"/>
-                <a:ea typeface="Calibri"/>
-                <a:cs typeface="Calibri"/>
-                <a:sym typeface="Calibri"/>
-              </a:rPr>
-              <a:t>s.</a:t>
-            </a:r>
-            <a:endParaRPr sz="800" b="0" i="0" u="none" strike="noStrike" cap="none">
-              <a:solidFill>
-                <a:schemeClr val="dk1"/>
-              </a:solidFill>
-              <a:latin typeface="Calibri"/>
-              <a:ea typeface="Calibri"/>
-              <a:cs typeface="Calibri"/>
-              <a:sym typeface="Calibri"/>
-            </a:endParaRPr>
-          </a:p>
-        </p:txBody>
-      </p:sp>
+      </p:pic>
     </p:spTree>
   </p:cSld>
   <p:clrMapOvr>
@@ -17570,7 +17575,7 @@
   <p:cSld>
     <p:spTree>
       <p:nvGrpSpPr>
-        <p:cNvPr id="1" name="Shape 198"/>
+        <p:cNvPr id="1" name="Shape 197"/>
         <p:cNvGrpSpPr/>
         <p:nvPr/>
       </p:nvGrpSpPr>
@@ -17582,6 +17587,39 @@
           <a:chExt cx="0" cy="0"/>
         </a:xfrm>
       </p:grpSpPr>
+      <p:pic>
+        <p:nvPicPr>
+          <p:cNvPr id="198" name="Google Shape;198;p29"/>
+          <p:cNvPicPr preferRelativeResize="0"/>
+          <p:nvPr/>
+        </p:nvPicPr>
+        <p:blipFill>
+          <a:blip r:embed="rId3" cstate="email">
+            <a:alphaModFix/>
+            <a:extLst>
+              <a:ext uri="{28A0092B-C50C-407E-A947-70E740481C1C}">
+                <a14:useLocalDpi xmlns:a14="http://schemas.microsoft.com/office/drawing/2010/main"/>
+              </a:ext>
+            </a:extLst>
+          </a:blip>
+          <a:stretch>
+            <a:fillRect/>
+          </a:stretch>
+        </p:blipFill>
+        <p:spPr>
+          <a:xfrm>
+            <a:off x="387275" y="542733"/>
+            <a:ext cx="8366998" cy="3611792"/>
+          </a:xfrm>
+          <a:prstGeom prst="rect">
+            <a:avLst/>
+          </a:prstGeom>
+          <a:noFill/>
+          <a:ln>
+            <a:noFill/>
+          </a:ln>
+        </p:spPr>
+      </p:pic>
       <p:sp>
         <p:nvSpPr>
           <p:cNvPr id="199" name="Google Shape;199;p29"/>
@@ -17711,7 +17749,7 @@
                 <a:ea typeface="Calibri"/>
                 <a:cs typeface="Calibri"/>
                 <a:sym typeface="Calibri"/>
-                <a:hlinkClick r:id="rId3"/>
+                <a:hlinkClick r:id="rId4"/>
               </a:rPr>
               <a:t>https://layoffs.fyi</a:t>
             </a:r>
@@ -17919,7 +17957,7 @@
                 <a:ea typeface="Calibri"/>
                 <a:cs typeface="Calibri"/>
                 <a:sym typeface="Calibri"/>
-                <a:hlinkClick r:id="rId4"/>
+                <a:hlinkClick r:id="rId5"/>
               </a:rPr>
               <a:t>https://qz.com/tech-layoffs-high-ai-struggling-find-talent-1851368861</a:t>
             </a:r>
@@ -17947,42 +17985,9 @@
           </a:p>
         </p:txBody>
       </p:sp>
-      <p:pic>
-        <p:nvPicPr>
-          <p:cNvPr id="202" name="Google Shape;202;p29"/>
-          <p:cNvPicPr preferRelativeResize="0"/>
-          <p:nvPr/>
-        </p:nvPicPr>
-        <p:blipFill>
-          <a:blip r:embed="rId5" cstate="email">
-            <a:alphaModFix/>
-            <a:extLst>
-              <a:ext uri="{28A0092B-C50C-407E-A947-70E740481C1C}">
-                <a14:useLocalDpi xmlns:a14="http://schemas.microsoft.com/office/drawing/2010/main"/>
-              </a:ext>
-            </a:extLst>
-          </a:blip>
-          <a:stretch>
-            <a:fillRect/>
-          </a:stretch>
-        </p:blipFill>
-        <p:spPr>
-          <a:xfrm>
-            <a:off x="536838" y="656951"/>
-            <a:ext cx="8067873" cy="3482675"/>
-          </a:xfrm>
-          <a:prstGeom prst="rect">
-            <a:avLst/>
-          </a:prstGeom>
-          <a:noFill/>
-          <a:ln>
-            <a:noFill/>
-          </a:ln>
-        </p:spPr>
-      </p:pic>
       <p:sp>
         <p:nvSpPr>
-          <p:cNvPr id="203" name="Google Shape;203;p29"/>
+          <p:cNvPr id="202" name="Google Shape;202;p29"/>
           <p:cNvSpPr/>
           <p:nvPr/>
         </p:nvSpPr>
@@ -18026,13 +18031,13 @@
       </p:sp>
       <p:sp>
         <p:nvSpPr>
-          <p:cNvPr id="204" name="Google Shape;204;p29"/>
+          <p:cNvPr id="203" name="Google Shape;203;p29"/>
           <p:cNvSpPr/>
           <p:nvPr/>
         </p:nvSpPr>
         <p:spPr>
           <a:xfrm>
-            <a:off x="6877475" y="1553393"/>
+            <a:off x="6972997" y="1553393"/>
             <a:ext cx="861300" cy="1665300"/>
           </a:xfrm>
           <a:prstGeom prst="rect">
@@ -18081,7 +18086,7 @@
   <p:cSld>
     <p:spTree>
       <p:nvGrpSpPr>
-        <p:cNvPr id="1" name="Shape 208"/>
+        <p:cNvPr id="1" name="Shape 207"/>
         <p:cNvGrpSpPr/>
         <p:nvPr/>
       </p:nvGrpSpPr>
@@ -18095,7 +18100,7 @@
       </p:grpSpPr>
       <p:sp>
         <p:nvSpPr>
-          <p:cNvPr id="209" name="Google Shape;209;p30"/>
+          <p:cNvPr id="208" name="Google Shape;208;p30"/>
           <p:cNvSpPr txBox="1"/>
           <p:nvPr/>
         </p:nvSpPr>
@@ -18158,7 +18163,7 @@
       </p:sp>
       <p:sp>
         <p:nvSpPr>
-          <p:cNvPr id="210" name="Google Shape;210;p30"/>
+          <p:cNvPr id="209" name="Google Shape;209;p30"/>
           <p:cNvSpPr txBox="1"/>
           <p:nvPr/>
         </p:nvSpPr>
@@ -18216,7 +18221,7 @@
       </p:sp>
       <p:sp>
         <p:nvSpPr>
-          <p:cNvPr id="211" name="Google Shape;211;p30"/>
+          <p:cNvPr id="210" name="Google Shape;210;p30"/>
           <p:cNvSpPr txBox="1"/>
           <p:nvPr/>
         </p:nvSpPr>
@@ -18504,7 +18509,7 @@
       </p:sp>
       <p:sp>
         <p:nvSpPr>
-          <p:cNvPr id="212" name="Google Shape;212;p30"/>
+          <p:cNvPr id="211" name="Google Shape;211;p30"/>
           <p:cNvSpPr txBox="1"/>
           <p:nvPr/>
         </p:nvSpPr>
@@ -18695,14 +18700,14 @@
       </p:sp>
       <p:sp>
         <p:nvSpPr>
-          <p:cNvPr id="213" name="Google Shape;213;p30"/>
+          <p:cNvPr id="212" name="Google Shape;212;p30"/>
           <p:cNvSpPr txBox="1"/>
           <p:nvPr/>
         </p:nvSpPr>
         <p:spPr>
           <a:xfrm>
             <a:off x="4662425" y="2053897"/>
-            <a:ext cx="4408800" cy="1056000"/>
+            <a:ext cx="4408800" cy="1256100"/>
           </a:xfrm>
           <a:prstGeom prst="rect">
             <a:avLst/>
@@ -18778,14 +18783,19 @@
             </a:endParaRPr>
           </a:p>
           <a:p>
-            <a:pPr marL="0" lvl="0" indent="0" algn="l" rtl="0">
-              <a:spcBef>
-                <a:spcPts val="0"/>
-              </a:spcBef>
-              <a:spcAft>
-                <a:spcPts val="0"/>
-              </a:spcAft>
-              <a:buNone/>
+            <a:pPr marL="457200" lvl="0" indent="-311150" algn="l" rtl="0">
+              <a:spcBef>
+                <a:spcPts val="0"/>
+              </a:spcBef>
+              <a:spcAft>
+                <a:spcPts val="0"/>
+              </a:spcAft>
+              <a:buClr>
+                <a:schemeClr val="dk1"/>
+              </a:buClr>
+              <a:buSzPts val="1300"/>
+              <a:buFont typeface="Calibri"/>
+              <a:buChar char="●"/>
             </a:pPr>
             <a:r>
               <a:rPr lang="en" sz="1300">
@@ -18797,7 +18807,30 @@
                 <a:cs typeface="Calibri"/>
                 <a:sym typeface="Calibri"/>
               </a:rPr>
-              <a:t>Mention the specific AI tools you used (e.g., Python, TensorFlow, PyTorch, Scikit-Learn). Summarize the outcomes achieved (improvements, accuracy rates, ... )</a:t>
+              <a:t>Mention the specific AI tools you used </a:t>
+            </a:r>
+            <a:br>
+              <a:rPr lang="en" sz="1300">
+                <a:solidFill>
+                  <a:schemeClr val="dk1"/>
+                </a:solidFill>
+                <a:latin typeface="Calibri"/>
+                <a:ea typeface="Calibri"/>
+                <a:cs typeface="Calibri"/>
+                <a:sym typeface="Calibri"/>
+              </a:rPr>
+            </a:br>
+            <a:r>
+              <a:rPr lang="en" sz="1300">
+                <a:solidFill>
+                  <a:schemeClr val="dk1"/>
+                </a:solidFill>
+                <a:latin typeface="Calibri"/>
+                <a:ea typeface="Calibri"/>
+                <a:cs typeface="Calibri"/>
+                <a:sym typeface="Calibri"/>
+              </a:rPr>
+              <a:t>(e.g., Python, TensorFlow, PyTorch, Scikit-Learn). </a:t>
             </a:r>
             <a:endParaRPr sz="1300">
               <a:solidFill>
@@ -18809,11 +18842,71 @@
               <a:sym typeface="Calibri"/>
             </a:endParaRPr>
           </a:p>
+          <a:p>
+            <a:pPr marL="457200" lvl="0" indent="-311150" algn="l" rtl="0">
+              <a:spcBef>
+                <a:spcPts val="0"/>
+              </a:spcBef>
+              <a:spcAft>
+                <a:spcPts val="0"/>
+              </a:spcAft>
+              <a:buClr>
+                <a:schemeClr val="dk1"/>
+              </a:buClr>
+              <a:buSzPts val="1300"/>
+              <a:buFont typeface="Calibri"/>
+              <a:buChar char="●"/>
+            </a:pPr>
+            <a:r>
+              <a:rPr lang="en" sz="1300">
+                <a:solidFill>
+                  <a:schemeClr val="dk1"/>
+                </a:solidFill>
+                <a:latin typeface="Calibri"/>
+                <a:ea typeface="Calibri"/>
+                <a:cs typeface="Calibri"/>
+                <a:sym typeface="Calibri"/>
+              </a:rPr>
+              <a:t>Summarize the outcomes achieved </a:t>
+            </a:r>
+            <a:br>
+              <a:rPr lang="en" sz="1300">
+                <a:solidFill>
+                  <a:schemeClr val="dk1"/>
+                </a:solidFill>
+                <a:latin typeface="Calibri"/>
+                <a:ea typeface="Calibri"/>
+                <a:cs typeface="Calibri"/>
+                <a:sym typeface="Calibri"/>
+              </a:rPr>
+            </a:br>
+            <a:r>
+              <a:rPr lang="en" sz="1300">
+                <a:solidFill>
+                  <a:schemeClr val="dk1"/>
+                </a:solidFill>
+                <a:latin typeface="Calibri"/>
+                <a:ea typeface="Calibri"/>
+                <a:cs typeface="Calibri"/>
+                <a:sym typeface="Calibri"/>
+              </a:rPr>
+              <a:t>(improvements, accuracy rates, ... )</a:t>
+            </a:r>
+            <a:endParaRPr sz="1300">
+              <a:solidFill>
+                <a:schemeClr val="dk1"/>
+              </a:solidFill>
+              <a:latin typeface="Calibri"/>
+              <a:ea typeface="Calibri"/>
+              <a:cs typeface="Calibri"/>
+              <a:sym typeface="Calibri"/>
+            </a:endParaRPr>
+          </a:p>
         </p:txBody>
       </p:sp>
       <p:sp>
         <p:nvSpPr>
-          <p:cNvPr id="214" name="Google Shape;214;p30"/>
+          <p:cNvPr id="213" name="Google Shape;213;p30"/>
           <p:cNvSpPr txBox="1"/>
           <p:nvPr/>
         </p:nvSpPr>
@@ -18863,7 +18956,31 @@
                 <a:cs typeface="Calibri"/>
                 <a:sym typeface="Calibri"/>
               </a:rPr>
-              <a:t>America's AI job hotspots - San Jose, Seattle and San Francisco.</a:t>
+              <a:t>America's AI job hotspots - </a:t>
+            </a:r>
+            <a:r>
+              <a:rPr lang="en" sz="1300" b="1">
+                <a:solidFill>
+                  <a:srgbClr val="FF0000"/>
+                </a:solidFill>
+                <a:latin typeface="Calibri"/>
+                <a:ea typeface="Calibri"/>
+                <a:cs typeface="Calibri"/>
+                <a:sym typeface="Calibri"/>
+              </a:rPr>
+              <a:t>San Jose, Seattle and San Francisco</a:t>
+            </a:r>
+            <a:r>
+              <a:rPr lang="en" sz="1300">
+                <a:solidFill>
+                  <a:schemeClr val="dk1"/>
+                </a:solidFill>
+                <a:latin typeface="Calibri"/>
+                <a:ea typeface="Calibri"/>
+                <a:cs typeface="Calibri"/>
+                <a:sym typeface="Calibri"/>
+              </a:rPr>
+              <a:t>.</a:t>
             </a:r>
             <a:endParaRPr sz="1300">
               <a:solidFill>
@@ -18895,7 +19012,78 @@
                 <a:cs typeface="Calibri"/>
                 <a:sym typeface="Calibri"/>
               </a:rPr>
-              <a:t>lso Austin, Washington, D.C. and Northwest Arkansas, as well as Raleigh and Atlanta.</a:t>
+              <a:t>Also </a:t>
+            </a:r>
+            <a:r>
+              <a:rPr lang="en" sz="1300" b="1">
+                <a:solidFill>
+                  <a:srgbClr val="6AA84F"/>
+                </a:solidFill>
+                <a:latin typeface="Calibri"/>
+                <a:ea typeface="Calibri"/>
+                <a:cs typeface="Calibri"/>
+                <a:sym typeface="Calibri"/>
+              </a:rPr>
+              <a:t>Austin, Washington, D.C. and Northwest Arkansas</a:t>
+            </a:r>
+            <a:r>
+              <a:rPr lang="en" sz="1300">
+                <a:solidFill>
+                  <a:schemeClr val="dk1"/>
+                </a:solidFill>
+                <a:latin typeface="Calibri"/>
+                <a:ea typeface="Calibri"/>
+                <a:cs typeface="Calibri"/>
+                <a:sym typeface="Calibri"/>
+              </a:rPr>
+              <a:t>, </a:t>
+            </a:r>
+            <a:br>
+              <a:rPr lang="en" sz="1300">
+                <a:solidFill>
+                  <a:schemeClr val="dk1"/>
+                </a:solidFill>
+                <a:latin typeface="Calibri"/>
+                <a:ea typeface="Calibri"/>
+                <a:cs typeface="Calibri"/>
+                <a:sym typeface="Calibri"/>
+              </a:rPr>
+            </a:br>
+            <a:r>
+              <a:rPr lang="en" sz="1300">
+                <a:solidFill>
+                  <a:schemeClr val="dk1"/>
+                </a:solidFill>
+                <a:latin typeface="Calibri"/>
+                <a:ea typeface="Calibri"/>
+                <a:cs typeface="Calibri"/>
+                <a:sym typeface="Calibri"/>
+              </a:rPr>
+              <a:t>as well as </a:t>
+            </a:r>
+            <a:r>
+              <a:rPr lang="en" sz="1300" b="1">
+                <a:solidFill>
+                  <a:srgbClr val="3C78D8"/>
+                </a:solidFill>
+                <a:latin typeface="Calibri"/>
+                <a:ea typeface="Calibri"/>
+                <a:cs typeface="Calibri"/>
+                <a:sym typeface="Calibri"/>
+              </a:rPr>
+              <a:t>Raleigh and Atlanta</a:t>
+            </a:r>
+            <a:r>
+              <a:rPr lang="en" sz="1300">
+                <a:solidFill>
+                  <a:schemeClr val="dk1"/>
+                </a:solidFill>
+                <a:latin typeface="Calibri"/>
+                <a:ea typeface="Calibri"/>
+                <a:cs typeface="Calibri"/>
+                <a:sym typeface="Calibri"/>
+              </a:rPr>
+              <a:t>.</a:t>
             </a:r>
             <a:endParaRPr sz="1300">
               <a:solidFill>
@@ -18956,7 +19144,7 @@
       </p:sp>
       <p:pic>
         <p:nvPicPr>
-          <p:cNvPr id="215" name="Google Shape;215;p30"/>
+          <p:cNvPr id="214" name="Google Shape;214;p30"/>
           <p:cNvPicPr preferRelativeResize="0"/>
           <p:nvPr/>
         </p:nvPicPr>
@@ -18975,7 +19163,7 @@
         </p:blipFill>
         <p:spPr>
           <a:xfrm>
-            <a:off x="327825" y="2041301"/>
+            <a:off x="327825" y="2117501"/>
             <a:ext cx="3772176" cy="2964876"/>
           </a:xfrm>
           <a:prstGeom prst="rect">
@@ -19000,7 +19188,7 @@
   <p:cSld>
     <p:spTree>
       <p:nvGrpSpPr>
-        <p:cNvPr id="1" name="Shape 219"/>
+        <p:cNvPr id="1" name="Shape 218"/>
         <p:cNvGrpSpPr/>
         <p:nvPr/>
       </p:nvGrpSpPr>
@@ -19014,7 +19202,7 @@
       </p:grpSpPr>
       <p:pic>
         <p:nvPicPr>
-          <p:cNvPr id="220" name="Google Shape;220;p31"/>
+          <p:cNvPr id="219" name="Google Shape;219;p31"/>
           <p:cNvPicPr preferRelativeResize="0"/>
           <p:nvPr/>
         </p:nvPicPr>
@@ -19041,7 +19229,7 @@
       </p:pic>
       <p:sp>
         <p:nvSpPr>
-          <p:cNvPr id="221" name="Google Shape;221;p31"/>
+          <p:cNvPr id="220" name="Google Shape;220;p31"/>
           <p:cNvSpPr txBox="1"/>
           <p:nvPr/>
         </p:nvSpPr>
@@ -19107,7 +19295,7 @@
       </p:sp>
       <p:sp>
         <p:nvSpPr>
-          <p:cNvPr id="222" name="Google Shape;222;p31"/>
+          <p:cNvPr id="221" name="Google Shape;221;p31"/>
           <p:cNvSpPr txBox="1"/>
           <p:nvPr/>
         </p:nvSpPr>
@@ -19537,7 +19725,7 @@
       </p:sp>
       <p:pic>
         <p:nvPicPr>
-          <p:cNvPr id="223" name="Google Shape;223;p31"/>
+          <p:cNvPr id="222" name="Google Shape;222;p31"/>
           <p:cNvPicPr preferRelativeResize="0"/>
           <p:nvPr/>
         </p:nvPicPr>
@@ -19569,7 +19757,7 @@
       </p:pic>
       <p:sp>
         <p:nvSpPr>
-          <p:cNvPr id="224" name="Google Shape;224;p31"/>
+          <p:cNvPr id="223" name="Google Shape;223;p31"/>
           <p:cNvSpPr txBox="1"/>
           <p:nvPr/>
         </p:nvSpPr>
@@ -19648,7 +19836,7 @@
       </p:sp>
       <p:sp>
         <p:nvSpPr>
-          <p:cNvPr id="225" name="Google Shape;225;p31"/>
+          <p:cNvPr id="224" name="Google Shape;224;p31"/>
           <p:cNvSpPr txBox="1"/>
           <p:nvPr/>
         </p:nvSpPr>
@@ -19725,7 +19913,7 @@
   <p:cSld>
     <p:spTree>
       <p:nvGrpSpPr>
-        <p:cNvPr id="1" name="Shape 229"/>
+        <p:cNvPr id="1" name="Shape 228"/>
         <p:cNvGrpSpPr/>
         <p:nvPr/>
       </p:nvGrpSpPr>
@@ -19739,7 +19927,7 @@
       </p:grpSpPr>
       <p:sp>
         <p:nvSpPr>
-          <p:cNvPr id="230" name="Google Shape;230;p32"/>
+          <p:cNvPr id="229" name="Google Shape;229;p32"/>
           <p:cNvSpPr txBox="1"/>
           <p:nvPr/>
         </p:nvSpPr>
@@ -20190,8 +20378,8 @@
         </p:blipFill>
         <p:spPr>
           <a:xfrm>
-            <a:off x="66804" y="2284446"/>
-            <a:ext cx="4629873" cy="2784874"/>
+            <a:off x="66800" y="2175600"/>
+            <a:ext cx="4810839" cy="2893726"/>
           </a:xfrm>
           <a:prstGeom prst="rect">
             <a:avLst/>
@@ -20216,8 +20404,8 @@
         </p:nvSpPr>
         <p:spPr>
           <a:xfrm>
-            <a:off x="4773100" y="3328021"/>
-            <a:ext cx="4301100" cy="1748700"/>
+            <a:off x="5700525" y="3480425"/>
+            <a:ext cx="3373500" cy="1579200"/>
           </a:xfrm>
           <a:prstGeom prst="rect">
             <a:avLst/>
@@ -20251,7 +20439,7 @@
               <a:buNone/>
             </a:pPr>
             <a:r>
-              <a:rPr lang="en" sz="1000">
+              <a:rPr lang="en" sz="900">
                 <a:solidFill>
                   <a:srgbClr val="3C78D8"/>
                 </a:solidFill>
@@ -20262,7 +20450,7 @@
               </a:rPr>
               <a:t>import transformers</a:t>
             </a:r>
-            <a:endParaRPr sz="1000">
+            <a:endParaRPr sz="900">
               <a:solidFill>
                 <a:srgbClr val="3C78D8"/>
               </a:solidFill>
@@ -20283,7 +20471,7 @@
               <a:buNone/>
             </a:pPr>
             <a:r>
-              <a:rPr lang="en" sz="1000">
+              <a:rPr lang="en" sz="900">
                 <a:solidFill>
                   <a:srgbClr val="3C78D8"/>
                 </a:solidFill>
@@ -20294,7 +20482,7 @@
               </a:rPr>
               <a:t>import torch</a:t>
             </a:r>
-            <a:endParaRPr sz="1000">
+            <a:endParaRPr sz="900">
               <a:solidFill>
                 <a:srgbClr val="3C78D8"/>
               </a:solidFill>
@@ -20314,7 +20502,7 @@
               </a:spcAft>
               <a:buNone/>
             </a:pPr>
-            <a:endParaRPr sz="1000">
+            <a:endParaRPr sz="900">
               <a:solidFill>
                 <a:srgbClr val="3C78D8"/>
               </a:solidFill>
@@ -20335,7 +20523,7 @@
               <a:buNone/>
             </a:pPr>
             <a:r>
-              <a:rPr lang="en" sz="1000">
+              <a:rPr lang="en" sz="900">
                 <a:solidFill>
                   <a:srgbClr val="3C78D8"/>
                 </a:solidFill>
@@ -20347,7 +20535,7 @@
               <a:t>model_id = "</a:t>
             </a:r>
             <a:r>
-              <a:rPr lang="en" sz="1000">
+              <a:rPr lang="en" sz="900">
                 <a:solidFill>
                   <a:srgbClr val="CC0000"/>
                 </a:solidFill>
@@ -20358,7 +20546,7 @@
               </a:rPr>
               <a:t>meta-llama/Meta-Llama-3-8B-Instruct"</a:t>
             </a:r>
-            <a:endParaRPr sz="1000">
+            <a:endParaRPr sz="900">
               <a:solidFill>
                 <a:srgbClr val="CC0000"/>
               </a:solidFill>
@@ -20378,7 +20566,7 @@
               </a:spcAft>
               <a:buNone/>
             </a:pPr>
-            <a:endParaRPr sz="1000">
+            <a:endParaRPr sz="900">
               <a:solidFill>
                 <a:srgbClr val="3C78D8"/>
               </a:solidFill>
@@ -20399,7 +20587,7 @@
               <a:buNone/>
             </a:pPr>
             <a:r>
-              <a:rPr lang="en" sz="1000">
+              <a:rPr lang="en" sz="900">
                 <a:solidFill>
                   <a:srgbClr val="3C78D8"/>
                 </a:solidFill>
@@ -20410,7 +20598,7 @@
               </a:rPr>
               <a:t>pipeline = transformers.pipeline(</a:t>
             </a:r>
-            <a:endParaRPr sz="1000">
+            <a:endParaRPr sz="900">
               <a:solidFill>
                 <a:srgbClr val="3C78D8"/>
               </a:solidFill>
@@ -20431,7 +20619,7 @@
               <a:buNone/>
             </a:pPr>
             <a:r>
-              <a:rPr lang="en" sz="1000">
+              <a:rPr lang="en" sz="900">
                 <a:solidFill>
                   <a:srgbClr val="3C78D8"/>
                 </a:solidFill>
@@ -20443,7 +20631,7 @@
               <a:t>  "</a:t>
             </a:r>
             <a:r>
-              <a:rPr lang="en" sz="1000">
+              <a:rPr lang="en" sz="900">
                 <a:solidFill>
                   <a:srgbClr val="CC0000"/>
                 </a:solidFill>
@@ -20455,7 +20643,7 @@
               <a:t>text-generation</a:t>
             </a:r>
             <a:r>
-              <a:rPr lang="en" sz="1000">
+              <a:rPr lang="en" sz="900">
                 <a:solidFill>
                   <a:srgbClr val="3C78D8"/>
                 </a:solidFill>
@@ -20466,7 +20654,7 @@
               </a:rPr>
               <a:t>",</a:t>
             </a:r>
-            <a:endParaRPr sz="1000">
+            <a:endParaRPr sz="900">
               <a:solidFill>
                 <a:srgbClr val="3C78D8"/>
               </a:solidFill>
@@ -20487,7 +20675,7 @@
               <a:buNone/>
             </a:pPr>
             <a:r>
-              <a:rPr lang="en" sz="1000">
+              <a:rPr lang="en" sz="900">
                 <a:solidFill>
                   <a:srgbClr val="3C78D8"/>
                 </a:solidFill>
@@ -20499,7 +20687,7 @@
               <a:t>  model="</a:t>
             </a:r>
             <a:r>
-              <a:rPr lang="en" sz="1000">
+              <a:rPr lang="en" sz="900">
                 <a:solidFill>
                   <a:srgbClr val="CC0000"/>
                 </a:solidFill>
@@ -20511,7 +20699,7 @@
               <a:t>meta-llama/Meta-Llama-3-8B-Instruct</a:t>
             </a:r>
             <a:r>
-              <a:rPr lang="en" sz="1000">
+              <a:rPr lang="en" sz="900">
                 <a:solidFill>
                   <a:srgbClr val="3C78D8"/>
                 </a:solidFill>
@@ -20522,7 +20710,7 @@
               </a:rPr>
               <a:t>",</a:t>
             </a:r>
-            <a:endParaRPr sz="1000">
+            <a:endParaRPr sz="900">
               <a:solidFill>
                 <a:srgbClr val="3C78D8"/>
               </a:solidFill>
@@ -20543,7 +20731,7 @@
               <a:buNone/>
             </a:pPr>
             <a:r>
-              <a:rPr lang="en" sz="1000">
+              <a:rPr lang="en" sz="900">
                 <a:solidFill>
                   <a:srgbClr val="3C78D8"/>
                 </a:solidFill>
@@ -20555,7 +20743,7 @@
               <a:t>  model_kwargs={"</a:t>
             </a:r>
             <a:r>
-              <a:rPr lang="en" sz="1000">
+              <a:rPr lang="en" sz="900">
                 <a:solidFill>
                   <a:srgbClr val="CC0000"/>
                 </a:solidFill>
@@ -20567,7 +20755,7 @@
               <a:t>torch_dtype</a:t>
             </a:r>
             <a:r>
-              <a:rPr lang="en" sz="1000">
+              <a:rPr lang="en" sz="900">
                 <a:solidFill>
                   <a:srgbClr val="3C78D8"/>
                 </a:solidFill>
@@ -20578,7 +20766,7 @@
               </a:rPr>
               <a:t>": torch.bfloat16},</a:t>
             </a:r>
-            <a:endParaRPr sz="1000">
+            <a:endParaRPr sz="900">
               <a:solidFill>
                 <a:srgbClr val="3C78D8"/>
               </a:solidFill>
@@ -20599,7 +20787,7 @@
               <a:buNone/>
             </a:pPr>
             <a:r>
-              <a:rPr lang="en" sz="1000">
+              <a:rPr lang="en" sz="900">
                 <a:solidFill>
                   <a:srgbClr val="3C78D8"/>
                 </a:solidFill>
@@ -20611,7 +20799,7 @@
               <a:t>  device="</a:t>
             </a:r>
             <a:r>
-              <a:rPr lang="en" sz="1000">
+              <a:rPr lang="en" sz="900">
                 <a:solidFill>
                   <a:srgbClr val="CC0000"/>
                 </a:solidFill>
@@ -20623,7 +20811,7 @@
               <a:t>cuda</a:t>
             </a:r>
             <a:r>
-              <a:rPr lang="en" sz="1000">
+              <a:rPr lang="en" sz="900">
                 <a:solidFill>
                   <a:srgbClr val="3C78D8"/>
                 </a:solidFill>
@@ -20634,7 +20822,7 @@
               </a:rPr>
               <a:t>",</a:t>
             </a:r>
-            <a:endParaRPr sz="1000">
+            <a:endParaRPr sz="900">
               <a:solidFill>
                 <a:srgbClr val="3C78D8"/>
               </a:solidFill>
@@ -20655,7 +20843,7 @@
               <a:buNone/>
             </a:pPr>
             <a:r>
-              <a:rPr lang="en" sz="1000">
+              <a:rPr lang="en" sz="900">
                 <a:solidFill>
                   <a:srgbClr val="3C78D8"/>
                 </a:solidFill>
@@ -20666,7 +20854,7 @@
               </a:rPr>
               <a:t>)</a:t>
             </a:r>
-            <a:endParaRPr sz="1000">
+            <a:endParaRPr sz="900">
               <a:solidFill>
                 <a:srgbClr val="3C78D8"/>
               </a:solidFill>
@@ -20863,15 +21051,21 @@
         </p:blipFill>
         <p:spPr>
           <a:xfrm>
-            <a:off x="3855773" y="44650"/>
-            <a:ext cx="1927050" cy="1083974"/>
+            <a:off x="3823599" y="420050"/>
+            <a:ext cx="1165856" cy="655799"/>
           </a:xfrm>
           <a:prstGeom prst="rect">
             <a:avLst/>
           </a:prstGeom>
           <a:noFill/>
-          <a:ln>
-            <a:noFill/>
+          <a:ln w="9525" cap="flat" cmpd="sng">
+            <a:solidFill>
+              <a:srgbClr val="FF0000"/>
+            </a:solidFill>
+            <a:prstDash val="solid"/>
+            <a:round/>
+            <a:headEnd type="none" w="sm" len="sm"/>
+            <a:tailEnd type="none" w="sm" len="sm"/>
           </a:ln>
         </p:spPr>
       </p:pic>
@@ -21231,8 +21425,8 @@
         </p:nvSpPr>
         <p:spPr>
           <a:xfrm>
-            <a:off x="3855775" y="1203875"/>
-            <a:ext cx="1991400" cy="1025100"/>
+            <a:off x="7510275" y="2481150"/>
+            <a:ext cx="1557300" cy="855900"/>
           </a:xfrm>
           <a:prstGeom prst="rect">
             <a:avLst/>
@@ -21275,7 +21469,7 @@
                 <a:cs typeface="Calibri"/>
                 <a:sym typeface="Calibri"/>
               </a:rPr>
-              <a:t>Llama Days:</a:t>
+              <a:t>Meta adds its Llama3 AI chatbot to the search bar across its apps.</a:t>
             </a:r>
             <a:endParaRPr sz="1300">
               <a:solidFill>
@@ -21287,6 +21481,40 @@
               <a:sym typeface="Calibri"/>
             </a:endParaRPr>
           </a:p>
+        </p:txBody>
+      </p:sp>
+      <p:sp>
+        <p:nvSpPr>
+          <p:cNvPr id="73" name="Google Shape;73;p15"/>
+          <p:cNvSpPr txBox="1"/>
+          <p:nvPr/>
+        </p:nvSpPr>
+        <p:spPr>
+          <a:xfrm>
+            <a:off x="3823600" y="1093763"/>
+            <a:ext cx="1991400" cy="994200"/>
+          </a:xfrm>
+          <a:prstGeom prst="rect">
+            <a:avLst/>
+          </a:prstGeom>
+          <a:solidFill>
+            <a:srgbClr val="FFF2CC"/>
+          </a:solidFill>
+          <a:ln w="9525" cap="flat" cmpd="sng">
+            <a:solidFill>
+              <a:srgbClr val="FF0000"/>
+            </a:solidFill>
+            <a:prstDash val="solid"/>
+            <a:round/>
+            <a:headEnd type="none" w="sm" len="sm"/>
+            <a:tailEnd type="none" w="sm" len="sm"/>
+          </a:ln>
+        </p:spPr>
+        <p:txBody>
+          <a:bodyPr spcFirstLastPara="1" wrap="square" lIns="27425" tIns="27425" rIns="27425" bIns="27425" anchor="t" anchorCtr="0">
+            <a:spAutoFit/>
+          </a:bodyPr>
+          <a:lstStyle/>
           <a:p>
             <a:pPr marL="0" lvl="0" indent="0" algn="l" rtl="0">
               <a:spcBef>
@@ -21298,7 +21526,39 @@
               <a:buNone/>
             </a:pPr>
             <a:r>
-              <a:rPr lang="en" sz="1300">
+              <a:rPr lang="en" sz="1300" b="1">
+                <a:solidFill>
+                  <a:srgbClr val="FF0000"/>
+                </a:solidFill>
+                <a:latin typeface="Calibri"/>
+                <a:ea typeface="Calibri"/>
+                <a:cs typeface="Calibri"/>
+                <a:sym typeface="Calibri"/>
+              </a:rPr>
+              <a:t>Llama Days:</a:t>
+            </a:r>
+            <a:endParaRPr sz="1300" b="1">
+              <a:solidFill>
+                <a:srgbClr val="FF0000"/>
+              </a:solidFill>
+              <a:latin typeface="Calibri"/>
+              <a:ea typeface="Calibri"/>
+              <a:cs typeface="Calibri"/>
+              <a:sym typeface="Calibri"/>
+            </a:endParaRPr>
+          </a:p>
+          <a:p>
+            <a:pPr marL="0" lvl="0" indent="0" algn="l" rtl="0">
+              <a:spcBef>
+                <a:spcPts val="0"/>
+              </a:spcBef>
+              <a:spcAft>
+                <a:spcPts val="0"/>
+              </a:spcAft>
+              <a:buNone/>
+            </a:pPr>
+            <a:r>
+              <a:rPr lang="en" sz="1200">
                 <a:solidFill>
                   <a:schemeClr val="dk1"/>
                 </a:solidFill>
@@ -21309,7 +21569,7 @@
               </a:rPr>
               <a:t>July 18, 2023 - Llama 2</a:t>
             </a:r>
-            <a:endParaRPr sz="1300">
+            <a:endParaRPr sz="1200">
               <a:solidFill>
                 <a:schemeClr val="dk1"/>
               </a:solidFill>
@@ -21330,7 +21590,7 @@
               <a:buNone/>
             </a:pPr>
             <a:r>
-              <a:rPr lang="en" sz="1300">
+              <a:rPr lang="en" sz="1200">
                 <a:solidFill>
                   <a:schemeClr val="dk1"/>
                 </a:solidFill>
@@ -21341,7 +21601,7 @@
               </a:rPr>
               <a:t>April 18, 2024 - Llama 3</a:t>
             </a:r>
-            <a:endParaRPr sz="1300">
+            <a:endParaRPr sz="1200">
               <a:solidFill>
                 <a:schemeClr val="dk1"/>
               </a:solidFill>
@@ -21371,7 +21631,31 @@
                 <a:cs typeface="Calibri"/>
                 <a:sym typeface="Calibri"/>
               </a:rPr>
-              <a:t>(also Andrew Ng was born on April 18, 1976 in London, UK)</a:t>
+              <a:t>(also </a:t>
+            </a:r>
+            <a:r>
+              <a:rPr lang="en" sz="1200" b="1">
+                <a:solidFill>
+                  <a:srgbClr val="FF0000"/>
+                </a:solidFill>
+                <a:latin typeface="Calibri"/>
+                <a:ea typeface="Calibri"/>
+                <a:cs typeface="Calibri"/>
+                <a:sym typeface="Calibri"/>
+              </a:rPr>
+              <a:t>Andrew Ng</a:t>
+            </a:r>
+            <a:r>
+              <a:rPr lang="en" sz="1200">
+                <a:solidFill>
+                  <a:srgbClr val="3C78D8"/>
+                </a:solidFill>
+                <a:latin typeface="Calibri"/>
+                <a:ea typeface="Calibri"/>
+                <a:cs typeface="Calibri"/>
+                <a:sym typeface="Calibri"/>
+              </a:rPr>
+              <a:t> was born on April 18, 1976 in London, UK)</a:t>
             </a:r>
             <a:endParaRPr sz="1200">
               <a:solidFill>
@@ -21387,7 +21671,7 @@
       </p:sp>
       <p:pic>
         <p:nvPicPr>
-          <p:cNvPr id="73" name="Google Shape;73;p15"/>
+          <p:cNvPr id="74" name="Google Shape;74;p15"/>
           <p:cNvPicPr preferRelativeResize="0"/>
           <p:nvPr/>
         </p:nvPicPr>
@@ -21406,8 +21690,47 @@
         </p:blipFill>
         <p:spPr>
           <a:xfrm>
-            <a:off x="5142700" y="2284450"/>
-            <a:ext cx="704475" cy="939300"/>
+            <a:off x="5700525" y="2481158"/>
+            <a:ext cx="1655875" cy="894479"/>
+          </a:xfrm>
+          <a:prstGeom prst="rect">
+            <a:avLst/>
+          </a:prstGeom>
+          <a:noFill/>
+          <a:ln w="9525" cap="flat" cmpd="sng">
+            <a:solidFill>
+              <a:srgbClr val="FF0000"/>
+            </a:solidFill>
+            <a:prstDash val="solid"/>
+            <a:round/>
+            <a:headEnd type="none" w="sm" len="sm"/>
+            <a:tailEnd type="none" w="sm" len="sm"/>
+          </a:ln>
+        </p:spPr>
+      </p:pic>
+      <p:pic>
+        <p:nvPicPr>
+          <p:cNvPr id="75" name="Google Shape;75;p15"/>
+          <p:cNvPicPr preferRelativeResize="0"/>
+          <p:nvPr/>
+        </p:nvPicPr>
+        <p:blipFill>
+          <a:blip r:embed="rId13" cstate="email">
+            <a:alphaModFix/>
+            <a:extLst>
+              <a:ext uri="{28A0092B-C50C-407E-A947-70E740481C1C}">
+                <a14:useLocalDpi xmlns:a14="http://schemas.microsoft.com/office/drawing/2010/main"/>
+              </a:ext>
+            </a:extLst>
+          </a:blip>
+          <a:stretch>
+            <a:fillRect/>
+          </a:stretch>
+        </p:blipFill>
+        <p:spPr>
+          <a:xfrm>
+            <a:off x="5205852" y="420052"/>
+            <a:ext cx="594599" cy="655800"/>
           </a:xfrm>
           <a:prstGeom prst="rect">
             <a:avLst/>
@@ -21437,7 +21760,7 @@
   <p:cSld>
     <p:spTree>
       <p:nvGrpSpPr>
-        <p:cNvPr id="1" name="Shape 77"/>
+        <p:cNvPr id="1" name="Shape 79"/>
         <p:cNvGrpSpPr/>
         <p:nvPr/>
       </p:nvGrpSpPr>
@@ -21451,7 +21774,7 @@
       </p:grpSpPr>
       <p:sp>
         <p:nvSpPr>
-          <p:cNvPr id="78" name="Google Shape;78;p16"/>
+          <p:cNvPr id="80" name="Google Shape;80;p16"/>
           <p:cNvSpPr txBox="1"/>
           <p:nvPr/>
         </p:nvSpPr>
@@ -21530,7 +21853,7 @@
       </p:sp>
       <p:sp>
         <p:nvSpPr>
-          <p:cNvPr id="79" name="Google Shape;79;p16"/>
+          <p:cNvPr id="81" name="Google Shape;81;p16"/>
           <p:cNvSpPr txBox="1"/>
           <p:nvPr/>
         </p:nvSpPr>
@@ -21588,7 +21911,7 @@
       </p:sp>
       <p:pic>
         <p:nvPicPr>
-          <p:cNvPr id="80" name="Google Shape;80;p16"/>
+          <p:cNvPr id="82" name="Google Shape;82;p16"/>
           <p:cNvPicPr preferRelativeResize="0"/>
           <p:nvPr/>
         </p:nvPicPr>
@@ -21625,6 +21948,172 @@
           </a:ln>
         </p:spPr>
       </p:pic>
+      <p:sp>
+        <p:nvSpPr>
+          <p:cNvPr id="83" name="Google Shape;83;p16"/>
+          <p:cNvSpPr txBox="1"/>
+          <p:nvPr/>
+        </p:nvSpPr>
+        <p:spPr>
+          <a:xfrm>
+            <a:off x="5299550" y="76200"/>
+            <a:ext cx="3769800" cy="541800"/>
+          </a:xfrm>
+          <a:prstGeom prst="rect">
+            <a:avLst/>
+          </a:prstGeom>
+          <a:solidFill>
+            <a:srgbClr val="FFF2CC"/>
+          </a:solidFill>
+          <a:ln w="9525" cap="flat" cmpd="sng">
+            <a:solidFill>
+              <a:srgbClr val="FF0000"/>
+            </a:solidFill>
+            <a:prstDash val="solid"/>
+            <a:round/>
+            <a:headEnd type="none" w="sm" len="sm"/>
+            <a:tailEnd type="none" w="sm" len="sm"/>
+          </a:ln>
+        </p:spPr>
+        <p:txBody>
+          <a:bodyPr spcFirstLastPara="1" wrap="square" lIns="9125" tIns="9125" rIns="9125" bIns="9125" anchor="t" anchorCtr="0">
+            <a:spAutoFit/>
+          </a:bodyPr>
+          <a:lstStyle/>
+          <a:p>
+            <a:pPr marL="0" lvl="0" indent="0" algn="l" rtl="0">
+              <a:spcBef>
+                <a:spcPts val="0"/>
+              </a:spcBef>
+              <a:spcAft>
+                <a:spcPts val="0"/>
+              </a:spcAft>
+              <a:buNone/>
+            </a:pPr>
+            <a:r>
+              <a:rPr lang="en" sz="1200">
+                <a:latin typeface="Calibri"/>
+                <a:ea typeface="Calibri"/>
+                <a:cs typeface="Calibri"/>
+                <a:sym typeface="Calibri"/>
+              </a:rPr>
+              <a:t>DBRX, Mixtral 8x22B, Llama-3 all released within weeks. </a:t>
+            </a:r>
+            <a:endParaRPr sz="1200">
+              <a:latin typeface="Calibri"/>
+              <a:ea typeface="Calibri"/>
+              <a:cs typeface="Calibri"/>
+              <a:sym typeface="Calibri"/>
+            </a:endParaRPr>
+          </a:p>
+          <a:p>
+            <a:pPr marL="0" lvl="0" indent="0" algn="l" rtl="0">
+              <a:spcBef>
+                <a:spcPts val="0"/>
+              </a:spcBef>
+              <a:spcAft>
+                <a:spcPts val="0"/>
+              </a:spcAft>
+              <a:buNone/>
+            </a:pPr>
+            <a:r>
+              <a:rPr lang="en" sz="1200">
+                <a:latin typeface="Calibri"/>
+                <a:ea typeface="Calibri"/>
+                <a:cs typeface="Calibri"/>
+                <a:sym typeface="Calibri"/>
+              </a:rPr>
+              <a:t>The open-source AI scene shows no sign of slowing down. </a:t>
+            </a:r>
+            <a:r>
+              <a:rPr lang="en" sz="1000" u="sng">
+                <a:solidFill>
+                  <a:schemeClr val="hlink"/>
+                </a:solidFill>
+                <a:latin typeface="Calibri"/>
+                <a:ea typeface="Calibri"/>
+                <a:cs typeface="Calibri"/>
+                <a:sym typeface="Calibri"/>
+                <a:hlinkClick r:id="rId5"/>
+              </a:rPr>
+              <a:t>https://twitter.com/hardmaru/status/1781161411974217803</a:t>
+            </a:r>
+            <a:r>
+              <a:rPr lang="en" sz="1000">
+                <a:latin typeface="Calibri"/>
+                <a:ea typeface="Calibri"/>
+                <a:cs typeface="Calibri"/>
+                <a:sym typeface="Calibri"/>
+              </a:rPr>
+              <a:t> </a:t>
+            </a:r>
+            <a:endParaRPr sz="1000">
+              <a:latin typeface="Calibri"/>
+              <a:ea typeface="Calibri"/>
+              <a:cs typeface="Calibri"/>
+              <a:sym typeface="Calibri"/>
+            </a:endParaRPr>
+          </a:p>
+        </p:txBody>
+      </p:sp>
+      <p:sp>
+        <p:nvSpPr>
+          <p:cNvPr id="84" name="Google Shape;84;p16"/>
+          <p:cNvSpPr txBox="1"/>
+          <p:nvPr/>
+        </p:nvSpPr>
+        <p:spPr>
+          <a:xfrm>
+            <a:off x="1471625" y="843275"/>
+            <a:ext cx="793800" cy="234000"/>
+          </a:xfrm>
+          <a:prstGeom prst="rect">
+            <a:avLst/>
+          </a:prstGeom>
+          <a:noFill/>
+          <a:ln>
+            <a:noFill/>
+          </a:ln>
+        </p:spPr>
+        <p:txBody>
+          <a:bodyPr spcFirstLastPara="1" wrap="square" lIns="9125" tIns="9125" rIns="9125" bIns="9125" anchor="t" anchorCtr="0">
+            <a:spAutoFit/>
+          </a:bodyPr>
+          <a:lstStyle/>
+          <a:p>
+            <a:pPr marL="0" lvl="0" indent="0" algn="l" rtl="0">
+              <a:spcBef>
+                <a:spcPts val="0"/>
+              </a:spcBef>
+              <a:spcAft>
+                <a:spcPts val="0"/>
+              </a:spcAft>
+              <a:buNone/>
+            </a:pPr>
+            <a:r>
+              <a:rPr lang="en" b="1">
+                <a:solidFill>
+                  <a:schemeClr val="dk2"/>
+                </a:solidFill>
+                <a:latin typeface="Calibri"/>
+                <a:ea typeface="Calibri"/>
+                <a:cs typeface="Calibri"/>
+                <a:sym typeface="Calibri"/>
+              </a:rPr>
+              <a:t>MMLU</a:t>
+            </a:r>
+            <a:endParaRPr b="1">
+              <a:solidFill>
+                <a:schemeClr val="dk2"/>
+              </a:solidFill>
+              <a:latin typeface="Calibri"/>
+              <a:ea typeface="Calibri"/>
+              <a:cs typeface="Calibri"/>
+              <a:sym typeface="Calibri"/>
+            </a:endParaRPr>
+          </a:p>
+        </p:txBody>
+      </p:sp>
     </p:spTree>
   </p:cSld>
   <p:clrMapOvr>
@@ -21638,7 +22127,7 @@
   <p:cSld>
     <p:spTree>
       <p:nvGrpSpPr>
-        <p:cNvPr id="1" name="Shape 84"/>
+        <p:cNvPr id="1" name="Shape 88"/>
         <p:cNvGrpSpPr/>
         <p:nvPr/>
       </p:nvGrpSpPr>
@@ -21652,7 +22141,7 @@
       </p:grpSpPr>
       <p:sp>
         <p:nvSpPr>
-          <p:cNvPr id="85" name="Google Shape;85;p17"/>
+          <p:cNvPr id="89" name="Google Shape;89;p17"/>
           <p:cNvSpPr txBox="1"/>
           <p:nvPr/>
         </p:nvSpPr>
@@ -21860,7 +22349,7 @@
       </p:sp>
       <p:sp>
         <p:nvSpPr>
-          <p:cNvPr id="86" name="Google Shape;86;p17"/>
+          <p:cNvPr id="90" name="Google Shape;90;p17"/>
           <p:cNvSpPr txBox="1"/>
           <p:nvPr/>
         </p:nvSpPr>
@@ -21918,7 +22407,7 @@
       </p:sp>
       <p:pic>
         <p:nvPicPr>
-          <p:cNvPr id="87" name="Google Shape;87;p17"/>
+          <p:cNvPr id="91" name="Google Shape;91;p17"/>
           <p:cNvPicPr preferRelativeResize="0"/>
           <p:nvPr/>
         </p:nvPicPr>
@@ -21951,7 +22440,7 @@
       </p:pic>
       <p:pic>
         <p:nvPicPr>
-          <p:cNvPr id="88" name="Google Shape;88;p17"/>
+          <p:cNvPr id="92" name="Google Shape;92;p17"/>
           <p:cNvPicPr preferRelativeResize="0"/>
           <p:nvPr/>
         </p:nvPicPr>
@@ -21984,20 +22473,20 @@
       </p:pic>
       <p:graphicFrame>
         <p:nvGraphicFramePr>
-          <p:cNvPr id="89" name="Google Shape;89;p17"/>
+          <p:cNvPr id="93" name="Google Shape;93;p17"/>
           <p:cNvGraphicFramePr/>
           <p:nvPr/>
         </p:nvGraphicFramePr>
         <p:xfrm>
           <a:off x="76200" y="1763250"/>
-          <a:ext cx="3000000" cy="3000000"/>
+          <a:ext cx="4377600" cy="1754023"/>
         </p:xfrm>
         <a:graphic>
           <a:graphicData uri="http://schemas.openxmlformats.org/drawingml/2006/table">
             <a:tbl>
               <a:tblPr>
                 <a:noFill/>
-                <a:tableStyleId>{4F5CC60F-1605-48FC-B505-207717700C0A}</a:tableStyleId>
+                <a:tableStyleId>{DC1A7E8A-FA1F-472F-937D-B6810B70F539}</a:tableStyleId>
               </a:tblPr>
               <a:tblGrid>
                 <a:gridCol w="966300">
@@ -25129,7 +25618,7 @@
       </p:graphicFrame>
       <p:pic>
         <p:nvPicPr>
-          <p:cNvPr id="90" name="Google Shape;90;p17"/>
+          <p:cNvPr id="94" name="Google Shape;94;p17"/>
           <p:cNvPicPr preferRelativeResize="0"/>
           <p:nvPr/>
         </p:nvPicPr>
@@ -25162,7 +25651,7 @@
       </p:pic>
       <p:pic>
         <p:nvPicPr>
-          <p:cNvPr id="91" name="Google Shape;91;p17"/>
+          <p:cNvPr id="95" name="Google Shape;95;p17"/>
           <p:cNvPicPr preferRelativeResize="0"/>
           <p:nvPr/>
         </p:nvPicPr>
@@ -25205,7 +25694,7 @@
   <p:cSld>
     <p:spTree>
       <p:nvGrpSpPr>
-        <p:cNvPr id="1" name="Shape 95"/>
+        <p:cNvPr id="1" name="Shape 99"/>
         <p:cNvGrpSpPr/>
         <p:nvPr/>
       </p:nvGrpSpPr>
@@ -25219,7 +25708,7 @@
       </p:grpSpPr>
       <p:sp>
         <p:nvSpPr>
-          <p:cNvPr id="96" name="Google Shape;96;p18"/>
+          <p:cNvPr id="100" name="Google Shape;100;p18"/>
           <p:cNvSpPr txBox="1"/>
           <p:nvPr/>
         </p:nvSpPr>
@@ -25277,7 +25766,7 @@
       </p:sp>
       <p:sp>
         <p:nvSpPr>
-          <p:cNvPr id="97" name="Google Shape;97;p18"/>
+          <p:cNvPr id="101" name="Google Shape;101;p18"/>
           <p:cNvSpPr txBox="1"/>
           <p:nvPr/>
         </p:nvSpPr>
@@ -25440,7 +25929,7 @@
       </p:sp>
       <p:pic>
         <p:nvPicPr>
-          <p:cNvPr id="98" name="Google Shape;98;p18"/>
+          <p:cNvPr id="102" name="Google Shape;102;p18"/>
           <p:cNvPicPr preferRelativeResize="0"/>
           <p:nvPr/>
         </p:nvPicPr>
@@ -25490,7 +25979,7 @@
   <p:cSld>
     <p:spTree>
       <p:nvGrpSpPr>
-        <p:cNvPr id="1" name="Shape 102"/>
+        <p:cNvPr id="1" name="Shape 106"/>
         <p:cNvGrpSpPr/>
         <p:nvPr/>
       </p:nvGrpSpPr>
@@ -25504,7 +25993,7 @@
       </p:grpSpPr>
       <p:sp>
         <p:nvSpPr>
-          <p:cNvPr id="103" name="Google Shape;103;p19"/>
+          <p:cNvPr id="107" name="Google Shape;107;p19"/>
           <p:cNvSpPr txBox="1"/>
           <p:nvPr/>
         </p:nvSpPr>
@@ -25570,20 +26059,20 @@
       </p:sp>
       <p:graphicFrame>
         <p:nvGraphicFramePr>
-          <p:cNvPr id="104" name="Google Shape;104;p19"/>
+          <p:cNvPr id="108" name="Google Shape;108;p19"/>
           <p:cNvGraphicFramePr/>
           <p:nvPr/>
         </p:nvGraphicFramePr>
         <p:xfrm>
           <a:off x="78380" y="1204841"/>
-          <a:ext cx="3000000" cy="3000000"/>
+          <a:ext cx="8996550" cy="3797215"/>
         </p:xfrm>
         <a:graphic>
           <a:graphicData uri="http://schemas.openxmlformats.org/drawingml/2006/table">
             <a:tbl>
               <a:tblPr>
                 <a:noFill/>
-                <a:tableStyleId>{D2E89EDF-12D4-4CF6-AA76-F3B78ECD36D2}</a:tableStyleId>
+                <a:tableStyleId>{E5D42D35-940C-43C0-9942-5879A4FD67D3}</a:tableStyleId>
               </a:tblPr>
               <a:tblGrid>
                 <a:gridCol w="2998850">
@@ -25722,7 +26211,11 @@
                       <a:endParaRPr sz="1200"/>
                     </a:p>
                   </a:txBody>
-                  <a:tcPr marL="9125" marR="9125" marT="9125" marB="9125" anchor="ctr"/>
+                  <a:tcPr marL="9125" marR="9125" marT="9125" marB="9125" anchor="ctr">
+                    <a:solidFill>
+                      <a:srgbClr val="FFF2CC"/>
+                    </a:solidFill>
+                  </a:tcPr>
                 </a:tc>
                 <a:tc>
                   <a:txBody>
@@ -25753,7 +26246,11 @@
                       </a:endParaRPr>
                     </a:p>
                   </a:txBody>
-                  <a:tcPr marL="9125" marR="9125" marT="9125" marB="9125" anchor="ctr"/>
+                  <a:tcPr marL="9125" marR="9125" marT="9125" marB="9125" anchor="ctr">
+                    <a:solidFill>
+                      <a:srgbClr val="FFF2CC"/>
+                    </a:solidFill>
+                  </a:tcPr>
                 </a:tc>
                 <a:tc>
                   <a:txBody>
@@ -25776,7 +26273,11 @@
                       <a:endParaRPr sz="1200"/>
                     </a:p>
                   </a:txBody>
-                  <a:tcPr marL="9125" marR="9125" marT="9125" marB="9125" anchor="ctr"/>
+                  <a:tcPr marL="9125" marR="9125" marT="9125" marB="9125" anchor="ctr">
+                    <a:solidFill>
+                      <a:srgbClr val="FFF2CC"/>
+                    </a:solidFill>
+                  </a:tcPr>
                 </a:tc>
                 <a:extLst>
                   <a:ext uri="{0D108BD9-81ED-4DB2-BD59-A6C34878D82A}">
@@ -25814,7 +26315,11 @@
                       </a:endParaRPr>
                     </a:p>
                   </a:txBody>
-                  <a:tcPr marL="9125" marR="9125" marT="9125" marB="9125" anchor="ctr"/>
+                  <a:tcPr marL="9125" marR="9125" marT="9125" marB="9125" anchor="ctr">
+                    <a:solidFill>
+                      <a:srgbClr val="FFF2CC"/>
+                    </a:solidFill>
+                  </a:tcPr>
                 </a:tc>
                 <a:tc>
                   <a:txBody>
@@ -25850,7 +26355,11 @@
                       </a:endParaRPr>
                     </a:p>
                   </a:txBody>
-                  <a:tcPr marL="9125" marR="9125" marT="9125" marB="9125" anchor="ctr"/>
+                  <a:tcPr marL="9125" marR="9125" marT="9125" marB="9125" anchor="ctr">
+                    <a:solidFill>
+                      <a:srgbClr val="FFF2CC"/>
+                    </a:solidFill>
+                  </a:tcPr>
                 </a:tc>
                 <a:tc>
                   <a:txBody>
@@ -25873,7 +26382,11 @@
                       <a:endParaRPr sz="1200"/>
                     </a:p>
                   </a:txBody>
-                  <a:tcPr marL="9125" marR="9125" marT="9125" marB="9125" anchor="ctr"/>
+                  <a:tcPr marL="9125" marR="9125" marT="9125" marB="9125" anchor="ctr">
+                    <a:solidFill>
+                      <a:srgbClr val="FFF2CC"/>
+                    </a:solidFill>
+                  </a:tcPr>
                 </a:tc>
                 <a:extLst>
                   <a:ext uri="{0D108BD9-81ED-4DB2-BD59-A6C34878D82A}">
@@ -25903,7 +26416,11 @@
                       <a:endParaRPr sz="1200"/>
                     </a:p>
                   </a:txBody>
-                  <a:tcPr marL="9125" marR="9125" marT="9125" marB="9125" anchor="ctr"/>
+                  <a:tcPr marL="9125" marR="9125" marT="9125" marB="9125" anchor="ctr">
+                    <a:solidFill>
+                      <a:srgbClr val="FFF2CC"/>
+                    </a:solidFill>
+                  </a:tcPr>
                 </a:tc>
                 <a:tc>
                   <a:txBody>
@@ -25938,7 +26455,11 @@
                       </a:endParaRPr>
                     </a:p>
                   </a:txBody>
-                  <a:tcPr marL="9125" marR="9125" marT="9125" marB="9125" anchor="ctr"/>
+                  <a:tcPr marL="9125" marR="9125" marT="9125" marB="9125" anchor="ctr">
+                    <a:solidFill>
+                      <a:srgbClr val="FFF2CC"/>
+                    </a:solidFill>
+                  </a:tcPr>
                 </a:tc>
                 <a:tc>
                   <a:txBody>
@@ -25968,7 +26489,11 @@
                       <a:endParaRPr sz="1200"/>
                     </a:p>
                   </a:txBody>
-                  <a:tcPr marL="9125" marR="9125" marT="9125" marB="9125" anchor="ctr"/>
+                  <a:tcPr marL="9125" marR="9125" marT="9125" marB="9125" anchor="ctr">
+                    <a:solidFill>
+                      <a:srgbClr val="FFF2CC"/>
+                    </a:solidFill>
+                  </a:tcPr>
                 </a:tc>
                 <a:extLst>
                   <a:ext uri="{0D108BD9-81ED-4DB2-BD59-A6C34878D82A}">
@@ -26005,7 +26530,11 @@
                       <a:endParaRPr sz="1200"/>
                     </a:p>
                   </a:txBody>
-                  <a:tcPr marL="9125" marR="9125" marT="9125" marB="9125" anchor="ctr"/>
+                  <a:tcPr marL="9125" marR="9125" marT="9125" marB="9125" anchor="ctr">
+                    <a:solidFill>
+                      <a:srgbClr val="FFF2CC"/>
+                    </a:solidFill>
+                  </a:tcPr>
                 </a:tc>
                 <a:tc>
                   <a:txBody>
@@ -26043,7 +26572,11 @@
                       </a:endParaRPr>
                     </a:p>
                   </a:txBody>
-                  <a:tcPr marL="9125" marR="9125" marT="9125" marB="9125" anchor="ctr"/>
+                  <a:tcPr marL="9125" marR="9125" marT="9125" marB="9125" anchor="ctr">
+                    <a:solidFill>
+                      <a:srgbClr val="FFF2CC"/>
+                    </a:solidFill>
+                  </a:tcPr>
                 </a:tc>
                 <a:tc>
                   <a:txBody>
@@ -26066,7 +26599,11 @@
                       <a:endParaRPr sz="1200"/>
                     </a:p>
                   </a:txBody>
-                  <a:tcPr marL="9125" marR="9125" marT="9125" marB="9125" anchor="ctr"/>
+                  <a:tcPr marL="9125" marR="9125" marT="9125" marB="9125" anchor="ctr">
+                    <a:solidFill>
+                      <a:srgbClr val="FFF2CC"/>
+                    </a:solidFill>
+                  </a:tcPr>
                 </a:tc>
                 <a:extLst>
                   <a:ext uri="{0D108BD9-81ED-4DB2-BD59-A6C34878D82A}">
@@ -26096,7 +26633,11 @@
                       <a:endParaRPr sz="1200"/>
                     </a:p>
                   </a:txBody>
-                  <a:tcPr marL="9125" marR="9125" marT="9125" marB="9125" anchor="ctr"/>
+                  <a:tcPr marL="9125" marR="9125" marT="9125" marB="9125" anchor="ctr">
+                    <a:solidFill>
+                      <a:srgbClr val="FFF2CC"/>
+                    </a:solidFill>
+                  </a:tcPr>
                 </a:tc>
                 <a:tc>
                   <a:txBody>
@@ -26119,7 +26660,11 @@
                       <a:endParaRPr sz="1200"/>
                     </a:p>
                   </a:txBody>
-                  <a:tcPr marL="9125" marR="9125" marT="9125" marB="9125" anchor="ctr"/>
+                  <a:tcPr marL="9125" marR="9125" marT="9125" marB="9125" anchor="ctr">
+                    <a:solidFill>
+                      <a:srgbClr val="FFF2CC"/>
+                    </a:solidFill>
+                  </a:tcPr>
                 </a:tc>
                 <a:tc>
                   <a:txBody>
@@ -26151,7 +26696,11 @@
                       <a:endParaRPr sz="1200"/>
                     </a:p>
                   </a:txBody>
-                  <a:tcPr marL="9125" marR="9125" marT="9125" marB="9125" anchor="ctr"/>
+                  <a:tcPr marL="9125" marR="9125" marT="9125" marB="9125" anchor="ctr">
+                    <a:solidFill>
+                      <a:srgbClr val="FFF2CC"/>
+                    </a:solidFill>
+                  </a:tcPr>
                 </a:tc>
                 <a:extLst>
                   <a:ext uri="{0D108BD9-81ED-4DB2-BD59-A6C34878D82A}">
@@ -26181,7 +26730,11 @@
                       <a:endParaRPr sz="1200"/>
                     </a:p>
                   </a:txBody>
-                  <a:tcPr marL="9125" marR="9125" marT="9125" marB="9125" anchor="ctr"/>
+                  <a:tcPr marL="9125" marR="9125" marT="9125" marB="9125" anchor="ctr">
+                    <a:solidFill>
+                      <a:srgbClr val="FFF2CC"/>
+                    </a:solidFill>
+                  </a:tcPr>
                 </a:tc>
                 <a:tc>
                   <a:txBody>
@@ -26204,7 +26757,11 @@
                       <a:endParaRPr sz="1200"/>
                     </a:p>
                   </a:txBody>
-                  <a:tcPr marL="9125" marR="9125" marT="9125" marB="9125" anchor="ctr"/>
+                  <a:tcPr marL="9125" marR="9125" marT="9125" marB="9125" anchor="ctr">
+                    <a:solidFill>
+                      <a:srgbClr val="FFF2CC"/>
+                    </a:solidFill>
+                  </a:tcPr>
                 </a:tc>
                 <a:tc>
                   <a:txBody>
@@ -26227,7 +26784,11 @@
                       <a:endParaRPr sz="1200"/>
                     </a:p>
                   </a:txBody>
-                  <a:tcPr marL="9125" marR="9125" marT="9125" marB="9125" anchor="ctr"/>
+                  <a:tcPr marL="9125" marR="9125" marT="9125" marB="9125" anchor="ctr">
+                    <a:solidFill>
+                      <a:srgbClr val="FFF2CC"/>
+                    </a:solidFill>
+                  </a:tcPr>
                 </a:tc>
                 <a:extLst>
                   <a:ext uri="{0D108BD9-81ED-4DB2-BD59-A6C34878D82A}">
@@ -26257,7 +26818,11 @@
                       <a:endParaRPr sz="1200"/>
                     </a:p>
                   </a:txBody>
-                  <a:tcPr marL="9125" marR="9125" marT="9125" marB="9125" anchor="ctr"/>
+                  <a:tcPr marL="9125" marR="9125" marT="9125" marB="9125" anchor="ctr">
+                    <a:solidFill>
+                      <a:srgbClr val="FFF2CC"/>
+                    </a:solidFill>
+                  </a:tcPr>
                 </a:tc>
                 <a:tc>
                   <a:txBody>
@@ -26288,7 +26853,11 @@
                       </a:endParaRPr>
                     </a:p>
                   </a:txBody>
-                  <a:tcPr marL="9125" marR="9125" marT="9125" marB="9125" anchor="ctr"/>
+                  <a:tcPr marL="9125" marR="9125" marT="9125" marB="9125" anchor="ctr">
+                    <a:solidFill>
+                      <a:srgbClr val="FFF2CC"/>
+                    </a:solidFill>
+                  </a:tcPr>
                 </a:tc>
                 <a:tc>
                   <a:txBody>
@@ -26320,7 +26889,11 @@
                       <a:endParaRPr sz="1200"/>
                     </a:p>
                   </a:txBody>
-                  <a:tcPr marL="9125" marR="9125" marT="9125" marB="9125" anchor="ctr"/>
+                  <a:tcPr marL="9125" marR="9125" marT="9125" marB="9125" anchor="ctr">
+                    <a:solidFill>
+                      <a:srgbClr val="FFF2CC"/>
+                    </a:solidFill>
+                  </a:tcPr>
                 </a:tc>
                 <a:extLst>
                   <a:ext uri="{0D108BD9-81ED-4DB2-BD59-A6C34878D82A}">
@@ -26350,7 +26923,11 @@
                       <a:endParaRPr sz="1200"/>
                     </a:p>
                   </a:txBody>
-                  <a:tcPr marL="9125" marR="9125" marT="9125" marB="9125" anchor="ctr"/>
+                  <a:tcPr marL="9125" marR="9125" marT="9125" marB="9125" anchor="ctr">
+                    <a:solidFill>
+                      <a:srgbClr val="FFF2CC"/>
+                    </a:solidFill>
+                  </a:tcPr>
                 </a:tc>
                 <a:tc>
                   <a:txBody>
@@ -26381,7 +26958,11 @@
                       </a:endParaRPr>
                     </a:p>
                   </a:txBody>
-                  <a:tcPr marL="9125" marR="9125" marT="9125" marB="9125" anchor="ctr"/>
+                  <a:tcPr marL="9125" marR="9125" marT="9125" marB="9125" anchor="ctr">
+                    <a:solidFill>
+                      <a:srgbClr val="FFF2CC"/>
+                    </a:solidFill>
+                  </a:tcPr>
                 </a:tc>
                 <a:tc>
                   <a:txBody>
@@ -26417,7 +26998,11 @@
                       </a:endParaRPr>
                     </a:p>
                   </a:txBody>
-                  <a:tcPr marL="9125" marR="9125" marT="9125" marB="9125" anchor="ctr"/>
+                  <a:tcPr marL="9125" marR="9125" marT="9125" marB="9125" anchor="ctr">
+                    <a:solidFill>
+                      <a:srgbClr val="FFF2CC"/>
+                    </a:solidFill>
+                  </a:tcPr>
                 </a:tc>
                 <a:extLst>
                   <a:ext uri="{0D108BD9-81ED-4DB2-BD59-A6C34878D82A}">
@@ -26447,7 +27032,11 @@
                       <a:endParaRPr sz="1200"/>
                     </a:p>
                   </a:txBody>
-                  <a:tcPr marL="9125" marR="9125" marT="9125" marB="9125" anchor="ctr"/>
+                  <a:tcPr marL="9125" marR="9125" marT="9125" marB="9125" anchor="ctr">
+                    <a:solidFill>
+                      <a:srgbClr val="FFF2CC"/>
+                    </a:solidFill>
+                  </a:tcPr>
                 </a:tc>
                 <a:tc>
                   <a:txBody>
@@ -26478,7 +27067,11 @@
                       </a:endParaRPr>
                     </a:p>
                   </a:txBody>
-                  <a:tcPr marL="9125" marR="9125" marT="9125" marB="9125" anchor="ctr"/>
+                  <a:tcPr marL="9125" marR="9125" marT="9125" marB="9125" anchor="ctr">
+                    <a:solidFill>
+                      <a:srgbClr val="FFF2CC"/>
+                    </a:solidFill>
+                  </a:tcPr>
                 </a:tc>
                 <a:tc>
                   <a:txBody>
@@ -26501,7 +27094,11 @@
                       <a:endParaRPr sz="1200"/>
                     </a:p>
                   </a:txBody>
-                  <a:tcPr marL="9125" marR="9125" marT="9125" marB="9125" anchor="ctr"/>
+                  <a:tcPr marL="9125" marR="9125" marT="9125" marB="9125" anchor="ctr">
+                    <a:solidFill>
+                      <a:srgbClr val="FFF2CC"/>
+                    </a:solidFill>
+                  </a:tcPr>
                 </a:tc>
                 <a:extLst>
                   <a:ext uri="{0D108BD9-81ED-4DB2-BD59-A6C34878D82A}">
@@ -26543,7 +27140,11 @@
                       <a:endParaRPr sz="1200"/>
                     </a:p>
                   </a:txBody>
-                  <a:tcPr marL="9125" marR="9125" marT="9125" marB="9125" anchor="ctr"/>
+                  <a:tcPr marL="9125" marR="9125" marT="9125" marB="9125" anchor="ctr">
+                    <a:solidFill>
+                      <a:srgbClr val="FFF2CC"/>
+                    </a:solidFill>
+                  </a:tcPr>
                 </a:tc>
                 <a:tc>
                   <a:txBody>
@@ -26589,7 +27190,11 @@
                       </a:endParaRPr>
                     </a:p>
                   </a:txBody>
-                  <a:tcPr marL="9125" marR="9125" marT="9125" marB="9125" anchor="ctr"/>
+                  <a:tcPr marL="9125" marR="9125" marT="9125" marB="9125" anchor="ctr">
+                    <a:solidFill>
+                      <a:srgbClr val="FFF2CC"/>
+                    </a:solidFill>
+                  </a:tcPr>
                 </a:tc>
                 <a:tc>
                   <a:txBody>
@@ -26621,7 +27226,11 @@
                       <a:endParaRPr sz="1200"/>
                     </a:p>
                   </a:txBody>
-                  <a:tcPr marL="9125" marR="9125" marT="9125" marB="9125" anchor="ctr"/>
+                  <a:tcPr marL="9125" marR="9125" marT="9125" marB="9125" anchor="ctr">
+                    <a:solidFill>
+                      <a:srgbClr val="FFF2CC"/>
+                    </a:solidFill>
+                  </a:tcPr>
                 </a:tc>
                 <a:extLst>
                   <a:ext uri="{0D108BD9-81ED-4DB2-BD59-A6C34878D82A}">
@@ -26658,7 +27267,11 @@
                       <a:endParaRPr sz="1200"/>
                     </a:p>
                   </a:txBody>
-                  <a:tcPr marL="9125" marR="9125" marT="9125" marB="9125" anchor="ctr"/>
+                  <a:tcPr marL="9125" marR="9125" marT="9125" marB="9125" anchor="ctr">
+                    <a:solidFill>
+                      <a:srgbClr val="FFF2CC"/>
+                    </a:solidFill>
+                  </a:tcPr>
                 </a:tc>
                 <a:tc>
                   <a:txBody>
@@ -26681,7 +27294,11 @@
                       <a:endParaRPr sz="1200"/>
                     </a:p>
                   </a:txBody>
-                  <a:tcPr marL="9125" marR="9125" marT="9125" marB="9125" anchor="ctr"/>
+                  <a:tcPr marL="9125" marR="9125" marT="9125" marB="9125" anchor="ctr">
+                    <a:solidFill>
+                      <a:srgbClr val="FFF2CC"/>
+                    </a:solidFill>
+                  </a:tcPr>
                 </a:tc>
                 <a:tc>
                   <a:txBody>
@@ -26711,7 +27328,11 @@
                       <a:endParaRPr sz="1200"/>
                     </a:p>
                   </a:txBody>
-                  <a:tcPr marL="9125" marR="9125" marT="9125" marB="9125" anchor="ctr"/>
+                  <a:tcPr marL="9125" marR="9125" marT="9125" marB="9125" anchor="ctr">
+                    <a:solidFill>
+                      <a:srgbClr val="FFF2CC"/>
+                    </a:solidFill>
+                  </a:tcPr>
                 </a:tc>
                 <a:extLst>
                   <a:ext uri="{0D108BD9-81ED-4DB2-BD59-A6C34878D82A}">
@@ -26741,7 +27362,11 @@
                       <a:endParaRPr sz="1200"/>
                     </a:p>
                   </a:txBody>
-                  <a:tcPr marL="9125" marR="9125" marT="9125" marB="9125" anchor="ctr"/>
+                  <a:tcPr marL="9125" marR="9125" marT="9125" marB="9125" anchor="ctr">
+                    <a:solidFill>
+                      <a:srgbClr val="FFF2CC"/>
+                    </a:solidFill>
+                  </a:tcPr>
                 </a:tc>
                 <a:tc>
                   <a:txBody>
@@ -26776,7 +27401,11 @@
                       </a:endParaRPr>
                     </a:p>
                   </a:txBody>
-                  <a:tcPr marL="9125" marR="9125" marT="9125" marB="9125" anchor="ctr"/>
+                  <a:tcPr marL="9125" marR="9125" marT="9125" marB="9125" anchor="ctr">
+                    <a:solidFill>
+                      <a:srgbClr val="FFF2CC"/>
+                    </a:solidFill>
+                  </a:tcPr>
                 </a:tc>
                 <a:tc>
                   <a:txBody>
@@ -26808,7 +27437,11 @@
                       <a:endParaRPr sz="1200"/>
                     </a:p>
                   </a:txBody>
-                  <a:tcPr marL="9125" marR="9125" marT="9125" marB="9125" anchor="ctr"/>
+                  <a:tcPr marL="9125" marR="9125" marT="9125" marB="9125" anchor="ctr">
+                    <a:solidFill>
+                      <a:srgbClr val="FFF2CC"/>
+                    </a:solidFill>
+                  </a:tcPr>
                 </a:tc>
                 <a:extLst>
                   <a:ext uri="{0D108BD9-81ED-4DB2-BD59-A6C34878D82A}">
@@ -26822,13 +27455,13 @@
       </p:graphicFrame>
       <p:sp>
         <p:nvSpPr>
-          <p:cNvPr id="105" name="Google Shape;105;p19"/>
+          <p:cNvPr id="109" name="Google Shape;109;p19"/>
           <p:cNvSpPr txBox="1"/>
           <p:nvPr/>
         </p:nvSpPr>
         <p:spPr>
           <a:xfrm>
-            <a:off x="6355475" y="42700"/>
+            <a:off x="6318736" y="57396"/>
             <a:ext cx="2741700" cy="1071300"/>
           </a:xfrm>
           <a:prstGeom prst="rect">
@@ -27023,7 +27656,7 @@
   <p:cSld>
     <p:spTree>
       <p:nvGrpSpPr>
-        <p:cNvPr id="1" name="Shape 109"/>
+        <p:cNvPr id="1" name="Shape 113"/>
         <p:cNvGrpSpPr/>
         <p:nvPr/>
       </p:nvGrpSpPr>
@@ -27037,7 +27670,7 @@
       </p:grpSpPr>
       <p:sp>
         <p:nvSpPr>
-          <p:cNvPr id="110" name="Google Shape;110;p20"/>
+          <p:cNvPr id="114" name="Google Shape;114;p20"/>
           <p:cNvSpPr txBox="1"/>
           <p:nvPr/>
         </p:nvSpPr>
@@ -27148,7 +27781,7 @@
       </p:sp>
       <p:sp>
         <p:nvSpPr>
-          <p:cNvPr id="111" name="Google Shape;111;p20"/>
+          <p:cNvPr id="115" name="Google Shape;115;p20"/>
           <p:cNvSpPr txBox="1"/>
           <p:nvPr/>
         </p:nvSpPr>
@@ -27206,7 +27839,7 @@
       </p:sp>
       <p:sp>
         <p:nvSpPr>
-          <p:cNvPr id="112" name="Google Shape;112;p20"/>
+          <p:cNvPr id="116" name="Google Shape;116;p20"/>
           <p:cNvSpPr txBox="1"/>
           <p:nvPr/>
         </p:nvSpPr>
@@ -27362,7 +27995,7 @@
       </p:sp>
       <p:pic>
         <p:nvPicPr>
-          <p:cNvPr id="113" name="Google Shape;113;p20"/>
+          <p:cNvPr id="117" name="Google Shape;117;p20"/>
           <p:cNvPicPr preferRelativeResize="0"/>
           <p:nvPr/>
         </p:nvPicPr>
@@ -27381,7 +28014,7 @@
         </p:blipFill>
         <p:spPr>
           <a:xfrm>
-            <a:off x="267725" y="1428825"/>
+            <a:off x="921700" y="1017350"/>
             <a:ext cx="2338624" cy="3508803"/>
           </a:xfrm>
           <a:prstGeom prst="rect">
@@ -27395,7 +28028,7 @@
       </p:pic>
       <p:pic>
         <p:nvPicPr>
-          <p:cNvPr id="114" name="Google Shape;114;p20"/>
+          <p:cNvPr id="118" name="Google Shape;118;p20"/>
           <p:cNvPicPr preferRelativeResize="0"/>
           <p:nvPr/>
         </p:nvPicPr>
@@ -27428,7 +28061,7 @@
       </p:pic>
       <p:sp>
         <p:nvSpPr>
-          <p:cNvPr id="115" name="Google Shape;115;p20"/>
+          <p:cNvPr id="119" name="Google Shape;119;p20"/>
           <p:cNvSpPr txBox="1"/>
           <p:nvPr/>
         </p:nvSpPr>
@@ -27497,7 +28130,7 @@
   <p:cSld>
     <p:spTree>
       <p:nvGrpSpPr>
-        <p:cNvPr id="1" name="Shape 119"/>
+        <p:cNvPr id="1" name="Shape 123"/>
         <p:cNvGrpSpPr/>
         <p:nvPr/>
       </p:nvGrpSpPr>
@@ -27511,14 +28144,14 @@
       </p:grpSpPr>
       <p:sp>
         <p:nvSpPr>
-          <p:cNvPr id="120" name="Google Shape;120;p21"/>
+          <p:cNvPr id="124" name="Google Shape;124;p21"/>
           <p:cNvSpPr txBox="1"/>
           <p:nvPr/>
         </p:nvSpPr>
         <p:spPr>
           <a:xfrm>
             <a:off x="44925" y="537900"/>
-            <a:ext cx="4549800" cy="763500"/>
+            <a:ext cx="4846800" cy="763500"/>
           </a:xfrm>
           <a:prstGeom prst="rect">
             <a:avLst/>
@@ -27552,9 +28185,9 @@
               <a:buNone/>
             </a:pPr>
             <a:r>
-              <a:rPr lang="en" sz="1300">
-                <a:solidFill>
-                  <a:schemeClr val="dk1"/>
+              <a:rPr lang="en" sz="1300" b="1">
+                <a:solidFill>
+                  <a:srgbClr val="3C78D8"/>
                 </a:solidFill>
                 <a:latin typeface="Calibri"/>
                 <a:ea typeface="Calibri"/>
@@ -27563,9 +28196,9 @@
               </a:rPr>
               <a:t>gpt-3.5-turbo response time is ~2-4 sec</a:t>
             </a:r>
-            <a:endParaRPr sz="1300">
+            <a:endParaRPr sz="1300" b="1">
               <a:solidFill>
-                <a:schemeClr val="dk1"/>
+                <a:srgbClr val="3C78D8"/>
               </a:solidFill>
               <a:latin typeface="Calibri"/>
               <a:ea typeface="Calibri"/>
@@ -27584,20 +28217,20 @@
               <a:buNone/>
             </a:pPr>
             <a:r>
-              <a:rPr lang="en" sz="1300">
-                <a:solidFill>
-                  <a:schemeClr val="dk1"/>
-                </a:solidFill>
-                <a:latin typeface="Calibri"/>
-                <a:ea typeface="Calibri"/>
-                <a:cs typeface="Calibri"/>
-                <a:sym typeface="Calibri"/>
-              </a:rPr>
-              <a:t>gpt-4 can be much slower (10-40 sec and more)</a:t>
-            </a:r>
-            <a:endParaRPr sz="1300">
+              <a:rPr lang="en" sz="1300" b="1">
+                <a:solidFill>
+                  <a:srgbClr val="FF0000"/>
+                </a:solidFill>
+                <a:latin typeface="Calibri"/>
+                <a:ea typeface="Calibri"/>
+                <a:cs typeface="Calibri"/>
+                <a:sym typeface="Calibri"/>
+              </a:rPr>
+              <a:t>gpt-4 is much slower (10-40 sec and more)</a:t>
+            </a:r>
+            <a:endParaRPr sz="1300" b="1">
               <a:solidFill>
-                <a:schemeClr val="dk1"/>
+                <a:srgbClr val="FF0000"/>
               </a:solidFill>
               <a:latin typeface="Calibri"/>
               <a:ea typeface="Calibri"/>
@@ -27699,7 +28332,7 @@
       </p:sp>
       <p:sp>
         <p:nvSpPr>
-          <p:cNvPr id="121" name="Google Shape;121;p21"/>
+          <p:cNvPr id="125" name="Google Shape;125;p21"/>
           <p:cNvSpPr txBox="1"/>
           <p:nvPr/>
         </p:nvSpPr>
@@ -27757,7 +28390,7 @@
       </p:sp>
       <p:pic>
         <p:nvPicPr>
-          <p:cNvPr id="122" name="Google Shape;122;p21"/>
+          <p:cNvPr id="126" name="Google Shape;126;p21"/>
           <p:cNvPicPr preferRelativeResize="0"/>
           <p:nvPr/>
         </p:nvPicPr>
@@ -27776,15 +28409,60 @@
         </p:blipFill>
         <p:spPr>
           <a:xfrm>
-            <a:off x="54649" y="1498500"/>
-            <a:ext cx="5932150" cy="2201374"/>
+            <a:off x="54650" y="1498500"/>
+            <a:ext cx="4868424" cy="1806624"/>
           </a:xfrm>
           <a:prstGeom prst="rect">
             <a:avLst/>
           </a:prstGeom>
           <a:noFill/>
-          <a:ln>
-            <a:noFill/>
+          <a:ln w="9525" cap="flat" cmpd="sng">
+            <a:solidFill>
+              <a:srgbClr val="FF0000"/>
+            </a:solidFill>
+            <a:prstDash val="solid"/>
+            <a:round/>
+            <a:headEnd type="none" w="sm" len="sm"/>
+            <a:tailEnd type="none" w="sm" len="sm"/>
+          </a:ln>
+        </p:spPr>
+      </p:pic>
+      <p:pic>
+        <p:nvPicPr>
+          <p:cNvPr id="127" name="Google Shape;127;p21"/>
+          <p:cNvPicPr preferRelativeResize="0"/>
+          <p:nvPr/>
+        </p:nvPicPr>
+        <p:blipFill>
+          <a:blip r:embed="rId6" cstate="email">
+            <a:alphaModFix/>
+            <a:extLst>
+              <a:ext uri="{28A0092B-C50C-407E-A947-70E740481C1C}">
+                <a14:useLocalDpi xmlns:a14="http://schemas.microsoft.com/office/drawing/2010/main"/>
+              </a:ext>
+            </a:extLst>
+          </a:blip>
+          <a:stretch>
+            <a:fillRect/>
+          </a:stretch>
+        </p:blipFill>
+        <p:spPr>
+          <a:xfrm>
+            <a:off x="76201" y="3309552"/>
+            <a:ext cx="4846874" cy="1521767"/>
+          </a:xfrm>
+          <a:prstGeom prst="rect">
+            <a:avLst/>
+          </a:prstGeom>
+          <a:noFill/>
+          <a:ln w="9525" cap="flat" cmpd="sng">
+            <a:solidFill>
+              <a:srgbClr val="FF0000"/>
+            </a:solidFill>
+            <a:prstDash val="solid"/>
+            <a:round/>
+            <a:headEnd type="none" w="sm" len="sm"/>
+            <a:tailEnd type="none" w="sm" len="sm"/>
           </a:ln>
         </p:spPr>
       </p:pic>
@@ -27801,7 +28479,7 @@
   <p:cSld>
     <p:spTree>
       <p:nvGrpSpPr>
-        <p:cNvPr id="1" name="Shape 126"/>
+        <p:cNvPr id="1" name="Shape 131"/>
         <p:cNvGrpSpPr/>
         <p:nvPr/>
       </p:nvGrpSpPr>
@@ -27815,7 +28493,7 @@
       </p:grpSpPr>
       <p:sp>
         <p:nvSpPr>
-          <p:cNvPr id="127" name="Google Shape;127;p22"/>
+          <p:cNvPr id="132" name="Google Shape;132;p22"/>
           <p:cNvSpPr txBox="1"/>
           <p:nvPr/>
         </p:nvSpPr>
@@ -27856,6 +28534,18 @@
               <a:buNone/>
             </a:pPr>
             <a:r>
+              <a:rPr lang="en" sz="1300" b="1">
+                <a:solidFill>
+                  <a:srgbClr val="FF0000"/>
+                </a:solidFill>
+                <a:latin typeface="Calibri"/>
+                <a:ea typeface="Calibri"/>
+                <a:cs typeface="Calibri"/>
+                <a:sym typeface="Calibri"/>
+              </a:rPr>
+              <a:t>Andrej Karpathy - llm.c</a:t>
+            </a:r>
+            <a:r>
               <a:rPr lang="en" sz="1300">
                 <a:solidFill>
                   <a:schemeClr val="dk1"/>
@@ -27865,7 +28555,7 @@
                 <a:cs typeface="Calibri"/>
                 <a:sym typeface="Calibri"/>
               </a:rPr>
-              <a:t>Andrej Karpathy - llm.c is now as fast as PyTorch</a:t>
+              <a:t> is now as fast as PyTorch</a:t>
             </a:r>
             <a:endParaRPr sz="1300">
               <a:solidFill>
@@ -27955,7 +28645,7 @@
       </p:sp>
       <p:sp>
         <p:nvSpPr>
-          <p:cNvPr id="128" name="Google Shape;128;p22"/>
+          <p:cNvPr id="133" name="Google Shape;133;p22"/>
           <p:cNvSpPr txBox="1"/>
           <p:nvPr/>
         </p:nvSpPr>
@@ -28013,7 +28703,7 @@
       </p:sp>
       <p:sp>
         <p:nvSpPr>
-          <p:cNvPr id="129" name="Google Shape;129;p22"/>
+          <p:cNvPr id="134" name="Google Shape;134;p22"/>
           <p:cNvSpPr txBox="1"/>
           <p:nvPr/>
         </p:nvSpPr>
@@ -28086,7 +28776,7 @@
                 <a:cs typeface="Calibri"/>
                 <a:sym typeface="Calibri"/>
               </a:rPr>
-              <a:t>GPT-4 now significantly smarter and more pleasant to use</a:t>
+              <a:t>"GPT-4 now significantly smarter and more pleasant to use"</a:t>
             </a:r>
             <a:endParaRPr sz="1300">
               <a:solidFill>
@@ -28174,6 +28864,18 @@
               <a:buNone/>
             </a:pPr>
             <a:r>
+              <a:rPr lang="en" sz="1300" b="1">
+                <a:solidFill>
+                  <a:srgbClr val="FF0000"/>
+                </a:solidFill>
+                <a:latin typeface="Calibri"/>
+                <a:ea typeface="Calibri"/>
+                <a:cs typeface="Calibri"/>
+                <a:sym typeface="Calibri"/>
+              </a:rPr>
+              <a:t>GPT-4-Turbo has reclaimed the No. 1 spot </a:t>
+            </a:r>
+            <a:r>
               <a:rPr lang="en" sz="1300">
                 <a:solidFill>
                   <a:schemeClr val="dk1"/>
@@ -28183,7 +28885,7 @@
                 <a:cs typeface="Calibri"/>
                 <a:sym typeface="Calibri"/>
               </a:rPr>
-              <a:t>GPT-4-Turbo has reclaimed the No. 1 spot on the Arena leaderboard, outperforming others across diverse domains like Coding, Longer Query, and Multilingual capabilities. It performs even stronger in English-only prompts and conversations containing code snippets.</a:t>
+              <a:t>on the Arena leaderboard, outperforming others across diverse domains like Coding, Longer Query, and Multilingual capabilities. It performs even stronger in English-only prompts and conversations containing code snippets.</a:t>
             </a:r>
             <a:endParaRPr sz="1300">
               <a:solidFill>
@@ -28199,7 +28901,7 @@
       </p:sp>
       <p:sp>
         <p:nvSpPr>
-          <p:cNvPr id="130" name="Google Shape;130;p22"/>
+          <p:cNvPr id="135" name="Google Shape;135;p22"/>
           <p:cNvSpPr txBox="1"/>
           <p:nvPr/>
         </p:nvSpPr>
@@ -29007,7 +29709,7 @@
       </p:sp>
       <p:sp>
         <p:nvSpPr>
-          <p:cNvPr id="131" name="Google Shape;131;p22"/>
+          <p:cNvPr id="136" name="Google Shape;136;p22"/>
           <p:cNvSpPr txBox="1"/>
           <p:nvPr/>
         </p:nvSpPr>
@@ -29082,7 +29784,7 @@
       </p:sp>
       <p:sp>
         <p:nvSpPr>
-          <p:cNvPr id="132" name="Google Shape;132;p22"/>
+          <p:cNvPr id="137" name="Google Shape;137;p22"/>
           <p:cNvSpPr txBox="1"/>
           <p:nvPr/>
         </p:nvSpPr>
